--- a/app/slides/output/ai-engineering-portfolio.pptx
+++ b/app/slides/output/ai-engineering-portfolio.pptx
@@ -2040,7 +2040,7 @@
             <a:avLst/>
           </a:prstGeom>
           <a:solidFill>
-            <a:srgbClr val="000814"/>
+            <a:srgbClr val="020617"/>
           </a:solidFill>
           <a:ln/>
         </p:spPr>
@@ -2060,7 +2060,7 @@
             <a:avLst/>
           </a:prstGeom>
           <a:solidFill>
-            <a:srgbClr val="FFC300"/>
+            <a:srgbClr val="00EAFF"/>
           </a:solidFill>
           <a:ln/>
         </p:spPr>
@@ -2080,7 +2080,7 @@
             <a:avLst/>
           </a:prstGeom>
           <a:solidFill>
-            <a:srgbClr val="FFC300"/>
+            <a:srgbClr val="00EAFF"/>
           </a:solidFill>
           <a:ln/>
         </p:spPr>
@@ -2102,7 +2102,7 @@
           <a:noFill/>
           <a:ln w="3810">
             <a:solidFill>
-              <a:srgbClr val="001D3D">
+              <a:srgbClr val="0F172A">
                 <a:alpha val="20000"/>
               </a:srgbClr>
             </a:solidFill>
@@ -2127,7 +2127,7 @@
           <a:noFill/>
           <a:ln w="3810">
             <a:solidFill>
-              <a:srgbClr val="001D3D">
+              <a:srgbClr val="0F172A">
                 <a:alpha val="20000"/>
               </a:srgbClr>
             </a:solidFill>
@@ -2152,7 +2152,7 @@
           <a:noFill/>
           <a:ln w="3810">
             <a:solidFill>
-              <a:srgbClr val="001D3D">
+              <a:srgbClr val="0F172A">
                 <a:alpha val="20000"/>
               </a:srgbClr>
             </a:solidFill>
@@ -2177,7 +2177,7 @@
           <a:noFill/>
           <a:ln w="3810">
             <a:solidFill>
-              <a:srgbClr val="001D3D">
+              <a:srgbClr val="0F172A">
                 <a:alpha val="20000"/>
               </a:srgbClr>
             </a:solidFill>
@@ -2202,7 +2202,7 @@
           <a:noFill/>
           <a:ln w="3810">
             <a:solidFill>
-              <a:srgbClr val="001D3D">
+              <a:srgbClr val="0F172A">
                 <a:alpha val="20000"/>
               </a:srgbClr>
             </a:solidFill>
@@ -2227,7 +2227,7 @@
           <a:noFill/>
           <a:ln w="3810">
             <a:solidFill>
-              <a:srgbClr val="001D3D">
+              <a:srgbClr val="0F172A">
                 <a:alpha val="20000"/>
               </a:srgbClr>
             </a:solidFill>
@@ -2252,7 +2252,7 @@
           <a:noFill/>
           <a:ln w="3810">
             <a:solidFill>
-              <a:srgbClr val="001D3D">
+              <a:srgbClr val="0F172A">
                 <a:alpha val="20000"/>
               </a:srgbClr>
             </a:solidFill>
@@ -2277,7 +2277,7 @@
           <a:noFill/>
           <a:ln w="3810">
             <a:solidFill>
-              <a:srgbClr val="001D3D">
+              <a:srgbClr val="0F172A">
                 <a:alpha val="20000"/>
               </a:srgbClr>
             </a:solidFill>
@@ -2302,7 +2302,7 @@
           <a:noFill/>
           <a:ln w="3810">
             <a:solidFill>
-              <a:srgbClr val="001D3D">
+              <a:srgbClr val="0F172A">
                 <a:alpha val="20000"/>
               </a:srgbClr>
             </a:solidFill>
@@ -2339,11 +2339,11 @@
             <a:r>
               <a:rPr lang="en-US" sz="5400" b="1" dirty="0">
                 <a:solidFill>
-                  <a:srgbClr val="FFD60A"/>
-                </a:solidFill>
-                <a:latin typeface="Arial" pitchFamily="34" charset="0"/>
-                <a:ea typeface="Arial" pitchFamily="34" charset="-122"/>
-                <a:cs typeface="Arial" pitchFamily="34" charset="-120"/>
+                  <a:srgbClr val="F8FAFC"/>
+                </a:solidFill>
+                <a:latin typeface="Segoe UI" pitchFamily="34" charset="0"/>
+                <a:ea typeface="Segoe UI" pitchFamily="34" charset="-122"/>
+                <a:cs typeface="Segoe UI" pitchFamily="34" charset="-120"/>
               </a:rPr>
               <a:t>AI Engineering Portfolio</a:t>
             </a:r>
@@ -2378,11 +2378,11 @@
             <a:r>
               <a:rPr lang="en-US" sz="2200" dirty="0">
                 <a:solidFill>
-                  <a:srgbClr val="9A8C98"/>
-                </a:solidFill>
-                <a:latin typeface="Arial" pitchFamily="34" charset="0"/>
-                <a:ea typeface="Arial" pitchFamily="34" charset="-122"/>
-                <a:cs typeface="Arial" pitchFamily="34" charset="-120"/>
+                  <a:srgbClr val="94A3B8"/>
+                </a:solidFill>
+                <a:latin typeface="Segoe UI" pitchFamily="34" charset="0"/>
+                <a:ea typeface="Segoe UI" pitchFamily="34" charset="-122"/>
+                <a:cs typeface="Segoe UI" pitchFamily="34" charset="-120"/>
               </a:rPr>
               <a:t>Local LLM with RAG, Fine-tuning &amp; Tool Calling</a:t>
             </a:r>
@@ -2405,7 +2405,7 @@
             <a:avLst/>
           </a:prstGeom>
           <a:solidFill>
-            <a:srgbClr val="FFC300"/>
+            <a:srgbClr val="00EAFF"/>
           </a:solidFill>
           <a:ln/>
         </p:spPr>
@@ -2437,11 +2437,11 @@
             <a:r>
               <a:rPr lang="en-US" sz="1300" dirty="0">
                 <a:solidFill>
-                  <a:srgbClr val="9A8C98"/>
-                </a:solidFill>
-                <a:latin typeface="Arial" pitchFamily="34" charset="0"/>
-                <a:ea typeface="Arial" pitchFamily="34" charset="-122"/>
-                <a:cs typeface="Arial" pitchFamily="34" charset="-120"/>
+                  <a:srgbClr val="94A3B8"/>
+                </a:solidFill>
+                <a:latin typeface="Segoe UI" pitchFamily="34" charset="0"/>
+                <a:ea typeface="Segoe UI" pitchFamily="34" charset="-122"/>
+                <a:cs typeface="Segoe UI" pitchFamily="34" charset="-120"/>
               </a:rPr>
               <a:t>RTX 3050 4GB  |  MSI Katana GF66  |  Windows 11</a:t>
             </a:r>
@@ -2476,11 +2476,11 @@
             <a:r>
               <a:rPr lang="en-US" sz="1200" dirty="0">
                 <a:solidFill>
-                  <a:srgbClr val="9A8C98"/>
-                </a:solidFill>
-                <a:latin typeface="Arial" pitchFamily="34" charset="0"/>
-                <a:ea typeface="Arial" pitchFamily="34" charset="-122"/>
-                <a:cs typeface="Arial" pitchFamily="34" charset="-120"/>
+                  <a:srgbClr val="94A3B8"/>
+                </a:solidFill>
+                <a:latin typeface="Segoe UI" pitchFamily="34" charset="0"/>
+                <a:ea typeface="Segoe UI" pitchFamily="34" charset="-122"/>
+                <a:cs typeface="Segoe UI" pitchFamily="34" charset="-120"/>
               </a:rPr>
               <a:t>June 2025</a:t>
             </a:r>
@@ -2505,7 +2505,7 @@
             </a:avLst>
           </a:prstGeom>
           <a:solidFill>
-            <a:srgbClr val="FFC300"/>
+            <a:srgbClr val="00EAFF"/>
           </a:solidFill>
           <a:ln/>
         </p:spPr>
@@ -2537,11 +2537,11 @@
             <a:r>
               <a:rPr lang="en-US" sz="1100" b="1" dirty="0">
                 <a:solidFill>
-                  <a:srgbClr val="000814"/>
-                </a:solidFill>
-                <a:latin typeface="Arial" pitchFamily="34" charset="0"/>
-                <a:ea typeface="Arial" pitchFamily="34" charset="-122"/>
-                <a:cs typeface="Arial" pitchFamily="34" charset="-120"/>
+                  <a:srgbClr val="020617"/>
+                </a:solidFill>
+                <a:latin typeface="Segoe UI" pitchFamily="34" charset="0"/>
+                <a:ea typeface="Segoe UI" pitchFamily="34" charset="-122"/>
+                <a:cs typeface="Segoe UI" pitchFamily="34" charset="-120"/>
               </a:rPr>
               <a:t>NO CLOUD</a:t>
             </a:r>
@@ -2589,7 +2589,7 @@
             <a:avLst/>
           </a:prstGeom>
           <a:solidFill>
-            <a:srgbClr val="000814"/>
+            <a:srgbClr val="020617"/>
           </a:solidFill>
           <a:ln/>
         </p:spPr>
@@ -2609,7 +2609,7 @@
             <a:avLst/>
           </a:prstGeom>
           <a:solidFill>
-            <a:srgbClr val="FFC300"/>
+            <a:srgbClr val="00EAFF"/>
           </a:solidFill>
           <a:ln/>
         </p:spPr>
@@ -2641,11 +2641,11 @@
             <a:r>
               <a:rPr lang="en-US" sz="2800" b="1" dirty="0">
                 <a:solidFill>
-                  <a:srgbClr val="FFD60A"/>
-                </a:solidFill>
-                <a:latin typeface="Arial" pitchFamily="34" charset="0"/>
-                <a:ea typeface="Arial" pitchFamily="34" charset="-122"/>
-                <a:cs typeface="Arial" pitchFamily="34" charset="-120"/>
+                  <a:srgbClr val="F8FAFC"/>
+                </a:solidFill>
+                <a:latin typeface="Segoe UI" pitchFamily="34" charset="0"/>
+                <a:ea typeface="Segoe UI" pitchFamily="34" charset="-122"/>
+                <a:cs typeface="Segoe UI" pitchFamily="34" charset="-120"/>
               </a:rPr>
               <a:t>6 Tools with Real Backends</a:t>
             </a:r>
@@ -2670,7 +2670,7 @@
             </a:avLst>
           </a:prstGeom>
           <a:solidFill>
-            <a:srgbClr val="001D3D"/>
+            <a:srgbClr val="0F172A"/>
           </a:solidFill>
           <a:ln/>
         </p:spPr>
@@ -2702,11 +2702,11 @@
             <a:r>
               <a:rPr lang="en-US" sz="1200" b="1" dirty="0">
                 <a:solidFill>
-                  <a:srgbClr val="FFC300"/>
-                </a:solidFill>
-                <a:latin typeface="Arial" pitchFamily="34" charset="0"/>
-                <a:ea typeface="Arial" pitchFamily="34" charset="-122"/>
-                <a:cs typeface="Arial" pitchFamily="34" charset="-120"/>
+                  <a:srgbClr val="00EAFF"/>
+                </a:solidFill>
+                <a:latin typeface="Segoe UI" pitchFamily="34" charset="0"/>
+                <a:ea typeface="Segoe UI" pitchFamily="34" charset="-122"/>
+                <a:cs typeface="Segoe UI" pitchFamily="34" charset="-120"/>
               </a:rPr>
               <a:t>search_docs</a:t>
             </a:r>
@@ -2731,7 +2731,7 @@
             </a:avLst>
           </a:prstGeom>
           <a:solidFill>
-            <a:srgbClr val="000814"/>
+            <a:srgbClr val="020617"/>
           </a:solidFill>
           <a:ln/>
         </p:spPr>
@@ -2763,11 +2763,11 @@
             <a:r>
               <a:rPr lang="en-US" sz="900" b="1" dirty="0">
                 <a:solidFill>
-                  <a:srgbClr val="FFD60A"/>
-                </a:solidFill>
-                <a:latin typeface="Arial" pitchFamily="34" charset="0"/>
-                <a:ea typeface="Arial" pitchFamily="34" charset="-122"/>
-                <a:cs typeface="Arial" pitchFamily="34" charset="-120"/>
+                  <a:srgbClr val="F8FAFC"/>
+                </a:solidFill>
+                <a:latin typeface="Segoe UI" pitchFamily="34" charset="0"/>
+                <a:ea typeface="Segoe UI" pitchFamily="34" charset="-122"/>
+                <a:cs typeface="Segoe UI" pitchFamily="34" charset="-120"/>
               </a:rPr>
               <a:t>RAG API :8000</a:t>
             </a:r>
@@ -2802,11 +2802,11 @@
             <a:r>
               <a:rPr lang="en-US" sz="1000" dirty="0">
                 <a:solidFill>
-                  <a:srgbClr val="9A8C98"/>
-                </a:solidFill>
-                <a:latin typeface="Arial" pitchFamily="34" charset="0"/>
-                <a:ea typeface="Arial" pitchFamily="34" charset="-122"/>
-                <a:cs typeface="Arial" pitchFamily="34" charset="-120"/>
+                  <a:srgbClr val="94A3B8"/>
+                </a:solidFill>
+                <a:latin typeface="Segoe UI" pitchFamily="34" charset="0"/>
+                <a:ea typeface="Segoe UI" pitchFamily="34" charset="-122"/>
+                <a:cs typeface="Segoe UI" pitchFamily="34" charset="-120"/>
               </a:rPr>
               <a:t>Vector search in knowledge base</a:t>
             </a:r>
@@ -2831,7 +2831,7 @@
             </a:avLst>
           </a:prstGeom>
           <a:solidFill>
-            <a:srgbClr val="001D3D"/>
+            <a:srgbClr val="0F172A"/>
           </a:solidFill>
           <a:ln/>
         </p:spPr>
@@ -2863,11 +2863,11 @@
             <a:r>
               <a:rPr lang="en-US" sz="1200" b="1" dirty="0">
                 <a:solidFill>
-                  <a:srgbClr val="FFC300"/>
-                </a:solidFill>
-                <a:latin typeface="Arial" pitchFamily="34" charset="0"/>
-                <a:ea typeface="Arial" pitchFamily="34" charset="-122"/>
-                <a:cs typeface="Arial" pitchFamily="34" charset="-120"/>
+                  <a:srgbClr val="00EAFF"/>
+                </a:solidFill>
+                <a:latin typeface="Segoe UI" pitchFamily="34" charset="0"/>
+                <a:ea typeface="Segoe UI" pitchFamily="34" charset="-122"/>
+                <a:cs typeface="Segoe UI" pitchFamily="34" charset="-120"/>
               </a:rPr>
               <a:t>list_models</a:t>
             </a:r>
@@ -2892,7 +2892,7 @@
             </a:avLst>
           </a:prstGeom>
           <a:solidFill>
-            <a:srgbClr val="000814"/>
+            <a:srgbClr val="020617"/>
           </a:solidFill>
           <a:ln/>
         </p:spPr>
@@ -2924,11 +2924,11 @@
             <a:r>
               <a:rPr lang="en-US" sz="900" b="1" dirty="0">
                 <a:solidFill>
-                  <a:srgbClr val="FFD60A"/>
-                </a:solidFill>
-                <a:latin typeface="Arial" pitchFamily="34" charset="0"/>
-                <a:ea typeface="Arial" pitchFamily="34" charset="-122"/>
-                <a:cs typeface="Arial" pitchFamily="34" charset="-120"/>
+                  <a:srgbClr val="F8FAFC"/>
+                </a:solidFill>
+                <a:latin typeface="Segoe UI" pitchFamily="34" charset="0"/>
+                <a:ea typeface="Segoe UI" pitchFamily="34" charset="-122"/>
+                <a:cs typeface="Segoe UI" pitchFamily="34" charset="-120"/>
               </a:rPr>
               <a:t>Ollama :11434</a:t>
             </a:r>
@@ -2963,11 +2963,11 @@
             <a:r>
               <a:rPr lang="en-US" sz="1000" dirty="0">
                 <a:solidFill>
-                  <a:srgbClr val="9A8C98"/>
-                </a:solidFill>
-                <a:latin typeface="Arial" pitchFamily="34" charset="0"/>
-                <a:ea typeface="Arial" pitchFamily="34" charset="-122"/>
-                <a:cs typeface="Arial" pitchFamily="34" charset="-120"/>
+                  <a:srgbClr val="94A3B8"/>
+                </a:solidFill>
+                <a:latin typeface="Segoe UI" pitchFamily="34" charset="0"/>
+                <a:ea typeface="Segoe UI" pitchFamily="34" charset="-122"/>
+                <a:cs typeface="Segoe UI" pitchFamily="34" charset="-120"/>
               </a:rPr>
               <a:t>List available LLM models</a:t>
             </a:r>
@@ -2992,7 +2992,7 @@
             </a:avLst>
           </a:prstGeom>
           <a:solidFill>
-            <a:srgbClr val="001D3D"/>
+            <a:srgbClr val="0F172A"/>
           </a:solidFill>
           <a:ln/>
         </p:spPr>
@@ -3024,11 +3024,11 @@
             <a:r>
               <a:rPr lang="en-US" sz="1200" b="1" dirty="0">
                 <a:solidFill>
-                  <a:srgbClr val="FFC300"/>
-                </a:solidFill>
-                <a:latin typeface="Arial" pitchFamily="34" charset="0"/>
-                <a:ea typeface="Arial" pitchFamily="34" charset="-122"/>
-                <a:cs typeface="Arial" pitchFamily="34" charset="-120"/>
+                  <a:srgbClr val="00EAFF"/>
+                </a:solidFill>
+                <a:latin typeface="Segoe UI" pitchFamily="34" charset="0"/>
+                <a:ea typeface="Segoe UI" pitchFamily="34" charset="-122"/>
+                <a:cs typeface="Segoe UI" pitchFamily="34" charset="-120"/>
               </a:rPr>
               <a:t>get_gpu_stats</a:t>
             </a:r>
@@ -3053,7 +3053,7 @@
             </a:avLst>
           </a:prstGeom>
           <a:solidFill>
-            <a:srgbClr val="000814"/>
+            <a:srgbClr val="020617"/>
           </a:solidFill>
           <a:ln/>
         </p:spPr>
@@ -3085,11 +3085,11 @@
             <a:r>
               <a:rPr lang="en-US" sz="900" b="1" dirty="0">
                 <a:solidFill>
-                  <a:srgbClr val="FFD60A"/>
-                </a:solidFill>
-                <a:latin typeface="Arial" pitchFamily="34" charset="0"/>
-                <a:ea typeface="Arial" pitchFamily="34" charset="-122"/>
-                <a:cs typeface="Arial" pitchFamily="34" charset="-120"/>
+                  <a:srgbClr val="F8FAFC"/>
+                </a:solidFill>
+                <a:latin typeface="Segoe UI" pitchFamily="34" charset="0"/>
+                <a:ea typeface="Segoe UI" pitchFamily="34" charset="-122"/>
+                <a:cs typeface="Segoe UI" pitchFamily="34" charset="-120"/>
               </a:rPr>
               <a:t>nvidia-smi</a:t>
             </a:r>
@@ -3124,11 +3124,11 @@
             <a:r>
               <a:rPr lang="en-US" sz="1000" dirty="0">
                 <a:solidFill>
-                  <a:srgbClr val="9A8C98"/>
-                </a:solidFill>
-                <a:latin typeface="Arial" pitchFamily="34" charset="0"/>
-                <a:ea typeface="Arial" pitchFamily="34" charset="-122"/>
-                <a:cs typeface="Arial" pitchFamily="34" charset="-120"/>
+                  <a:srgbClr val="94A3B8"/>
+                </a:solidFill>
+                <a:latin typeface="Segoe UI" pitchFamily="34" charset="0"/>
+                <a:ea typeface="Segoe UI" pitchFamily="34" charset="-122"/>
+                <a:cs typeface="Segoe UI" pitchFamily="34" charset="-120"/>
               </a:rPr>
               <a:t>VRAM, utilization, temperature</a:t>
             </a:r>
@@ -3153,7 +3153,7 @@
             </a:avLst>
           </a:prstGeom>
           <a:solidFill>
-            <a:srgbClr val="001D3D"/>
+            <a:srgbClr val="0F172A"/>
           </a:solidFill>
           <a:ln/>
         </p:spPr>
@@ -3185,11 +3185,11 @@
             <a:r>
               <a:rPr lang="en-US" sz="1200" b="1" dirty="0">
                 <a:solidFill>
-                  <a:srgbClr val="FFC300"/>
-                </a:solidFill>
-                <a:latin typeface="Arial" pitchFamily="34" charset="0"/>
-                <a:ea typeface="Arial" pitchFamily="34" charset="-122"/>
-                <a:cs typeface="Arial" pitchFamily="34" charset="-120"/>
+                  <a:srgbClr val="00EAFF"/>
+                </a:solidFill>
+                <a:latin typeface="Segoe UI" pitchFamily="34" charset="0"/>
+                <a:ea typeface="Segoe UI" pitchFamily="34" charset="-122"/>
+                <a:cs typeface="Segoe UI" pitchFamily="34" charset="-120"/>
               </a:rPr>
               <a:t>get_collection_info</a:t>
             </a:r>
@@ -3214,7 +3214,7 @@
             </a:avLst>
           </a:prstGeom>
           <a:solidFill>
-            <a:srgbClr val="000814"/>
+            <a:srgbClr val="020617"/>
           </a:solidFill>
           <a:ln/>
         </p:spPr>
@@ -3246,11 +3246,11 @@
             <a:r>
               <a:rPr lang="en-US" sz="900" b="1" dirty="0">
                 <a:solidFill>
-                  <a:srgbClr val="FFD60A"/>
-                </a:solidFill>
-                <a:latin typeface="Arial" pitchFamily="34" charset="0"/>
-                <a:ea typeface="Arial" pitchFamily="34" charset="-122"/>
-                <a:cs typeface="Arial" pitchFamily="34" charset="-120"/>
+                  <a:srgbClr val="F8FAFC"/>
+                </a:solidFill>
+                <a:latin typeface="Segoe UI" pitchFamily="34" charset="0"/>
+                <a:ea typeface="Segoe UI" pitchFamily="34" charset="-122"/>
+                <a:cs typeface="Segoe UI" pitchFamily="34" charset="-120"/>
               </a:rPr>
               <a:t>Qdrant :6333</a:t>
             </a:r>
@@ -3285,11 +3285,11 @@
             <a:r>
               <a:rPr lang="en-US" sz="1000" dirty="0">
                 <a:solidFill>
-                  <a:srgbClr val="9A8C98"/>
-                </a:solidFill>
-                <a:latin typeface="Arial" pitchFamily="34" charset="0"/>
-                <a:ea typeface="Arial" pitchFamily="34" charset="-122"/>
-                <a:cs typeface="Arial" pitchFamily="34" charset="-120"/>
+                  <a:srgbClr val="94A3B8"/>
+                </a:solidFill>
+                <a:latin typeface="Segoe UI" pitchFamily="34" charset="0"/>
+                <a:ea typeface="Segoe UI" pitchFamily="34" charset="-122"/>
+                <a:cs typeface="Segoe UI" pitchFamily="34" charset="-120"/>
               </a:rPr>
               <a:t>Collection metadata &amp; stats</a:t>
             </a:r>
@@ -3314,7 +3314,7 @@
             </a:avLst>
           </a:prstGeom>
           <a:solidFill>
-            <a:srgbClr val="001D3D"/>
+            <a:srgbClr val="0F172A"/>
           </a:solidFill>
           <a:ln/>
         </p:spPr>
@@ -3346,11 +3346,11 @@
             <a:r>
               <a:rPr lang="en-US" sz="1200" b="1" dirty="0">
                 <a:solidFill>
-                  <a:srgbClr val="FFC300"/>
-                </a:solidFill>
-                <a:latin typeface="Arial" pitchFamily="34" charset="0"/>
-                <a:ea typeface="Arial" pitchFamily="34" charset="-122"/>
-                <a:cs typeface="Arial" pitchFamily="34" charset="-120"/>
+                  <a:srgbClr val="00EAFF"/>
+                </a:solidFill>
+                <a:latin typeface="Segoe UI" pitchFamily="34" charset="0"/>
+                <a:ea typeface="Segoe UI" pitchFamily="34" charset="-122"/>
+                <a:cs typeface="Segoe UI" pitchFamily="34" charset="-120"/>
               </a:rPr>
               <a:t>plot_metric</a:t>
             </a:r>
@@ -3375,7 +3375,7 @@
             </a:avLst>
           </a:prstGeom>
           <a:solidFill>
-            <a:srgbClr val="000814"/>
+            <a:srgbClr val="020617"/>
           </a:solidFill>
           <a:ln/>
         </p:spPr>
@@ -3407,11 +3407,11 @@
             <a:r>
               <a:rPr lang="en-US" sz="900" b="1" dirty="0">
                 <a:solidFill>
-                  <a:srgbClr val="FFD60A"/>
-                </a:solidFill>
-                <a:latin typeface="Arial" pitchFamily="34" charset="0"/>
-                <a:ea typeface="Arial" pitchFamily="34" charset="-122"/>
-                <a:cs typeface="Arial" pitchFamily="34" charset="-120"/>
+                  <a:srgbClr val="F8FAFC"/>
+                </a:solidFill>
+                <a:latin typeface="Segoe UI" pitchFamily="34" charset="0"/>
+                <a:ea typeface="Segoe UI" pitchFamily="34" charset="-122"/>
+                <a:cs typeface="Segoe UI" pitchFamily="34" charset="-120"/>
               </a:rPr>
               <a:t>matplotlib</a:t>
             </a:r>
@@ -3446,11 +3446,11 @@
             <a:r>
               <a:rPr lang="en-US" sz="1000" dirty="0">
                 <a:solidFill>
-                  <a:srgbClr val="9A8C98"/>
-                </a:solidFill>
-                <a:latin typeface="Arial" pitchFamily="34" charset="0"/>
-                <a:ea typeface="Arial" pitchFamily="34" charset="-122"/>
-                <a:cs typeface="Arial" pitchFamily="34" charset="-120"/>
+                  <a:srgbClr val="94A3B8"/>
+                </a:solidFill>
+                <a:latin typeface="Segoe UI" pitchFamily="34" charset="0"/>
+                <a:ea typeface="Segoe UI" pitchFamily="34" charset="-122"/>
+                <a:cs typeface="Segoe UI" pitchFamily="34" charset="-120"/>
               </a:rPr>
               <a:t>Generate PNG charts from CSV</a:t>
             </a:r>
@@ -3475,7 +3475,7 @@
             </a:avLst>
           </a:prstGeom>
           <a:solidFill>
-            <a:srgbClr val="001D3D"/>
+            <a:srgbClr val="0F172A"/>
           </a:solidFill>
           <a:ln/>
         </p:spPr>
@@ -3507,11 +3507,11 @@
             <a:r>
               <a:rPr lang="en-US" sz="1200" b="1" dirty="0">
                 <a:solidFill>
-                  <a:srgbClr val="FFC300"/>
-                </a:solidFill>
-                <a:latin typeface="Arial" pitchFamily="34" charset="0"/>
-                <a:ea typeface="Arial" pitchFamily="34" charset="-122"/>
-                <a:cs typeface="Arial" pitchFamily="34" charset="-120"/>
+                  <a:srgbClr val="00EAFF"/>
+                </a:solidFill>
+                <a:latin typeface="Segoe UI" pitchFamily="34" charset="0"/>
+                <a:ea typeface="Segoe UI" pitchFamily="34" charset="-122"/>
+                <a:cs typeface="Segoe UI" pitchFamily="34" charset="-120"/>
               </a:rPr>
               <a:t>write_document</a:t>
             </a:r>
@@ -3536,7 +3536,7 @@
             </a:avLst>
           </a:prstGeom>
           <a:solidFill>
-            <a:srgbClr val="000814"/>
+            <a:srgbClr val="020617"/>
           </a:solidFill>
           <a:ln/>
         </p:spPr>
@@ -3568,11 +3568,11 @@
             <a:r>
               <a:rPr lang="en-US" sz="900" b="1" dirty="0">
                 <a:solidFill>
-                  <a:srgbClr val="FFD60A"/>
-                </a:solidFill>
-                <a:latin typeface="Arial" pitchFamily="34" charset="0"/>
-                <a:ea typeface="Arial" pitchFamily="34" charset="-122"/>
-                <a:cs typeface="Arial" pitchFamily="34" charset="-120"/>
+                  <a:srgbClr val="F8FAFC"/>
+                </a:solidFill>
+                <a:latin typeface="Segoe UI" pitchFamily="34" charset="0"/>
+                <a:ea typeface="Segoe UI" pitchFamily="34" charset="-122"/>
+                <a:cs typeface="Segoe UI" pitchFamily="34" charset="-120"/>
               </a:rPr>
               <a:t>ReportLab</a:t>
             </a:r>
@@ -3607,11 +3607,11 @@
             <a:r>
               <a:rPr lang="en-US" sz="1000" dirty="0">
                 <a:solidFill>
-                  <a:srgbClr val="9A8C98"/>
-                </a:solidFill>
-                <a:latin typeface="Arial" pitchFamily="34" charset="0"/>
-                <a:ea typeface="Arial" pitchFamily="34" charset="-122"/>
-                <a:cs typeface="Arial" pitchFamily="34" charset="-120"/>
+                  <a:srgbClr val="94A3B8"/>
+                </a:solidFill>
+                <a:latin typeface="Segoe UI" pitchFamily="34" charset="0"/>
+                <a:ea typeface="Segoe UI" pitchFamily="34" charset="-122"/>
+                <a:cs typeface="Segoe UI" pitchFamily="34" charset="-120"/>
               </a:rPr>
               <a:t>Generate PDF reports</a:t>
             </a:r>
@@ -3646,11 +3646,11 @@
             <a:r>
               <a:rPr lang="en-US" sz="1300" b="1" dirty="0">
                 <a:solidFill>
-                  <a:srgbClr val="FFC300"/>
-                </a:solidFill>
-                <a:latin typeface="Arial" pitchFamily="34" charset="0"/>
-                <a:ea typeface="Arial" pitchFamily="34" charset="-122"/>
-                <a:cs typeface="Arial" pitchFamily="34" charset="-120"/>
+                  <a:srgbClr val="00EAFF"/>
+                </a:solidFill>
+                <a:latin typeface="Segoe UI" pitchFamily="34" charset="0"/>
+                <a:ea typeface="Segoe UI" pitchFamily="34" charset="-122"/>
+                <a:cs typeface="Segoe UI" pitchFamily="34" charset="-120"/>
               </a:rPr>
               <a:t>Agent Loop</a:t>
             </a:r>
@@ -3675,7 +3675,7 @@
             </a:avLst>
           </a:prstGeom>
           <a:solidFill>
-            <a:srgbClr val="001D3D"/>
+            <a:srgbClr val="0F172A"/>
           </a:solidFill>
           <a:ln/>
         </p:spPr>
@@ -3707,11 +3707,11 @@
             <a:r>
               <a:rPr lang="en-US" sz="1000" b="1" dirty="0">
                 <a:solidFill>
-                  <a:srgbClr val="FFD60A"/>
-                </a:solidFill>
-                <a:latin typeface="Arial" pitchFamily="34" charset="0"/>
-                <a:ea typeface="Arial" pitchFamily="34" charset="-122"/>
-                <a:cs typeface="Arial" pitchFamily="34" charset="-120"/>
+                  <a:srgbClr val="F8FAFC"/>
+                </a:solidFill>
+                <a:latin typeface="Segoe UI" pitchFamily="34" charset="0"/>
+                <a:ea typeface="Segoe UI" pitchFamily="34" charset="-122"/>
+                <a:cs typeface="Segoe UI" pitchFamily="34" charset="-120"/>
               </a:rPr>
               <a:t>Ollama</a:t>
             </a:r>
@@ -3746,11 +3746,11 @@
             <a:r>
               <a:rPr lang="en-US" sz="1200" dirty="0">
                 <a:solidFill>
-                  <a:srgbClr val="FFC300"/>
-                </a:solidFill>
-                <a:latin typeface="Arial" pitchFamily="34" charset="0"/>
-                <a:ea typeface="Arial" pitchFamily="34" charset="-122"/>
-                <a:cs typeface="Arial" pitchFamily="34" charset="-120"/>
+                  <a:srgbClr val="00EAFF"/>
+                </a:solidFill>
+                <a:latin typeface="Segoe UI" pitchFamily="34" charset="0"/>
+                <a:ea typeface="Segoe UI" pitchFamily="34" charset="-122"/>
+                <a:cs typeface="Segoe UI" pitchFamily="34" charset="-120"/>
               </a:rPr>
               <a:t>-&gt;</a:t>
             </a:r>
@@ -3775,7 +3775,7 @@
             </a:avLst>
           </a:prstGeom>
           <a:solidFill>
-            <a:srgbClr val="001D3D"/>
+            <a:srgbClr val="0F172A"/>
           </a:solidFill>
           <a:ln/>
         </p:spPr>
@@ -3807,11 +3807,11 @@
             <a:r>
               <a:rPr lang="en-US" sz="1000" b="1" dirty="0">
                 <a:solidFill>
-                  <a:srgbClr val="FFD60A"/>
-                </a:solidFill>
-                <a:latin typeface="Arial" pitchFamily="34" charset="0"/>
-                <a:ea typeface="Arial" pitchFamily="34" charset="-122"/>
-                <a:cs typeface="Arial" pitchFamily="34" charset="-120"/>
+                  <a:srgbClr val="F8FAFC"/>
+                </a:solidFill>
+                <a:latin typeface="Segoe UI" pitchFamily="34" charset="0"/>
+                <a:ea typeface="Segoe UI" pitchFamily="34" charset="-122"/>
+                <a:cs typeface="Segoe UI" pitchFamily="34" charset="-120"/>
               </a:rPr>
               <a:t>Parse tools</a:t>
             </a:r>
@@ -3846,11 +3846,11 @@
             <a:r>
               <a:rPr lang="en-US" sz="1200" dirty="0">
                 <a:solidFill>
-                  <a:srgbClr val="FFC300"/>
-                </a:solidFill>
-                <a:latin typeface="Arial" pitchFamily="34" charset="0"/>
-                <a:ea typeface="Arial" pitchFamily="34" charset="-122"/>
-                <a:cs typeface="Arial" pitchFamily="34" charset="-120"/>
+                  <a:srgbClr val="00EAFF"/>
+                </a:solidFill>
+                <a:latin typeface="Segoe UI" pitchFamily="34" charset="0"/>
+                <a:ea typeface="Segoe UI" pitchFamily="34" charset="-122"/>
+                <a:cs typeface="Segoe UI" pitchFamily="34" charset="-120"/>
               </a:rPr>
               <a:t>-&gt;</a:t>
             </a:r>
@@ -3875,7 +3875,7 @@
             </a:avLst>
           </a:prstGeom>
           <a:solidFill>
-            <a:srgbClr val="001D3D"/>
+            <a:srgbClr val="0F172A"/>
           </a:solidFill>
           <a:ln/>
         </p:spPr>
@@ -3907,11 +3907,11 @@
             <a:r>
               <a:rPr lang="en-US" sz="1000" b="1" dirty="0">
                 <a:solidFill>
-                  <a:srgbClr val="FFD60A"/>
-                </a:solidFill>
-                <a:latin typeface="Arial" pitchFamily="34" charset="0"/>
-                <a:ea typeface="Arial" pitchFamily="34" charset="-122"/>
-                <a:cs typeface="Arial" pitchFamily="34" charset="-120"/>
+                  <a:srgbClr val="F8FAFC"/>
+                </a:solidFill>
+                <a:latin typeface="Segoe UI" pitchFamily="34" charset="0"/>
+                <a:ea typeface="Segoe UI" pitchFamily="34" charset="-122"/>
+                <a:cs typeface="Segoe UI" pitchFamily="34" charset="-120"/>
               </a:rPr>
               <a:t>Execute</a:t>
             </a:r>
@@ -3946,11 +3946,11 @@
             <a:r>
               <a:rPr lang="en-US" sz="1200" dirty="0">
                 <a:solidFill>
-                  <a:srgbClr val="FFC300"/>
-                </a:solidFill>
-                <a:latin typeface="Arial" pitchFamily="34" charset="0"/>
-                <a:ea typeface="Arial" pitchFamily="34" charset="-122"/>
-                <a:cs typeface="Arial" pitchFamily="34" charset="-120"/>
+                  <a:srgbClr val="00EAFF"/>
+                </a:solidFill>
+                <a:latin typeface="Segoe UI" pitchFamily="34" charset="0"/>
+                <a:ea typeface="Segoe UI" pitchFamily="34" charset="-122"/>
+                <a:cs typeface="Segoe UI" pitchFamily="34" charset="-120"/>
               </a:rPr>
               <a:t>-&gt;</a:t>
             </a:r>
@@ -3975,7 +3975,7 @@
             </a:avLst>
           </a:prstGeom>
           <a:solidFill>
-            <a:srgbClr val="001D3D"/>
+            <a:srgbClr val="0F172A"/>
           </a:solidFill>
           <a:ln/>
         </p:spPr>
@@ -4007,11 +4007,11 @@
             <a:r>
               <a:rPr lang="en-US" sz="1000" b="1" dirty="0">
                 <a:solidFill>
-                  <a:srgbClr val="FFD60A"/>
-                </a:solidFill>
-                <a:latin typeface="Arial" pitchFamily="34" charset="0"/>
-                <a:ea typeface="Arial" pitchFamily="34" charset="-122"/>
-                <a:cs typeface="Arial" pitchFamily="34" charset="-120"/>
+                  <a:srgbClr val="F8FAFC"/>
+                </a:solidFill>
+                <a:latin typeface="Segoe UI" pitchFamily="34" charset="0"/>
+                <a:ea typeface="Segoe UI" pitchFamily="34" charset="-122"/>
+                <a:cs typeface="Segoe UI" pitchFamily="34" charset="-120"/>
               </a:rPr>
               <a:t>Feedback</a:t>
             </a:r>
@@ -4046,11 +4046,11 @@
             <a:r>
               <a:rPr lang="en-US" sz="1200" dirty="0">
                 <a:solidFill>
-                  <a:srgbClr val="FFC300"/>
-                </a:solidFill>
-                <a:latin typeface="Arial" pitchFamily="34" charset="0"/>
-                <a:ea typeface="Arial" pitchFamily="34" charset="-122"/>
-                <a:cs typeface="Arial" pitchFamily="34" charset="-120"/>
+                  <a:srgbClr val="00EAFF"/>
+                </a:solidFill>
+                <a:latin typeface="Segoe UI" pitchFamily="34" charset="0"/>
+                <a:ea typeface="Segoe UI" pitchFamily="34" charset="-122"/>
+                <a:cs typeface="Segoe UI" pitchFamily="34" charset="-120"/>
               </a:rPr>
               <a:t>-&gt;</a:t>
             </a:r>
@@ -4075,7 +4075,7 @@
             </a:avLst>
           </a:prstGeom>
           <a:solidFill>
-            <a:srgbClr val="001D3D"/>
+            <a:srgbClr val="0F172A"/>
           </a:solidFill>
           <a:ln/>
         </p:spPr>
@@ -4107,11 +4107,11 @@
             <a:r>
               <a:rPr lang="en-US" sz="1000" b="1" dirty="0">
                 <a:solidFill>
-                  <a:srgbClr val="FFD60A"/>
-                </a:solidFill>
-                <a:latin typeface="Arial" pitchFamily="34" charset="0"/>
-                <a:ea typeface="Arial" pitchFamily="34" charset="-122"/>
-                <a:cs typeface="Arial" pitchFamily="34" charset="-120"/>
+                  <a:srgbClr val="F8FAFC"/>
+                </a:solidFill>
+                <a:latin typeface="Segoe UI" pitchFamily="34" charset="0"/>
+                <a:ea typeface="Segoe UI" pitchFamily="34" charset="-122"/>
+                <a:cs typeface="Segoe UI" pitchFamily="34" charset="-120"/>
               </a:rPr>
               <a:t>Repeat</a:t>
             </a:r>
@@ -4146,11 +4146,11 @@
             <a:r>
               <a:rPr lang="en-US" sz="1000" dirty="0">
                 <a:solidFill>
-                  <a:srgbClr val="9A8C98"/>
-                </a:solidFill>
-                <a:latin typeface="Arial" pitchFamily="34" charset="0"/>
-                <a:ea typeface="Arial" pitchFamily="34" charset="-122"/>
-                <a:cs typeface="Arial" pitchFamily="34" charset="-120"/>
+                  <a:srgbClr val="94A3B8"/>
+                </a:solidFill>
+                <a:latin typeface="Segoe UI" pitchFamily="34" charset="0"/>
+                <a:ea typeface="Segoe UI" pitchFamily="34" charset="-122"/>
+                <a:cs typeface="Segoe UI" pitchFamily="34" charset="-120"/>
               </a:rPr>
               <a:t>10</a:t>
             </a:r>
@@ -4198,7 +4198,7 @@
             <a:avLst/>
           </a:prstGeom>
           <a:solidFill>
-            <a:srgbClr val="000814"/>
+            <a:srgbClr val="020617"/>
           </a:solidFill>
           <a:ln/>
         </p:spPr>
@@ -4218,7 +4218,7 @@
             <a:avLst/>
           </a:prstGeom>
           <a:solidFill>
-            <a:srgbClr val="FFC300"/>
+            <a:srgbClr val="00EAFF"/>
           </a:solidFill>
           <a:ln/>
         </p:spPr>
@@ -4250,11 +4250,11 @@
             <a:r>
               <a:rPr lang="en-US" sz="2800" b="1" dirty="0">
                 <a:solidFill>
-                  <a:srgbClr val="FFD60A"/>
-                </a:solidFill>
-                <a:latin typeface="Arial" pitchFamily="34" charset="0"/>
-                <a:ea typeface="Arial" pitchFamily="34" charset="-122"/>
-                <a:cs typeface="Arial" pitchFamily="34" charset="-120"/>
+                  <a:srgbClr val="F8FAFC"/>
+                </a:solidFill>
+                <a:latin typeface="Segoe UI" pitchFamily="34" charset="0"/>
+                <a:ea typeface="Segoe UI" pitchFamily="34" charset="-122"/>
+                <a:cs typeface="Segoe UI" pitchFamily="34" charset="-120"/>
               </a:rPr>
               <a:t>Multi-tool Chaining (Phase 5F)</a:t>
             </a:r>
@@ -4279,7 +4279,7 @@
             </a:avLst>
           </a:prstGeom>
           <a:solidFill>
-            <a:srgbClr val="001D3D"/>
+            <a:srgbClr val="0F172A"/>
           </a:solidFill>
           <a:ln/>
         </p:spPr>
@@ -4313,9 +4313,9 @@
                 <a:solidFill>
                   <a:srgbClr val="10B981"/>
                 </a:solidFill>
-                <a:latin typeface="Arial" pitchFamily="34" charset="0"/>
-                <a:ea typeface="Arial" pitchFamily="34" charset="-122"/>
-                <a:cs typeface="Arial" pitchFamily="34" charset="-120"/>
+                <a:latin typeface="Segoe UI" pitchFamily="34" charset="0"/>
+                <a:ea typeface="Segoe UI" pitchFamily="34" charset="-122"/>
+                <a:cs typeface="Segoe UI" pitchFamily="34" charset="-120"/>
               </a:rPr>
               <a:t>5/5</a:t>
             </a:r>
@@ -4350,11 +4350,11 @@
             <a:r>
               <a:rPr lang="en-US" sz="1000" b="1" dirty="0">
                 <a:solidFill>
-                  <a:srgbClr val="9A8C98"/>
-                </a:solidFill>
-                <a:latin typeface="Arial" pitchFamily="34" charset="0"/>
-                <a:ea typeface="Arial" pitchFamily="34" charset="-122"/>
-                <a:cs typeface="Arial" pitchFamily="34" charset="-120"/>
+                  <a:srgbClr val="94A3B8"/>
+                </a:solidFill>
+                <a:latin typeface="Segoe UI" pitchFamily="34" charset="0"/>
+                <a:ea typeface="Segoe UI" pitchFamily="34" charset="-122"/>
+                <a:cs typeface="Segoe UI" pitchFamily="34" charset="-120"/>
               </a:rPr>
               <a:t>PASS  |  Chaining rate 100%</a:t>
             </a:r>
@@ -4377,11 +4377,11 @@
             <a:avLst/>
           </a:prstGeom>
           <a:solidFill>
-            <a:srgbClr val="001D3D"/>
+            <a:srgbClr val="0F172A"/>
           </a:solidFill>
           <a:ln w="6350">
             <a:solidFill>
-              <a:srgbClr val="001D3D"/>
+              <a:srgbClr val="0F172A"/>
             </a:solidFill>
             <a:prstDash val="solid"/>
           </a:ln>
@@ -4414,11 +4414,11 @@
             <a:r>
               <a:rPr lang="en-US" sz="1000" b="1" dirty="0">
                 <a:solidFill>
-                  <a:srgbClr val="FFC300"/>
-                </a:solidFill>
-                <a:latin typeface="Arial" pitchFamily="34" charset="0"/>
-                <a:ea typeface="Arial" pitchFamily="34" charset="-122"/>
-                <a:cs typeface="Arial" pitchFamily="34" charset="-120"/>
+                  <a:srgbClr val="00EAFF"/>
+                </a:solidFill>
+                <a:latin typeface="Segoe UI" pitchFamily="34" charset="0"/>
+                <a:ea typeface="Segoe UI" pitchFamily="34" charset="-122"/>
+                <a:cs typeface="Segoe UI" pitchFamily="34" charset="-120"/>
               </a:rPr>
               <a:t>Task</a:t>
             </a:r>
@@ -4441,11 +4441,11 @@
             <a:avLst/>
           </a:prstGeom>
           <a:solidFill>
-            <a:srgbClr val="001D3D"/>
+            <a:srgbClr val="0F172A"/>
           </a:solidFill>
           <a:ln w="6350">
             <a:solidFill>
-              <a:srgbClr val="001D3D"/>
+              <a:srgbClr val="0F172A"/>
             </a:solidFill>
             <a:prstDash val="solid"/>
           </a:ln>
@@ -4478,11 +4478,11 @@
             <a:r>
               <a:rPr lang="en-US" sz="1000" b="1" dirty="0">
                 <a:solidFill>
-                  <a:srgbClr val="FFC300"/>
-                </a:solidFill>
-                <a:latin typeface="Arial" pitchFamily="34" charset="0"/>
-                <a:ea typeface="Arial" pitchFamily="34" charset="-122"/>
-                <a:cs typeface="Arial" pitchFamily="34" charset="-120"/>
+                  <a:srgbClr val="00EAFF"/>
+                </a:solidFill>
+                <a:latin typeface="Segoe UI" pitchFamily="34" charset="0"/>
+                <a:ea typeface="Segoe UI" pitchFamily="34" charset="-122"/>
+                <a:cs typeface="Segoe UI" pitchFamily="34" charset="-120"/>
               </a:rPr>
               <a:t>Tools expected</a:t>
             </a:r>
@@ -4505,11 +4505,11 @@
             <a:avLst/>
           </a:prstGeom>
           <a:solidFill>
-            <a:srgbClr val="001D3D"/>
+            <a:srgbClr val="0F172A"/>
           </a:solidFill>
           <a:ln w="6350">
             <a:solidFill>
-              <a:srgbClr val="001D3D"/>
+              <a:srgbClr val="0F172A"/>
             </a:solidFill>
             <a:prstDash val="solid"/>
           </a:ln>
@@ -4542,11 +4542,11 @@
             <a:r>
               <a:rPr lang="en-US" sz="1000" b="1" dirty="0">
                 <a:solidFill>
-                  <a:srgbClr val="FFC300"/>
-                </a:solidFill>
-                <a:latin typeface="Arial" pitchFamily="34" charset="0"/>
-                <a:ea typeface="Arial" pitchFamily="34" charset="-122"/>
-                <a:cs typeface="Arial" pitchFamily="34" charset="-120"/>
+                  <a:srgbClr val="00EAFF"/>
+                </a:solidFill>
+                <a:latin typeface="Segoe UI" pitchFamily="34" charset="0"/>
+                <a:ea typeface="Segoe UI" pitchFamily="34" charset="-122"/>
+                <a:cs typeface="Segoe UI" pitchFamily="34" charset="-120"/>
               </a:rPr>
               <a:t>Result</a:t>
             </a:r>
@@ -4569,11 +4569,11 @@
             <a:avLst/>
           </a:prstGeom>
           <a:solidFill>
-            <a:srgbClr val="001D3D"/>
+            <a:srgbClr val="0F172A"/>
           </a:solidFill>
           <a:ln w="6350">
             <a:solidFill>
-              <a:srgbClr val="001D3D"/>
+              <a:srgbClr val="0F172A"/>
             </a:solidFill>
             <a:prstDash val="solid"/>
           </a:ln>
@@ -4606,11 +4606,11 @@
             <a:r>
               <a:rPr lang="en-US" sz="1100" dirty="0">
                 <a:solidFill>
-                  <a:srgbClr val="FFD60A"/>
-                </a:solidFill>
-                <a:latin typeface="Arial" pitchFamily="34" charset="0"/>
-                <a:ea typeface="Arial" pitchFamily="34" charset="-122"/>
-                <a:cs typeface="Arial" pitchFamily="34" charset="-120"/>
+                  <a:srgbClr val="F8FAFC"/>
+                </a:solidFill>
+                <a:latin typeface="Segoe UI" pitchFamily="34" charset="0"/>
+                <a:ea typeface="Segoe UI" pitchFamily="34" charset="-122"/>
+                <a:cs typeface="Segoe UI" pitchFamily="34" charset="-120"/>
               </a:rPr>
               <a:t>GPU + Qdrant</a:t>
             </a:r>
@@ -4633,11 +4633,11 @@
             <a:avLst/>
           </a:prstGeom>
           <a:solidFill>
-            <a:srgbClr val="001D3D"/>
+            <a:srgbClr val="0F172A"/>
           </a:solidFill>
           <a:ln w="6350">
             <a:solidFill>
-              <a:srgbClr val="001D3D"/>
+              <a:srgbClr val="0F172A"/>
             </a:solidFill>
             <a:prstDash val="solid"/>
           </a:ln>
@@ -4670,11 +4670,11 @@
             <a:r>
               <a:rPr lang="en-US" sz="1100" dirty="0">
                 <a:solidFill>
-                  <a:srgbClr val="FFD60A"/>
-                </a:solidFill>
-                <a:latin typeface="Arial" pitchFamily="34" charset="0"/>
-                <a:ea typeface="Arial" pitchFamily="34" charset="-122"/>
-                <a:cs typeface="Arial" pitchFamily="34" charset="-120"/>
+                  <a:srgbClr val="F8FAFC"/>
+                </a:solidFill>
+                <a:latin typeface="Segoe UI" pitchFamily="34" charset="0"/>
+                <a:ea typeface="Segoe UI" pitchFamily="34" charset="-122"/>
+                <a:cs typeface="Segoe UI" pitchFamily="34" charset="-120"/>
               </a:rPr>
               <a:t>get_gpu_stats, get_collection_info</a:t>
             </a:r>
@@ -4697,11 +4697,11 @@
             <a:avLst/>
           </a:prstGeom>
           <a:solidFill>
-            <a:srgbClr val="001D3D"/>
+            <a:srgbClr val="0F172A"/>
           </a:solidFill>
           <a:ln w="6350">
             <a:solidFill>
-              <a:srgbClr val="001D3D"/>
+              <a:srgbClr val="0F172A"/>
             </a:solidFill>
             <a:prstDash val="solid"/>
           </a:ln>
@@ -4736,9 +4736,9 @@
                 <a:solidFill>
                   <a:srgbClr val="10B981"/>
                 </a:solidFill>
-                <a:latin typeface="Arial" pitchFamily="34" charset="0"/>
-                <a:ea typeface="Arial" pitchFamily="34" charset="-122"/>
-                <a:cs typeface="Arial" pitchFamily="34" charset="-120"/>
+                <a:latin typeface="Segoe UI" pitchFamily="34" charset="0"/>
+                <a:ea typeface="Segoe UI" pitchFamily="34" charset="-122"/>
+                <a:cs typeface="Segoe UI" pitchFamily="34" charset="-120"/>
               </a:rPr>
               <a:t>PASS</a:t>
             </a:r>
@@ -4761,11 +4761,11 @@
             <a:avLst/>
           </a:prstGeom>
           <a:solidFill>
-            <a:srgbClr val="000814"/>
+            <a:srgbClr val="020617"/>
           </a:solidFill>
           <a:ln w="6350">
             <a:solidFill>
-              <a:srgbClr val="001D3D"/>
+              <a:srgbClr val="0F172A"/>
             </a:solidFill>
             <a:prstDash val="solid"/>
           </a:ln>
@@ -4798,11 +4798,11 @@
             <a:r>
               <a:rPr lang="en-US" sz="1100" dirty="0">
                 <a:solidFill>
-                  <a:srgbClr val="FFD60A"/>
-                </a:solidFill>
-                <a:latin typeface="Arial" pitchFamily="34" charset="0"/>
-                <a:ea typeface="Arial" pitchFamily="34" charset="-122"/>
-                <a:cs typeface="Arial" pitchFamily="34" charset="-120"/>
+                  <a:srgbClr val="F8FAFC"/>
+                </a:solidFill>
+                <a:latin typeface="Segoe UI" pitchFamily="34" charset="0"/>
+                <a:ea typeface="Segoe UI" pitchFamily="34" charset="-122"/>
+                <a:cs typeface="Segoe UI" pitchFamily="34" charset="-120"/>
               </a:rPr>
               <a:t>Docs + Models</a:t>
             </a:r>
@@ -4825,11 +4825,11 @@
             <a:avLst/>
           </a:prstGeom>
           <a:solidFill>
-            <a:srgbClr val="000814"/>
+            <a:srgbClr val="020617"/>
           </a:solidFill>
           <a:ln w="6350">
             <a:solidFill>
-              <a:srgbClr val="001D3D"/>
+              <a:srgbClr val="0F172A"/>
             </a:solidFill>
             <a:prstDash val="solid"/>
           </a:ln>
@@ -4862,11 +4862,11 @@
             <a:r>
               <a:rPr lang="en-US" sz="1100" dirty="0">
                 <a:solidFill>
-                  <a:srgbClr val="FFD60A"/>
-                </a:solidFill>
-                <a:latin typeface="Arial" pitchFamily="34" charset="0"/>
-                <a:ea typeface="Arial" pitchFamily="34" charset="-122"/>
-                <a:cs typeface="Arial" pitchFamily="34" charset="-120"/>
+                  <a:srgbClr val="F8FAFC"/>
+                </a:solidFill>
+                <a:latin typeface="Segoe UI" pitchFamily="34" charset="0"/>
+                <a:ea typeface="Segoe UI" pitchFamily="34" charset="-122"/>
+                <a:cs typeface="Segoe UI" pitchFamily="34" charset="-120"/>
               </a:rPr>
               <a:t>search_docs, list_models</a:t>
             </a:r>
@@ -4889,11 +4889,11 @@
             <a:avLst/>
           </a:prstGeom>
           <a:solidFill>
-            <a:srgbClr val="000814"/>
+            <a:srgbClr val="020617"/>
           </a:solidFill>
           <a:ln w="6350">
             <a:solidFill>
-              <a:srgbClr val="001D3D"/>
+              <a:srgbClr val="0F172A"/>
             </a:solidFill>
             <a:prstDash val="solid"/>
           </a:ln>
@@ -4928,9 +4928,9 @@
                 <a:solidFill>
                   <a:srgbClr val="10B981"/>
                 </a:solidFill>
-                <a:latin typeface="Arial" pitchFamily="34" charset="0"/>
-                <a:ea typeface="Arial" pitchFamily="34" charset="-122"/>
-                <a:cs typeface="Arial" pitchFamily="34" charset="-120"/>
+                <a:latin typeface="Segoe UI" pitchFamily="34" charset="0"/>
+                <a:ea typeface="Segoe UI" pitchFamily="34" charset="-122"/>
+                <a:cs typeface="Segoe UI" pitchFamily="34" charset="-120"/>
               </a:rPr>
               <a:t>PASS</a:t>
             </a:r>
@@ -4953,11 +4953,11 @@
             <a:avLst/>
           </a:prstGeom>
           <a:solidFill>
-            <a:srgbClr val="001D3D"/>
+            <a:srgbClr val="0F172A"/>
           </a:solidFill>
           <a:ln w="6350">
             <a:solidFill>
-              <a:srgbClr val="001D3D"/>
+              <a:srgbClr val="0F172A"/>
             </a:solidFill>
             <a:prstDash val="solid"/>
           </a:ln>
@@ -4990,11 +4990,11 @@
             <a:r>
               <a:rPr lang="en-US" sz="1100" dirty="0">
                 <a:solidFill>
-                  <a:srgbClr val="FFD60A"/>
-                </a:solidFill>
-                <a:latin typeface="Arial" pitchFamily="34" charset="0"/>
-                <a:ea typeface="Arial" pitchFamily="34" charset="-122"/>
-                <a:cs typeface="Arial" pitchFamily="34" charset="-120"/>
+                  <a:srgbClr val="F8FAFC"/>
+                </a:solidFill>
+                <a:latin typeface="Segoe UI" pitchFamily="34" charset="0"/>
+                <a:ea typeface="Segoe UI" pitchFamily="34" charset="-122"/>
+                <a:cs typeface="Segoe UI" pitchFamily="34" charset="-120"/>
               </a:rPr>
               <a:t>Models + GPU</a:t>
             </a:r>
@@ -5017,11 +5017,11 @@
             <a:avLst/>
           </a:prstGeom>
           <a:solidFill>
-            <a:srgbClr val="001D3D"/>
+            <a:srgbClr val="0F172A"/>
           </a:solidFill>
           <a:ln w="6350">
             <a:solidFill>
-              <a:srgbClr val="001D3D"/>
+              <a:srgbClr val="0F172A"/>
             </a:solidFill>
             <a:prstDash val="solid"/>
           </a:ln>
@@ -5054,11 +5054,11 @@
             <a:r>
               <a:rPr lang="en-US" sz="1100" dirty="0">
                 <a:solidFill>
-                  <a:srgbClr val="FFD60A"/>
-                </a:solidFill>
-                <a:latin typeface="Arial" pitchFamily="34" charset="0"/>
-                <a:ea typeface="Arial" pitchFamily="34" charset="-122"/>
-                <a:cs typeface="Arial" pitchFamily="34" charset="-120"/>
+                  <a:srgbClr val="F8FAFC"/>
+                </a:solidFill>
+                <a:latin typeface="Segoe UI" pitchFamily="34" charset="0"/>
+                <a:ea typeface="Segoe UI" pitchFamily="34" charset="-122"/>
+                <a:cs typeface="Segoe UI" pitchFamily="34" charset="-120"/>
               </a:rPr>
               <a:t>list_models, get_gpu_stats</a:t>
             </a:r>
@@ -5081,11 +5081,11 @@
             <a:avLst/>
           </a:prstGeom>
           <a:solidFill>
-            <a:srgbClr val="001D3D"/>
+            <a:srgbClr val="0F172A"/>
           </a:solidFill>
           <a:ln w="6350">
             <a:solidFill>
-              <a:srgbClr val="001D3D"/>
+              <a:srgbClr val="0F172A"/>
             </a:solidFill>
             <a:prstDash val="solid"/>
           </a:ln>
@@ -5120,9 +5120,9 @@
                 <a:solidFill>
                   <a:srgbClr val="10B981"/>
                 </a:solidFill>
-                <a:latin typeface="Arial" pitchFamily="34" charset="0"/>
-                <a:ea typeface="Arial" pitchFamily="34" charset="-122"/>
-                <a:cs typeface="Arial" pitchFamily="34" charset="-120"/>
+                <a:latin typeface="Segoe UI" pitchFamily="34" charset="0"/>
+                <a:ea typeface="Segoe UI" pitchFamily="34" charset="-122"/>
+                <a:cs typeface="Segoe UI" pitchFamily="34" charset="-120"/>
               </a:rPr>
               <a:t>PASS</a:t>
             </a:r>
@@ -5145,11 +5145,11 @@
             <a:avLst/>
           </a:prstGeom>
           <a:solidFill>
-            <a:srgbClr val="000814"/>
+            <a:srgbClr val="020617"/>
           </a:solidFill>
           <a:ln w="6350">
             <a:solidFill>
-              <a:srgbClr val="001D3D"/>
+              <a:srgbClr val="0F172A"/>
             </a:solidFill>
             <a:prstDash val="solid"/>
           </a:ln>
@@ -5182,11 +5182,11 @@
             <a:r>
               <a:rPr lang="en-US" sz="1100" dirty="0">
                 <a:solidFill>
-                  <a:srgbClr val="FFD60A"/>
-                </a:solidFill>
-                <a:latin typeface="Arial" pitchFamily="34" charset="0"/>
-                <a:ea typeface="Arial" pitchFamily="34" charset="-122"/>
-                <a:cs typeface="Arial" pitchFamily="34" charset="-120"/>
+                  <a:srgbClr val="F8FAFC"/>
+                </a:solidFill>
+                <a:latin typeface="Segoe UI" pitchFamily="34" charset="0"/>
+                <a:ea typeface="Segoe UI" pitchFamily="34" charset="-122"/>
+                <a:cs typeface="Segoe UI" pitchFamily="34" charset="-120"/>
               </a:rPr>
               <a:t>PDF + GPU</a:t>
             </a:r>
@@ -5209,11 +5209,11 @@
             <a:avLst/>
           </a:prstGeom>
           <a:solidFill>
-            <a:srgbClr val="000814"/>
+            <a:srgbClr val="020617"/>
           </a:solidFill>
           <a:ln w="6350">
             <a:solidFill>
-              <a:srgbClr val="001D3D"/>
+              <a:srgbClr val="0F172A"/>
             </a:solidFill>
             <a:prstDash val="solid"/>
           </a:ln>
@@ -5246,11 +5246,11 @@
             <a:r>
               <a:rPr lang="en-US" sz="1100" dirty="0">
                 <a:solidFill>
-                  <a:srgbClr val="FFD60A"/>
-                </a:solidFill>
-                <a:latin typeface="Arial" pitchFamily="34" charset="0"/>
-                <a:ea typeface="Arial" pitchFamily="34" charset="-122"/>
-                <a:cs typeface="Arial" pitchFamily="34" charset="-120"/>
+                  <a:srgbClr val="F8FAFC"/>
+                </a:solidFill>
+                <a:latin typeface="Segoe UI" pitchFamily="34" charset="0"/>
+                <a:ea typeface="Segoe UI" pitchFamily="34" charset="-122"/>
+                <a:cs typeface="Segoe UI" pitchFamily="34" charset="-120"/>
               </a:rPr>
               <a:t>write_document, get_gpu_stats</a:t>
             </a:r>
@@ -5273,11 +5273,11 @@
             <a:avLst/>
           </a:prstGeom>
           <a:solidFill>
-            <a:srgbClr val="000814"/>
+            <a:srgbClr val="020617"/>
           </a:solidFill>
           <a:ln w="6350">
             <a:solidFill>
-              <a:srgbClr val="001D3D"/>
+              <a:srgbClr val="0F172A"/>
             </a:solidFill>
             <a:prstDash val="solid"/>
           </a:ln>
@@ -5312,9 +5312,9 @@
                 <a:solidFill>
                   <a:srgbClr val="10B981"/>
                 </a:solidFill>
-                <a:latin typeface="Arial" pitchFamily="34" charset="0"/>
-                <a:ea typeface="Arial" pitchFamily="34" charset="-122"/>
-                <a:cs typeface="Arial" pitchFamily="34" charset="-120"/>
+                <a:latin typeface="Segoe UI" pitchFamily="34" charset="0"/>
+                <a:ea typeface="Segoe UI" pitchFamily="34" charset="-122"/>
+                <a:cs typeface="Segoe UI" pitchFamily="34" charset="-120"/>
               </a:rPr>
               <a:t>PASS</a:t>
             </a:r>
@@ -5337,11 +5337,11 @@
             <a:avLst/>
           </a:prstGeom>
           <a:solidFill>
-            <a:srgbClr val="001D3D"/>
+            <a:srgbClr val="0F172A"/>
           </a:solidFill>
           <a:ln w="6350">
             <a:solidFill>
-              <a:srgbClr val="001D3D"/>
+              <a:srgbClr val="0F172A"/>
             </a:solidFill>
             <a:prstDash val="solid"/>
           </a:ln>
@@ -5374,11 +5374,11 @@
             <a:r>
               <a:rPr lang="en-US" sz="1100" dirty="0">
                 <a:solidFill>
-                  <a:srgbClr val="FFD60A"/>
-                </a:solidFill>
-                <a:latin typeface="Arial" pitchFamily="34" charset="0"/>
-                <a:ea typeface="Arial" pitchFamily="34" charset="-122"/>
-                <a:cs typeface="Arial" pitchFamily="34" charset="-120"/>
+                  <a:srgbClr val="F8FAFC"/>
+                </a:solidFill>
+                <a:latin typeface="Segoe UI" pitchFamily="34" charset="0"/>
+                <a:ea typeface="Segoe UI" pitchFamily="34" charset="-122"/>
+                <a:cs typeface="Segoe UI" pitchFamily="34" charset="-120"/>
               </a:rPr>
               <a:t>3-tool chain</a:t>
             </a:r>
@@ -5401,11 +5401,11 @@
             <a:avLst/>
           </a:prstGeom>
           <a:solidFill>
-            <a:srgbClr val="001D3D"/>
+            <a:srgbClr val="0F172A"/>
           </a:solidFill>
           <a:ln w="6350">
             <a:solidFill>
-              <a:srgbClr val="001D3D"/>
+              <a:srgbClr val="0F172A"/>
             </a:solidFill>
             <a:prstDash val="solid"/>
           </a:ln>
@@ -5438,11 +5438,11 @@
             <a:r>
               <a:rPr lang="en-US" sz="1100" dirty="0">
                 <a:solidFill>
-                  <a:srgbClr val="FFD60A"/>
-                </a:solidFill>
-                <a:latin typeface="Arial" pitchFamily="34" charset="0"/>
-                <a:ea typeface="Arial" pitchFamily="34" charset="-122"/>
-                <a:cs typeface="Arial" pitchFamily="34" charset="-120"/>
+                  <a:srgbClr val="F8FAFC"/>
+                </a:solidFill>
+                <a:latin typeface="Segoe UI" pitchFamily="34" charset="0"/>
+                <a:ea typeface="Segoe UI" pitchFamily="34" charset="-122"/>
+                <a:cs typeface="Segoe UI" pitchFamily="34" charset="-120"/>
               </a:rPr>
               <a:t>get_collection_info, list_models, get_gpu_stats</a:t>
             </a:r>
@@ -5465,11 +5465,11 @@
             <a:avLst/>
           </a:prstGeom>
           <a:solidFill>
-            <a:srgbClr val="001D3D"/>
+            <a:srgbClr val="0F172A"/>
           </a:solidFill>
           <a:ln w="6350">
             <a:solidFill>
-              <a:srgbClr val="001D3D"/>
+              <a:srgbClr val="0F172A"/>
             </a:solidFill>
             <a:prstDash val="solid"/>
           </a:ln>
@@ -5504,9 +5504,9 @@
                 <a:solidFill>
                   <a:srgbClr val="10B981"/>
                 </a:solidFill>
-                <a:latin typeface="Arial" pitchFamily="34" charset="0"/>
-                <a:ea typeface="Arial" pitchFamily="34" charset="-122"/>
-                <a:cs typeface="Arial" pitchFamily="34" charset="-120"/>
+                <a:latin typeface="Segoe UI" pitchFamily="34" charset="0"/>
+                <a:ea typeface="Segoe UI" pitchFamily="34" charset="-122"/>
+                <a:cs typeface="Segoe UI" pitchFamily="34" charset="-120"/>
               </a:rPr>
               <a:t>PASS</a:t>
             </a:r>
@@ -5531,7 +5531,7 @@
             </a:avLst>
           </a:prstGeom>
           <a:solidFill>
-            <a:srgbClr val="001D3D"/>
+            <a:srgbClr val="0F172A"/>
           </a:solidFill>
           <a:ln/>
         </p:spPr>
@@ -5563,11 +5563,11 @@
             <a:r>
               <a:rPr lang="en-US" sz="1400" b="1" dirty="0">
                 <a:solidFill>
-                  <a:srgbClr val="FFD60A"/>
-                </a:solidFill>
-                <a:latin typeface="Arial" pitchFamily="34" charset="0"/>
-                <a:ea typeface="Arial" pitchFamily="34" charset="-122"/>
-                <a:cs typeface="Arial" pitchFamily="34" charset="-120"/>
+                  <a:srgbClr val="F8FAFC"/>
+                </a:solidFill>
+                <a:latin typeface="Segoe UI" pitchFamily="34" charset="0"/>
+                <a:ea typeface="Segoe UI" pitchFamily="34" charset="-122"/>
+                <a:cs typeface="Segoe UI" pitchFamily="34" charset="-120"/>
               </a:rPr>
               <a:t>The model plans and executes multiple tools in parallel - without asking the user.</a:t>
             </a:r>
@@ -5602,11 +5602,11 @@
             <a:r>
               <a:rPr lang="en-US" sz="1100" dirty="0">
                 <a:solidFill>
-                  <a:srgbClr val="9A8C98"/>
-                </a:solidFill>
-                <a:latin typeface="Arial" pitchFamily="34" charset="0"/>
-                <a:ea typeface="Arial" pitchFamily="34" charset="-122"/>
-                <a:cs typeface="Arial" pitchFamily="34" charset="-120"/>
+                  <a:srgbClr val="94A3B8"/>
+                </a:solidFill>
+                <a:latin typeface="Segoe UI" pitchFamily="34" charset="0"/>
+                <a:ea typeface="Segoe UI" pitchFamily="34" charset="-122"/>
+                <a:cs typeface="Segoe UI" pitchFamily="34" charset="-120"/>
               </a:rPr>
               <a:t>In a single iteration, the agent receives a multi-part query and calls 2-3 tools simultaneously. No user re-prompts, no separate turns. This is real agent capability - not scripted sequences.</a:t>
             </a:r>
@@ -5641,11 +5641,11 @@
             <a:r>
               <a:rPr lang="en-US" sz="1000" dirty="0">
                 <a:solidFill>
-                  <a:srgbClr val="9A8C98"/>
-                </a:solidFill>
-                <a:latin typeface="Arial" pitchFamily="34" charset="0"/>
-                <a:ea typeface="Arial" pitchFamily="34" charset="-122"/>
-                <a:cs typeface="Arial" pitchFamily="34" charset="-120"/>
+                  <a:srgbClr val="94A3B8"/>
+                </a:solidFill>
+                <a:latin typeface="Segoe UI" pitchFamily="34" charset="0"/>
+                <a:ea typeface="Segoe UI" pitchFamily="34" charset="-122"/>
+                <a:cs typeface="Segoe UI" pitchFamily="34" charset="-120"/>
               </a:rPr>
               <a:t>11</a:t>
             </a:r>
@@ -5693,7 +5693,7 @@
             <a:avLst/>
           </a:prstGeom>
           <a:solidFill>
-            <a:srgbClr val="000814"/>
+            <a:srgbClr val="020617"/>
           </a:solidFill>
           <a:ln/>
         </p:spPr>
@@ -5713,7 +5713,7 @@
             <a:avLst/>
           </a:prstGeom>
           <a:solidFill>
-            <a:srgbClr val="FFC300"/>
+            <a:srgbClr val="00EAFF"/>
           </a:solidFill>
           <a:ln/>
         </p:spPr>
@@ -5745,11 +5745,11 @@
             <a:r>
               <a:rPr lang="en-US" sz="2800" b="1" dirty="0">
                 <a:solidFill>
-                  <a:srgbClr val="FFD60A"/>
-                </a:solidFill>
-                <a:latin typeface="Arial" pitchFamily="34" charset="0"/>
-                <a:ea typeface="Arial" pitchFamily="34" charset="-122"/>
-                <a:cs typeface="Arial" pitchFamily="34" charset="-120"/>
+                  <a:srgbClr val="F8FAFC"/>
+                </a:solidFill>
+                <a:latin typeface="Segoe UI" pitchFamily="34" charset="0"/>
+                <a:ea typeface="Segoe UI" pitchFamily="34" charset="-122"/>
+                <a:cs typeface="Segoe UI" pitchFamily="34" charset="-120"/>
               </a:rPr>
               <a:t>Performance - Load Test (Phase 5D)</a:t>
             </a:r>
@@ -5784,11 +5784,11 @@
             <a:r>
               <a:rPr lang="en-US" sz="1100" dirty="0">
                 <a:solidFill>
-                  <a:srgbClr val="9A8C98"/>
-                </a:solidFill>
-                <a:latin typeface="Arial" pitchFamily="34" charset="0"/>
-                <a:ea typeface="Arial" pitchFamily="34" charset="-122"/>
-                <a:cs typeface="Arial" pitchFamily="34" charset="-120"/>
+                  <a:srgbClr val="94A3B8"/>
+                </a:solidFill>
+                <a:latin typeface="Segoe UI" pitchFamily="34" charset="0"/>
+                <a:ea typeface="Segoe UI" pitchFamily="34" charset="-122"/>
+                <a:cs typeface="Segoe UI" pitchFamily="34" charset="-120"/>
               </a:rPr>
               <a:t>Config: 3 concurrent users, 12 total requests, warmup=2</a:t>
             </a:r>
@@ -5813,7 +5813,7 @@
             </a:avLst>
           </a:prstGeom>
           <a:solidFill>
-            <a:srgbClr val="001D3D"/>
+            <a:srgbClr val="0F172A"/>
           </a:solidFill>
           <a:ln/>
         </p:spPr>
@@ -5845,11 +5845,11 @@
             <a:r>
               <a:rPr lang="en-US" sz="3000" b="1" dirty="0">
                 <a:solidFill>
-                  <a:srgbClr val="FFC300"/>
-                </a:solidFill>
-                <a:latin typeface="Arial" pitchFamily="34" charset="0"/>
-                <a:ea typeface="Arial" pitchFamily="34" charset="-122"/>
-                <a:cs typeface="Arial" pitchFamily="34" charset="-120"/>
+                  <a:srgbClr val="00EAFF"/>
+                </a:solidFill>
+                <a:latin typeface="Segoe UI" pitchFamily="34" charset="0"/>
+                <a:ea typeface="Segoe UI" pitchFamily="34" charset="-122"/>
+                <a:cs typeface="Segoe UI" pitchFamily="34" charset="-120"/>
               </a:rPr>
               <a:t>12/12</a:t>
             </a:r>
@@ -5884,11 +5884,11 @@
             <a:r>
               <a:rPr lang="en-US" sz="1000" b="1" dirty="0">
                 <a:solidFill>
-                  <a:srgbClr val="FFD60A"/>
-                </a:solidFill>
-                <a:latin typeface="Arial" pitchFamily="34" charset="0"/>
-                <a:ea typeface="Arial" pitchFamily="34" charset="-122"/>
-                <a:cs typeface="Arial" pitchFamily="34" charset="-120"/>
+                  <a:srgbClr val="F8FAFC"/>
+                </a:solidFill>
+                <a:latin typeface="Segoe UI" pitchFamily="34" charset="0"/>
+                <a:ea typeface="Segoe UI" pitchFamily="34" charset="-122"/>
+                <a:cs typeface="Segoe UI" pitchFamily="34" charset="-120"/>
               </a:rPr>
               <a:t>Successful requests</a:t>
             </a:r>
@@ -5923,11 +5923,11 @@
             <a:r>
               <a:rPr lang="en-US" sz="900" dirty="0">
                 <a:solidFill>
-                  <a:srgbClr val="9A8C98"/>
-                </a:solidFill>
-                <a:latin typeface="Arial" pitchFamily="34" charset="0"/>
-                <a:ea typeface="Arial" pitchFamily="34" charset="-122"/>
-                <a:cs typeface="Arial" pitchFamily="34" charset="-120"/>
+                  <a:srgbClr val="94A3B8"/>
+                </a:solidFill>
+                <a:latin typeface="Segoe UI" pitchFamily="34" charset="0"/>
+                <a:ea typeface="Segoe UI" pitchFamily="34" charset="-122"/>
+                <a:cs typeface="Segoe UI" pitchFamily="34" charset="-120"/>
               </a:rPr>
               <a:t>100% success rate</a:t>
             </a:r>
@@ -5952,7 +5952,7 @@
             </a:avLst>
           </a:prstGeom>
           <a:solidFill>
-            <a:srgbClr val="001D3D"/>
+            <a:srgbClr val="0F172A"/>
           </a:solidFill>
           <a:ln/>
         </p:spPr>
@@ -5984,11 +5984,11 @@
             <a:r>
               <a:rPr lang="en-US" sz="3000" b="1" dirty="0">
                 <a:solidFill>
-                  <a:srgbClr val="FFC300"/>
-                </a:solidFill>
-                <a:latin typeface="Arial" pitchFamily="34" charset="0"/>
-                <a:ea typeface="Arial" pitchFamily="34" charset="-122"/>
-                <a:cs typeface="Arial" pitchFamily="34" charset="-120"/>
+                  <a:srgbClr val="00EAFF"/>
+                </a:solidFill>
+                <a:latin typeface="Segoe UI" pitchFamily="34" charset="0"/>
+                <a:ea typeface="Segoe UI" pitchFamily="34" charset="-122"/>
+                <a:cs typeface="Segoe UI" pitchFamily="34" charset="-120"/>
               </a:rPr>
               <a:t>10.2s</a:t>
             </a:r>
@@ -6023,11 +6023,11 @@
             <a:r>
               <a:rPr lang="en-US" sz="1000" b="1" dirty="0">
                 <a:solidFill>
-                  <a:srgbClr val="FFD60A"/>
-                </a:solidFill>
-                <a:latin typeface="Arial" pitchFamily="34" charset="0"/>
-                <a:ea typeface="Arial" pitchFamily="34" charset="-122"/>
-                <a:cs typeface="Arial" pitchFamily="34" charset="-120"/>
+                  <a:srgbClr val="F8FAFC"/>
+                </a:solidFill>
+                <a:latin typeface="Segoe UI" pitchFamily="34" charset="0"/>
+                <a:ea typeface="Segoe UI" pitchFamily="34" charset="-122"/>
+                <a:cs typeface="Segoe UI" pitchFamily="34" charset="-120"/>
               </a:rPr>
               <a:t>Server p50 latency</a:t>
             </a:r>
@@ -6062,11 +6062,11 @@
             <a:r>
               <a:rPr lang="en-US" sz="900" dirty="0">
                 <a:solidFill>
-                  <a:srgbClr val="9A8C98"/>
-                </a:solidFill>
-                <a:latin typeface="Arial" pitchFamily="34" charset="0"/>
-                <a:ea typeface="Arial" pitchFamily="34" charset="-122"/>
-                <a:cs typeface="Arial" pitchFamily="34" charset="-120"/>
+                  <a:srgbClr val="94A3B8"/>
+                </a:solidFill>
+                <a:latin typeface="Segoe UI" pitchFamily="34" charset="0"/>
+                <a:ea typeface="Segoe UI" pitchFamily="34" charset="-122"/>
+                <a:cs typeface="Segoe UI" pitchFamily="34" charset="-120"/>
               </a:rPr>
               <a:t>wall clock 36.5s</a:t>
             </a:r>
@@ -6091,7 +6091,7 @@
             </a:avLst>
           </a:prstGeom>
           <a:solidFill>
-            <a:srgbClr val="001D3D"/>
+            <a:srgbClr val="0F172A"/>
           </a:solidFill>
           <a:ln/>
         </p:spPr>
@@ -6123,11 +6123,11 @@
             <a:r>
               <a:rPr lang="en-US" sz="3000" b="1" dirty="0">
                 <a:solidFill>
-                  <a:srgbClr val="FFC300"/>
-                </a:solidFill>
-                <a:latin typeface="Arial" pitchFamily="34" charset="0"/>
-                <a:ea typeface="Arial" pitchFamily="34" charset="-122"/>
-                <a:cs typeface="Arial" pitchFamily="34" charset="-120"/>
+                  <a:srgbClr val="00EAFF"/>
+                </a:solidFill>
+                <a:latin typeface="Segoe UI" pitchFamily="34" charset="0"/>
+                <a:ea typeface="Segoe UI" pitchFamily="34" charset="-122"/>
+                <a:cs typeface="Segoe UI" pitchFamily="34" charset="-120"/>
               </a:rPr>
               <a:t>0</a:t>
             </a:r>
@@ -6162,11 +6162,11 @@
             <a:r>
               <a:rPr lang="en-US" sz="1000" b="1" dirty="0">
                 <a:solidFill>
-                  <a:srgbClr val="FFD60A"/>
-                </a:solidFill>
-                <a:latin typeface="Arial" pitchFamily="34" charset="0"/>
-                <a:ea typeface="Arial" pitchFamily="34" charset="-122"/>
-                <a:cs typeface="Arial" pitchFamily="34" charset="-120"/>
+                  <a:srgbClr val="F8FAFC"/>
+                </a:solidFill>
+                <a:latin typeface="Segoe UI" pitchFamily="34" charset="0"/>
+                <a:ea typeface="Segoe UI" pitchFamily="34" charset="-122"/>
+                <a:cs typeface="Segoe UI" pitchFamily="34" charset="-120"/>
               </a:rPr>
               <a:t>Failures</a:t>
             </a:r>
@@ -6201,11 +6201,11 @@
             <a:r>
               <a:rPr lang="en-US" sz="900" dirty="0">
                 <a:solidFill>
-                  <a:srgbClr val="9A8C98"/>
-                </a:solidFill>
-                <a:latin typeface="Arial" pitchFamily="34" charset="0"/>
-                <a:ea typeface="Arial" pitchFamily="34" charset="-122"/>
-                <a:cs typeface="Arial" pitchFamily="34" charset="-120"/>
+                  <a:srgbClr val="94A3B8"/>
+                </a:solidFill>
+                <a:latin typeface="Segoe UI" pitchFamily="34" charset="0"/>
+                <a:ea typeface="Segoe UI" pitchFamily="34" charset="-122"/>
+                <a:cs typeface="Segoe UI" pitchFamily="34" charset="-120"/>
               </a:rPr>
               <a:t>0% error rate</a:t>
             </a:r>
@@ -6230,7 +6230,7 @@
             </a:avLst>
           </a:prstGeom>
           <a:solidFill>
-            <a:srgbClr val="001D3D"/>
+            <a:srgbClr val="0F172A"/>
           </a:solidFill>
           <a:ln/>
         </p:spPr>
@@ -6262,11 +6262,11 @@
             <a:r>
               <a:rPr lang="en-US" sz="3000" b="1" dirty="0">
                 <a:solidFill>
-                  <a:srgbClr val="FFC300"/>
-                </a:solidFill>
-                <a:latin typeface="Arial" pitchFamily="34" charset="0"/>
-                <a:ea typeface="Arial" pitchFamily="34" charset="-122"/>
-                <a:cs typeface="Arial" pitchFamily="34" charset="-120"/>
+                  <a:srgbClr val="00EAFF"/>
+                </a:solidFill>
+                <a:latin typeface="Segoe UI" pitchFamily="34" charset="0"/>
+                <a:ea typeface="Segoe UI" pitchFamily="34" charset="-122"/>
+                <a:cs typeface="Segoe UI" pitchFamily="34" charset="-120"/>
               </a:rPr>
               <a:t>1.00</a:t>
             </a:r>
@@ -6301,11 +6301,11 @@
             <a:r>
               <a:rPr lang="en-US" sz="1000" b="1" dirty="0">
                 <a:solidFill>
-                  <a:srgbClr val="FFD60A"/>
-                </a:solidFill>
-                <a:latin typeface="Arial" pitchFamily="34" charset="0"/>
-                <a:ea typeface="Arial" pitchFamily="34" charset="-122"/>
-                <a:cs typeface="Arial" pitchFamily="34" charset="-120"/>
+                  <a:srgbClr val="F8FAFC"/>
+                </a:solidFill>
+                <a:latin typeface="Segoe UI" pitchFamily="34" charset="0"/>
+                <a:ea typeface="Segoe UI" pitchFamily="34" charset="-122"/>
+                <a:cs typeface="Segoe UI" pitchFamily="34" charset="-120"/>
               </a:rPr>
               <a:t>Tools per request</a:t>
             </a:r>
@@ -6340,11 +6340,11 @@
             <a:r>
               <a:rPr lang="en-US" sz="900" dirty="0">
                 <a:solidFill>
-                  <a:srgbClr val="9A8C98"/>
-                </a:solidFill>
-                <a:latin typeface="Arial" pitchFamily="34" charset="0"/>
-                <a:ea typeface="Arial" pitchFamily="34" charset="-122"/>
-                <a:cs typeface="Arial" pitchFamily="34" charset="-120"/>
+                  <a:srgbClr val="94A3B8"/>
+                </a:solidFill>
+                <a:latin typeface="Segoe UI" pitchFamily="34" charset="0"/>
+                <a:ea typeface="Segoe UI" pitchFamily="34" charset="-122"/>
+                <a:cs typeface="Segoe UI" pitchFamily="34" charset="-120"/>
               </a:rPr>
               <a:t>avg tool call rate</a:t>
             </a:r>
@@ -6379,11 +6379,11 @@
             <a:r>
               <a:rPr lang="en-US" sz="1300" b="1" dirty="0">
                 <a:solidFill>
-                  <a:srgbClr val="FFD60A"/>
-                </a:solidFill>
-                <a:latin typeface="Arial" pitchFamily="34" charset="0"/>
-                <a:ea typeface="Arial" pitchFamily="34" charset="-122"/>
-                <a:cs typeface="Arial" pitchFamily="34" charset="-120"/>
+                  <a:srgbClr val="F8FAFC"/>
+                </a:solidFill>
+                <a:latin typeface="Segoe UI" pitchFamily="34" charset="0"/>
+                <a:ea typeface="Segoe UI" pitchFamily="34" charset="-122"/>
+                <a:cs typeface="Segoe UI" pitchFamily="34" charset="-120"/>
               </a:rPr>
               <a:t>Server-side latency distribution</a:t>
             </a:r>
@@ -6418,11 +6418,11 @@
             <a:r>
               <a:rPr lang="en-US" sz="1100" b="1" dirty="0">
                 <a:solidFill>
-                  <a:srgbClr val="9A8C98"/>
-                </a:solidFill>
-                <a:latin typeface="Arial" pitchFamily="34" charset="0"/>
-                <a:ea typeface="Arial" pitchFamily="34" charset="-122"/>
-                <a:cs typeface="Arial" pitchFamily="34" charset="-120"/>
+                  <a:srgbClr val="94A3B8"/>
+                </a:solidFill>
+                <a:latin typeface="Segoe UI" pitchFamily="34" charset="0"/>
+                <a:ea typeface="Segoe UI" pitchFamily="34" charset="-122"/>
+                <a:cs typeface="Segoe UI" pitchFamily="34" charset="-120"/>
               </a:rPr>
               <a:t>p50</a:t>
             </a:r>
@@ -6447,7 +6447,7 @@
             </a:avLst>
           </a:prstGeom>
           <a:solidFill>
-            <a:srgbClr val="001D3D"/>
+            <a:srgbClr val="0F172A"/>
           </a:solidFill>
           <a:ln/>
         </p:spPr>
@@ -6469,7 +6469,7 @@
             </a:avLst>
           </a:prstGeom>
           <a:solidFill>
-            <a:srgbClr val="FFC300"/>
+            <a:srgbClr val="00EAFF"/>
           </a:solidFill>
           <a:ln/>
         </p:spPr>
@@ -6501,11 +6501,11 @@
             <a:r>
               <a:rPr lang="en-US" sz="1100" dirty="0">
                 <a:solidFill>
-                  <a:srgbClr val="FFD60A"/>
-                </a:solidFill>
-                <a:latin typeface="Arial" pitchFamily="34" charset="0"/>
-                <a:ea typeface="Arial" pitchFamily="34" charset="-122"/>
-                <a:cs typeface="Arial" pitchFamily="34" charset="-120"/>
+                  <a:srgbClr val="F8FAFC"/>
+                </a:solidFill>
+                <a:latin typeface="Segoe UI" pitchFamily="34" charset="0"/>
+                <a:ea typeface="Segoe UI" pitchFamily="34" charset="-122"/>
+                <a:cs typeface="Segoe UI" pitchFamily="34" charset="-120"/>
               </a:rPr>
               <a:t>10.2s</a:t>
             </a:r>
@@ -6540,11 +6540,11 @@
             <a:r>
               <a:rPr lang="en-US" sz="1100" b="1" dirty="0">
                 <a:solidFill>
-                  <a:srgbClr val="9A8C98"/>
-                </a:solidFill>
-                <a:latin typeface="Arial" pitchFamily="34" charset="0"/>
-                <a:ea typeface="Arial" pitchFamily="34" charset="-122"/>
-                <a:cs typeface="Arial" pitchFamily="34" charset="-120"/>
+                  <a:srgbClr val="94A3B8"/>
+                </a:solidFill>
+                <a:latin typeface="Segoe UI" pitchFamily="34" charset="0"/>
+                <a:ea typeface="Segoe UI" pitchFamily="34" charset="-122"/>
+                <a:cs typeface="Segoe UI" pitchFamily="34" charset="-120"/>
               </a:rPr>
               <a:t>p95</a:t>
             </a:r>
@@ -6569,7 +6569,7 @@
             </a:avLst>
           </a:prstGeom>
           <a:solidFill>
-            <a:srgbClr val="001D3D"/>
+            <a:srgbClr val="0F172A"/>
           </a:solidFill>
           <a:ln/>
         </p:spPr>
@@ -6623,11 +6623,11 @@
             <a:r>
               <a:rPr lang="en-US" sz="1100" dirty="0">
                 <a:solidFill>
-                  <a:srgbClr val="FFD60A"/>
-                </a:solidFill>
-                <a:latin typeface="Arial" pitchFamily="34" charset="0"/>
-                <a:ea typeface="Arial" pitchFamily="34" charset="-122"/>
-                <a:cs typeface="Arial" pitchFamily="34" charset="-120"/>
+                  <a:srgbClr val="F8FAFC"/>
+                </a:solidFill>
+                <a:latin typeface="Segoe UI" pitchFamily="34" charset="0"/>
+                <a:ea typeface="Segoe UI" pitchFamily="34" charset="-122"/>
+                <a:cs typeface="Segoe UI" pitchFamily="34" charset="-120"/>
               </a:rPr>
               <a:t>62.2s</a:t>
             </a:r>
@@ -6662,11 +6662,11 @@
             <a:r>
               <a:rPr lang="en-US" sz="1100" b="1" dirty="0">
                 <a:solidFill>
-                  <a:srgbClr val="9A8C98"/>
-                </a:solidFill>
-                <a:latin typeface="Arial" pitchFamily="34" charset="0"/>
-                <a:ea typeface="Arial" pitchFamily="34" charset="-122"/>
-                <a:cs typeface="Arial" pitchFamily="34" charset="-120"/>
+                  <a:srgbClr val="94A3B8"/>
+                </a:solidFill>
+                <a:latin typeface="Segoe UI" pitchFamily="34" charset="0"/>
+                <a:ea typeface="Segoe UI" pitchFamily="34" charset="-122"/>
+                <a:cs typeface="Segoe UI" pitchFamily="34" charset="-120"/>
               </a:rPr>
               <a:t>max</a:t>
             </a:r>
@@ -6691,7 +6691,7 @@
             </a:avLst>
           </a:prstGeom>
           <a:solidFill>
-            <a:srgbClr val="001D3D"/>
+            <a:srgbClr val="0F172A"/>
           </a:solidFill>
           <a:ln/>
         </p:spPr>
@@ -6745,11 +6745,11 @@
             <a:r>
               <a:rPr lang="en-US" sz="1100" dirty="0">
                 <a:solidFill>
-                  <a:srgbClr val="FFD60A"/>
-                </a:solidFill>
-                <a:latin typeface="Arial" pitchFamily="34" charset="0"/>
-                <a:ea typeface="Arial" pitchFamily="34" charset="-122"/>
-                <a:cs typeface="Arial" pitchFamily="34" charset="-120"/>
+                  <a:srgbClr val="F8FAFC"/>
+                </a:solidFill>
+                <a:latin typeface="Segoe UI" pitchFamily="34" charset="0"/>
+                <a:ea typeface="Segoe UI" pitchFamily="34" charset="-122"/>
+                <a:cs typeface="Segoe UI" pitchFamily="34" charset="-120"/>
               </a:rPr>
               <a:t>88.0s</a:t>
             </a:r>
@@ -6774,7 +6774,7 @@
             </a:avLst>
           </a:prstGeom>
           <a:solidFill>
-            <a:srgbClr val="001D3D"/>
+            <a:srgbClr val="0F172A"/>
           </a:solidFill>
           <a:ln/>
         </p:spPr>
@@ -6808,9 +6808,9 @@
                 <a:solidFill>
                   <a:srgbClr val="10B981"/>
                 </a:solidFill>
-                <a:latin typeface="Arial" pitchFamily="34" charset="0"/>
-                <a:ea typeface="Arial" pitchFamily="34" charset="-122"/>
-                <a:cs typeface="Arial" pitchFamily="34" charset="-120"/>
+                <a:latin typeface="Segoe UI" pitchFamily="34" charset="0"/>
+                <a:ea typeface="Segoe UI" pitchFamily="34" charset="-122"/>
+                <a:cs typeface="Segoe UI" pitchFamily="34" charset="-120"/>
               </a:rPr>
               <a:t>VRAM stable</a:t>
             </a:r>
@@ -6845,11 +6845,11 @@
             <a:r>
               <a:rPr lang="en-US" sz="1000" dirty="0">
                 <a:solidFill>
-                  <a:srgbClr val="9A8C98"/>
-                </a:solidFill>
-                <a:latin typeface="Arial" pitchFamily="34" charset="0"/>
-                <a:ea typeface="Arial" pitchFamily="34" charset="-122"/>
-                <a:cs typeface="Arial" pitchFamily="34" charset="-120"/>
+                  <a:srgbClr val="94A3B8"/>
+                </a:solidFill>
+                <a:latin typeface="Segoe UI" pitchFamily="34" charset="0"/>
+                <a:ea typeface="Segoe UI" pitchFamily="34" charset="-122"/>
+                <a:cs typeface="Segoe UI" pitchFamily="34" charset="-120"/>
               </a:rPr>
               <a:t>2354 -&gt; 2337 MB</a:t>
             </a:r>
@@ -6862,11 +6862,11 @@
             <a:r>
               <a:rPr lang="en-US" sz="1000" dirty="0">
                 <a:solidFill>
-                  <a:srgbClr val="9A8C98"/>
-                </a:solidFill>
-                <a:latin typeface="Arial" pitchFamily="34" charset="0"/>
-                <a:ea typeface="Arial" pitchFamily="34" charset="-122"/>
-                <a:cs typeface="Arial" pitchFamily="34" charset="-120"/>
+                  <a:srgbClr val="94A3B8"/>
+                </a:solidFill>
+                <a:latin typeface="Segoe UI" pitchFamily="34" charset="0"/>
+                <a:ea typeface="Segoe UI" pitchFamily="34" charset="-122"/>
+                <a:cs typeface="Segoe UI" pitchFamily="34" charset="-120"/>
               </a:rPr>
               <a:t>Delta: -17 MB</a:t>
             </a:r>
@@ -6879,11 +6879,11 @@
             <a:r>
               <a:rPr lang="en-US" sz="1000" dirty="0">
                 <a:solidFill>
-                  <a:srgbClr val="9A8C98"/>
-                </a:solidFill>
-                <a:latin typeface="Arial" pitchFamily="34" charset="0"/>
-                <a:ea typeface="Arial" pitchFamily="34" charset="-122"/>
-                <a:cs typeface="Arial" pitchFamily="34" charset="-120"/>
+                  <a:srgbClr val="94A3B8"/>
+                </a:solidFill>
+                <a:latin typeface="Segoe UI" pitchFamily="34" charset="0"/>
+                <a:ea typeface="Segoe UI" pitchFamily="34" charset="-122"/>
+                <a:cs typeface="Segoe UI" pitchFamily="34" charset="-120"/>
               </a:rPr>
               <a:t>No memory leak</a:t>
             </a:r>
@@ -6908,7 +6908,7 @@
             </a:avLst>
           </a:prstGeom>
           <a:solidFill>
-            <a:srgbClr val="001D3D"/>
+            <a:srgbClr val="0F172A"/>
           </a:solidFill>
           <a:ln/>
         </p:spPr>
@@ -6940,11 +6940,11 @@
             <a:r>
               <a:rPr lang="en-US" sz="1100" dirty="0">
                 <a:solidFill>
-                  <a:srgbClr val="9A8C98"/>
-                </a:solidFill>
-                <a:latin typeface="Arial" pitchFamily="34" charset="0"/>
-                <a:ea typeface="Arial" pitchFamily="34" charset="-122"/>
-                <a:cs typeface="Arial" pitchFamily="34" charset="-120"/>
+                  <a:srgbClr val="94A3B8"/>
+                </a:solidFill>
+                <a:latin typeface="Segoe UI" pitchFamily="34" charset="0"/>
+                <a:ea typeface="Segoe UI" pitchFamily="34" charset="-122"/>
+                <a:cs typeface="Segoe UI" pitchFamily="34" charset="-120"/>
               </a:rPr>
               <a:t>One notable case: RAG query triggered 5 tool calls in a single response (multi-step chaining within one iteration).</a:t>
             </a:r>
@@ -6979,11 +6979,11 @@
             <a:r>
               <a:rPr lang="en-US" sz="1000" dirty="0">
                 <a:solidFill>
-                  <a:srgbClr val="9A8C98"/>
-                </a:solidFill>
-                <a:latin typeface="Arial" pitchFamily="34" charset="0"/>
-                <a:ea typeface="Arial" pitchFamily="34" charset="-122"/>
-                <a:cs typeface="Arial" pitchFamily="34" charset="-120"/>
+                  <a:srgbClr val="94A3B8"/>
+                </a:solidFill>
+                <a:latin typeface="Segoe UI" pitchFamily="34" charset="0"/>
+                <a:ea typeface="Segoe UI" pitchFamily="34" charset="-122"/>
+                <a:cs typeface="Segoe UI" pitchFamily="34" charset="-120"/>
               </a:rPr>
               <a:t>12</a:t>
             </a:r>
@@ -7031,7 +7031,7 @@
             <a:avLst/>
           </a:prstGeom>
           <a:solidFill>
-            <a:srgbClr val="000814"/>
+            <a:srgbClr val="020617"/>
           </a:solidFill>
           <a:ln/>
         </p:spPr>
@@ -7051,7 +7051,7 @@
             <a:avLst/>
           </a:prstGeom>
           <a:solidFill>
-            <a:srgbClr val="FFC300"/>
+            <a:srgbClr val="00EAFF"/>
           </a:solidFill>
           <a:ln/>
         </p:spPr>
@@ -7083,11 +7083,11 @@
             <a:r>
               <a:rPr lang="en-US" sz="2800" b="1" dirty="0">
                 <a:solidFill>
-                  <a:srgbClr val="FFD60A"/>
-                </a:solidFill>
-                <a:latin typeface="Arial" pitchFamily="34" charset="0"/>
-                <a:ea typeface="Arial" pitchFamily="34" charset="-122"/>
-                <a:cs typeface="Arial" pitchFamily="34" charset="-120"/>
+                  <a:srgbClr val="F8FAFC"/>
+                </a:solidFill>
+                <a:latin typeface="Segoe UI" pitchFamily="34" charset="0"/>
+                <a:ea typeface="Segoe UI" pitchFamily="34" charset="-122"/>
+                <a:cs typeface="Segoe UI" pitchFamily="34" charset="-120"/>
               </a:rPr>
               <a:t>Capacity Test - Max Concurrent Users</a:t>
             </a:r>
@@ -7122,11 +7122,11 @@
             <a:r>
               <a:rPr lang="en-US" sz="1100" dirty="0">
                 <a:solidFill>
-                  <a:srgbClr val="9A8C98"/>
-                </a:solidFill>
-                <a:latin typeface="Arial" pitchFamily="34" charset="0"/>
-                <a:ea typeface="Arial" pitchFamily="34" charset="-122"/>
-                <a:cs typeface="Arial" pitchFamily="34" charset="-120"/>
+                  <a:srgbClr val="94A3B8"/>
+                </a:solidFill>
+                <a:latin typeface="Segoe UI" pitchFamily="34" charset="0"/>
+                <a:ea typeface="Segoe UI" pitchFamily="34" charset="-122"/>
+                <a:cs typeface="Segoe UI" pitchFamily="34" charset="-120"/>
               </a:rPr>
               <a:t>Escalating load: 1 -&gt; 2 -&gt; 3 -&gt; 4 concurrent users until failure or p50 &gt; 60s</a:t>
             </a:r>
@@ -7149,11 +7149,11 @@
             <a:avLst/>
           </a:prstGeom>
           <a:solidFill>
-            <a:srgbClr val="001D3D"/>
+            <a:srgbClr val="0F172A"/>
           </a:solidFill>
           <a:ln w="6350">
             <a:solidFill>
-              <a:srgbClr val="001D3D"/>
+              <a:srgbClr val="0F172A"/>
             </a:solidFill>
             <a:prstDash val="solid"/>
           </a:ln>
@@ -7186,11 +7186,11 @@
             <a:r>
               <a:rPr lang="en-US" sz="1100" b="1" dirty="0">
                 <a:solidFill>
-                  <a:srgbClr val="FFC300"/>
-                </a:solidFill>
-                <a:latin typeface="Arial" pitchFamily="34" charset="0"/>
-                <a:ea typeface="Arial" pitchFamily="34" charset="-122"/>
-                <a:cs typeface="Arial" pitchFamily="34" charset="-120"/>
+                  <a:srgbClr val="00EAFF"/>
+                </a:solidFill>
+                <a:latin typeface="Segoe UI" pitchFamily="34" charset="0"/>
+                <a:ea typeface="Segoe UI" pitchFamily="34" charset="-122"/>
+                <a:cs typeface="Segoe UI" pitchFamily="34" charset="-120"/>
               </a:rPr>
               <a:t>Concurrent</a:t>
             </a:r>
@@ -7213,11 +7213,11 @@
             <a:avLst/>
           </a:prstGeom>
           <a:solidFill>
-            <a:srgbClr val="001D3D"/>
+            <a:srgbClr val="0F172A"/>
           </a:solidFill>
           <a:ln w="6350">
             <a:solidFill>
-              <a:srgbClr val="001D3D"/>
+              <a:srgbClr val="0F172A"/>
             </a:solidFill>
             <a:prstDash val="solid"/>
           </a:ln>
@@ -7250,11 +7250,11 @@
             <a:r>
               <a:rPr lang="en-US" sz="1100" b="1" dirty="0">
                 <a:solidFill>
-                  <a:srgbClr val="FFC300"/>
-                </a:solidFill>
-                <a:latin typeface="Arial" pitchFamily="34" charset="0"/>
-                <a:ea typeface="Arial" pitchFamily="34" charset="-122"/>
-                <a:cs typeface="Arial" pitchFamily="34" charset="-120"/>
+                  <a:srgbClr val="00EAFF"/>
+                </a:solidFill>
+                <a:latin typeface="Segoe UI" pitchFamily="34" charset="0"/>
+                <a:ea typeface="Segoe UI" pitchFamily="34" charset="-122"/>
+                <a:cs typeface="Segoe UI" pitchFamily="34" charset="-120"/>
               </a:rPr>
               <a:t>p50 wall</a:t>
             </a:r>
@@ -7277,11 +7277,11 @@
             <a:avLst/>
           </a:prstGeom>
           <a:solidFill>
-            <a:srgbClr val="001D3D"/>
+            <a:srgbClr val="0F172A"/>
           </a:solidFill>
           <a:ln w="6350">
             <a:solidFill>
-              <a:srgbClr val="001D3D"/>
+              <a:srgbClr val="0F172A"/>
             </a:solidFill>
             <a:prstDash val="solid"/>
           </a:ln>
@@ -7314,11 +7314,11 @@
             <a:r>
               <a:rPr lang="en-US" sz="1100" b="1" dirty="0">
                 <a:solidFill>
-                  <a:srgbClr val="FFC300"/>
-                </a:solidFill>
-                <a:latin typeface="Arial" pitchFamily="34" charset="0"/>
-                <a:ea typeface="Arial" pitchFamily="34" charset="-122"/>
-                <a:cs typeface="Arial" pitchFamily="34" charset="-120"/>
+                  <a:srgbClr val="00EAFF"/>
+                </a:solidFill>
+                <a:latin typeface="Segoe UI" pitchFamily="34" charset="0"/>
+                <a:ea typeface="Segoe UI" pitchFamily="34" charset="-122"/>
+                <a:cs typeface="Segoe UI" pitchFamily="34" charset="-120"/>
               </a:rPr>
               <a:t>p95 wall</a:t>
             </a:r>
@@ -7341,11 +7341,11 @@
             <a:avLst/>
           </a:prstGeom>
           <a:solidFill>
-            <a:srgbClr val="001D3D"/>
+            <a:srgbClr val="0F172A"/>
           </a:solidFill>
           <a:ln w="6350">
             <a:solidFill>
-              <a:srgbClr val="001D3D"/>
+              <a:srgbClr val="0F172A"/>
             </a:solidFill>
             <a:prstDash val="solid"/>
           </a:ln>
@@ -7378,11 +7378,11 @@
             <a:r>
               <a:rPr lang="en-US" sz="1100" b="1" dirty="0">
                 <a:solidFill>
-                  <a:srgbClr val="FFC300"/>
-                </a:solidFill>
-                <a:latin typeface="Arial" pitchFamily="34" charset="0"/>
-                <a:ea typeface="Arial" pitchFamily="34" charset="-122"/>
-                <a:cs typeface="Arial" pitchFamily="34" charset="-120"/>
+                  <a:srgbClr val="00EAFF"/>
+                </a:solidFill>
+                <a:latin typeface="Segoe UI" pitchFamily="34" charset="0"/>
+                <a:ea typeface="Segoe UI" pitchFamily="34" charset="-122"/>
+                <a:cs typeface="Segoe UI" pitchFamily="34" charset="-120"/>
               </a:rPr>
               <a:t>Throughput</a:t>
             </a:r>
@@ -7405,11 +7405,11 @@
             <a:avLst/>
           </a:prstGeom>
           <a:solidFill>
-            <a:srgbClr val="001D3D"/>
+            <a:srgbClr val="0F172A"/>
           </a:solidFill>
           <a:ln w="6350">
             <a:solidFill>
-              <a:srgbClr val="001D3D"/>
+              <a:srgbClr val="0F172A"/>
             </a:solidFill>
             <a:prstDash val="solid"/>
           </a:ln>
@@ -7442,11 +7442,11 @@
             <a:r>
               <a:rPr lang="en-US" sz="1100" b="1" dirty="0">
                 <a:solidFill>
-                  <a:srgbClr val="FFC300"/>
-                </a:solidFill>
-                <a:latin typeface="Arial" pitchFamily="34" charset="0"/>
-                <a:ea typeface="Arial" pitchFamily="34" charset="-122"/>
-                <a:cs typeface="Arial" pitchFamily="34" charset="-120"/>
+                  <a:srgbClr val="00EAFF"/>
+                </a:solidFill>
+                <a:latin typeface="Segoe UI" pitchFamily="34" charset="0"/>
+                <a:ea typeface="Segoe UI" pitchFamily="34" charset="-122"/>
+                <a:cs typeface="Segoe UI" pitchFamily="34" charset="-120"/>
               </a:rPr>
               <a:t>Fail rate</a:t>
             </a:r>
@@ -7469,11 +7469,11 @@
             <a:avLst/>
           </a:prstGeom>
           <a:solidFill>
-            <a:srgbClr val="001D3D"/>
+            <a:srgbClr val="0F172A"/>
           </a:solidFill>
           <a:ln w="6350">
             <a:solidFill>
-              <a:srgbClr val="001D3D"/>
+              <a:srgbClr val="0F172A"/>
             </a:solidFill>
             <a:prstDash val="solid"/>
           </a:ln>
@@ -7506,11 +7506,11 @@
             <a:r>
               <a:rPr lang="en-US" sz="1200" dirty="0">
                 <a:solidFill>
-                  <a:srgbClr val="FFD60A"/>
-                </a:solidFill>
-                <a:latin typeface="Arial" pitchFamily="34" charset="0"/>
-                <a:ea typeface="Arial" pitchFamily="34" charset="-122"/>
-                <a:cs typeface="Arial" pitchFamily="34" charset="-120"/>
+                  <a:srgbClr val="F8FAFC"/>
+                </a:solidFill>
+                <a:latin typeface="Segoe UI" pitchFamily="34" charset="0"/>
+                <a:ea typeface="Segoe UI" pitchFamily="34" charset="-122"/>
+                <a:cs typeface="Segoe UI" pitchFamily="34" charset="-120"/>
               </a:rPr>
               <a:t>1 user</a:t>
             </a:r>
@@ -7533,11 +7533,11 @@
             <a:avLst/>
           </a:prstGeom>
           <a:solidFill>
-            <a:srgbClr val="001D3D"/>
+            <a:srgbClr val="0F172A"/>
           </a:solidFill>
           <a:ln w="6350">
             <a:solidFill>
-              <a:srgbClr val="001D3D"/>
+              <a:srgbClr val="0F172A"/>
             </a:solidFill>
             <a:prstDash val="solid"/>
           </a:ln>
@@ -7570,11 +7570,11 @@
             <a:r>
               <a:rPr lang="en-US" sz="1200" dirty="0">
                 <a:solidFill>
-                  <a:srgbClr val="FFD60A"/>
-                </a:solidFill>
-                <a:latin typeface="Arial" pitchFamily="34" charset="0"/>
-                <a:ea typeface="Arial" pitchFamily="34" charset="-122"/>
-                <a:cs typeface="Arial" pitchFamily="34" charset="-120"/>
+                  <a:srgbClr val="F8FAFC"/>
+                </a:solidFill>
+                <a:latin typeface="Segoe UI" pitchFamily="34" charset="0"/>
+                <a:ea typeface="Segoe UI" pitchFamily="34" charset="-122"/>
+                <a:cs typeface="Segoe UI" pitchFamily="34" charset="-120"/>
               </a:rPr>
               <a:t>13.3s</a:t>
             </a:r>
@@ -7597,11 +7597,11 @@
             <a:avLst/>
           </a:prstGeom>
           <a:solidFill>
-            <a:srgbClr val="001D3D"/>
+            <a:srgbClr val="0F172A"/>
           </a:solidFill>
           <a:ln w="6350">
             <a:solidFill>
-              <a:srgbClr val="001D3D"/>
+              <a:srgbClr val="0F172A"/>
             </a:solidFill>
             <a:prstDash val="solid"/>
           </a:ln>
@@ -7634,11 +7634,11 @@
             <a:r>
               <a:rPr lang="en-US" sz="1200" dirty="0">
                 <a:solidFill>
-                  <a:srgbClr val="FFD60A"/>
-                </a:solidFill>
-                <a:latin typeface="Arial" pitchFamily="34" charset="0"/>
-                <a:ea typeface="Arial" pitchFamily="34" charset="-122"/>
-                <a:cs typeface="Arial" pitchFamily="34" charset="-120"/>
+                  <a:srgbClr val="F8FAFC"/>
+                </a:solidFill>
+                <a:latin typeface="Segoe UI" pitchFamily="34" charset="0"/>
+                <a:ea typeface="Segoe UI" pitchFamily="34" charset="-122"/>
+                <a:cs typeface="Segoe UI" pitchFamily="34" charset="-120"/>
               </a:rPr>
               <a:t>19.2s</a:t>
             </a:r>
@@ -7661,11 +7661,11 @@
             <a:avLst/>
           </a:prstGeom>
           <a:solidFill>
-            <a:srgbClr val="001D3D"/>
+            <a:srgbClr val="0F172A"/>
           </a:solidFill>
           <a:ln w="6350">
             <a:solidFill>
-              <a:srgbClr val="001D3D"/>
+              <a:srgbClr val="0F172A"/>
             </a:solidFill>
             <a:prstDash val="solid"/>
           </a:ln>
@@ -7698,11 +7698,11 @@
             <a:r>
               <a:rPr lang="en-US" sz="1200" dirty="0">
                 <a:solidFill>
-                  <a:srgbClr val="FFD60A"/>
-                </a:solidFill>
-                <a:latin typeface="Arial" pitchFamily="34" charset="0"/>
-                <a:ea typeface="Arial" pitchFamily="34" charset="-122"/>
-                <a:cs typeface="Arial" pitchFamily="34" charset="-120"/>
+                  <a:srgbClr val="F8FAFC"/>
+                </a:solidFill>
+                <a:latin typeface="Segoe UI" pitchFamily="34" charset="0"/>
+                <a:ea typeface="Segoe UI" pitchFamily="34" charset="-122"/>
+                <a:cs typeface="Segoe UI" pitchFamily="34" charset="-120"/>
               </a:rPr>
               <a:t>0.07 r/s</a:t>
             </a:r>
@@ -7725,11 +7725,11 @@
             <a:avLst/>
           </a:prstGeom>
           <a:solidFill>
-            <a:srgbClr val="001D3D"/>
+            <a:srgbClr val="0F172A"/>
           </a:solidFill>
           <a:ln w="6350">
             <a:solidFill>
-              <a:srgbClr val="001D3D"/>
+              <a:srgbClr val="0F172A"/>
             </a:solidFill>
             <a:prstDash val="solid"/>
           </a:ln>
@@ -7762,11 +7762,11 @@
             <a:r>
               <a:rPr lang="en-US" sz="1200" dirty="0">
                 <a:solidFill>
-                  <a:srgbClr val="FFD60A"/>
-                </a:solidFill>
-                <a:latin typeface="Arial" pitchFamily="34" charset="0"/>
-                <a:ea typeface="Arial" pitchFamily="34" charset="-122"/>
-                <a:cs typeface="Arial" pitchFamily="34" charset="-120"/>
+                  <a:srgbClr val="F8FAFC"/>
+                </a:solidFill>
+                <a:latin typeface="Segoe UI" pitchFamily="34" charset="0"/>
+                <a:ea typeface="Segoe UI" pitchFamily="34" charset="-122"/>
+                <a:cs typeface="Segoe UI" pitchFamily="34" charset="-120"/>
               </a:rPr>
               <a:t>0%</a:t>
             </a:r>
@@ -7789,11 +7789,11 @@
             <a:avLst/>
           </a:prstGeom>
           <a:solidFill>
-            <a:srgbClr val="000814"/>
+            <a:srgbClr val="020617"/>
           </a:solidFill>
           <a:ln w="6350">
             <a:solidFill>
-              <a:srgbClr val="001D3D"/>
+              <a:srgbClr val="0F172A"/>
             </a:solidFill>
             <a:prstDash val="solid"/>
           </a:ln>
@@ -7826,11 +7826,11 @@
             <a:r>
               <a:rPr lang="en-US" sz="1200" dirty="0">
                 <a:solidFill>
-                  <a:srgbClr val="FFD60A"/>
-                </a:solidFill>
-                <a:latin typeface="Arial" pitchFamily="34" charset="0"/>
-                <a:ea typeface="Arial" pitchFamily="34" charset="-122"/>
-                <a:cs typeface="Arial" pitchFamily="34" charset="-120"/>
+                  <a:srgbClr val="F8FAFC"/>
+                </a:solidFill>
+                <a:latin typeface="Segoe UI" pitchFamily="34" charset="0"/>
+                <a:ea typeface="Segoe UI" pitchFamily="34" charset="-122"/>
+                <a:cs typeface="Segoe UI" pitchFamily="34" charset="-120"/>
               </a:rPr>
               <a:t>2 users</a:t>
             </a:r>
@@ -7853,11 +7853,11 @@
             <a:avLst/>
           </a:prstGeom>
           <a:solidFill>
-            <a:srgbClr val="000814"/>
+            <a:srgbClr val="020617"/>
           </a:solidFill>
           <a:ln w="6350">
             <a:solidFill>
-              <a:srgbClr val="001D3D"/>
+              <a:srgbClr val="0F172A"/>
             </a:solidFill>
             <a:prstDash val="solid"/>
           </a:ln>
@@ -7890,11 +7890,11 @@
             <a:r>
               <a:rPr lang="en-US" sz="1200" dirty="0">
                 <a:solidFill>
-                  <a:srgbClr val="FFD60A"/>
-                </a:solidFill>
-                <a:latin typeface="Arial" pitchFamily="34" charset="0"/>
-                <a:ea typeface="Arial" pitchFamily="34" charset="-122"/>
-                <a:cs typeface="Arial" pitchFamily="34" charset="-120"/>
+                  <a:srgbClr val="F8FAFC"/>
+                </a:solidFill>
+                <a:latin typeface="Segoe UI" pitchFamily="34" charset="0"/>
+                <a:ea typeface="Segoe UI" pitchFamily="34" charset="-122"/>
+                <a:cs typeface="Segoe UI" pitchFamily="34" charset="-120"/>
               </a:rPr>
               <a:t>29.0s</a:t>
             </a:r>
@@ -7917,11 +7917,11 @@
             <a:avLst/>
           </a:prstGeom>
           <a:solidFill>
-            <a:srgbClr val="000814"/>
+            <a:srgbClr val="020617"/>
           </a:solidFill>
           <a:ln w="6350">
             <a:solidFill>
-              <a:srgbClr val="001D3D"/>
+              <a:srgbClr val="0F172A"/>
             </a:solidFill>
             <a:prstDash val="solid"/>
           </a:ln>
@@ -7954,11 +7954,11 @@
             <a:r>
               <a:rPr lang="en-US" sz="1200" dirty="0">
                 <a:solidFill>
-                  <a:srgbClr val="FFD60A"/>
-                </a:solidFill>
-                <a:latin typeface="Arial" pitchFamily="34" charset="0"/>
-                <a:ea typeface="Arial" pitchFamily="34" charset="-122"/>
-                <a:cs typeface="Arial" pitchFamily="34" charset="-120"/>
+                  <a:srgbClr val="F8FAFC"/>
+                </a:solidFill>
+                <a:latin typeface="Segoe UI" pitchFamily="34" charset="0"/>
+                <a:ea typeface="Segoe UI" pitchFamily="34" charset="-122"/>
+                <a:cs typeface="Segoe UI" pitchFamily="34" charset="-120"/>
               </a:rPr>
               <a:t>39.0s</a:t>
             </a:r>
@@ -7981,11 +7981,11 @@
             <a:avLst/>
           </a:prstGeom>
           <a:solidFill>
-            <a:srgbClr val="000814"/>
+            <a:srgbClr val="020617"/>
           </a:solidFill>
           <a:ln w="6350">
             <a:solidFill>
-              <a:srgbClr val="001D3D"/>
+              <a:srgbClr val="0F172A"/>
             </a:solidFill>
             <a:prstDash val="solid"/>
           </a:ln>
@@ -8018,11 +8018,11 @@
             <a:r>
               <a:rPr lang="en-US" sz="1200" dirty="0">
                 <a:solidFill>
-                  <a:srgbClr val="FFD60A"/>
-                </a:solidFill>
-                <a:latin typeface="Arial" pitchFamily="34" charset="0"/>
-                <a:ea typeface="Arial" pitchFamily="34" charset="-122"/>
-                <a:cs typeface="Arial" pitchFamily="34" charset="-120"/>
+                  <a:srgbClr val="F8FAFC"/>
+                </a:solidFill>
+                <a:latin typeface="Segoe UI" pitchFamily="34" charset="0"/>
+                <a:ea typeface="Segoe UI" pitchFamily="34" charset="-122"/>
+                <a:cs typeface="Segoe UI" pitchFamily="34" charset="-120"/>
               </a:rPr>
               <a:t>0.06 r/s</a:t>
             </a:r>
@@ -8045,11 +8045,11 @@
             <a:avLst/>
           </a:prstGeom>
           <a:solidFill>
-            <a:srgbClr val="000814"/>
+            <a:srgbClr val="020617"/>
           </a:solidFill>
           <a:ln w="6350">
             <a:solidFill>
-              <a:srgbClr val="001D3D"/>
+              <a:srgbClr val="0F172A"/>
             </a:solidFill>
             <a:prstDash val="solid"/>
           </a:ln>
@@ -8082,11 +8082,11 @@
             <a:r>
               <a:rPr lang="en-US" sz="1200" dirty="0">
                 <a:solidFill>
-                  <a:srgbClr val="FFD60A"/>
-                </a:solidFill>
-                <a:latin typeface="Arial" pitchFamily="34" charset="0"/>
-                <a:ea typeface="Arial" pitchFamily="34" charset="-122"/>
-                <a:cs typeface="Arial" pitchFamily="34" charset="-120"/>
+                  <a:srgbClr val="F8FAFC"/>
+                </a:solidFill>
+                <a:latin typeface="Segoe UI" pitchFamily="34" charset="0"/>
+                <a:ea typeface="Segoe UI" pitchFamily="34" charset="-122"/>
+                <a:cs typeface="Segoe UI" pitchFamily="34" charset="-120"/>
               </a:rPr>
               <a:t>0%</a:t>
             </a:r>
@@ -8109,11 +8109,11 @@
             <a:avLst/>
           </a:prstGeom>
           <a:solidFill>
-            <a:srgbClr val="001D3D"/>
+            <a:srgbClr val="0F172A"/>
           </a:solidFill>
           <a:ln w="6350">
             <a:solidFill>
-              <a:srgbClr val="001D3D"/>
+              <a:srgbClr val="0F172A"/>
             </a:solidFill>
             <a:prstDash val="solid"/>
           </a:ln>
@@ -8146,11 +8146,11 @@
             <a:r>
               <a:rPr lang="en-US" sz="1200" dirty="0">
                 <a:solidFill>
-                  <a:srgbClr val="FFD60A"/>
-                </a:solidFill>
-                <a:latin typeface="Arial" pitchFamily="34" charset="0"/>
-                <a:ea typeface="Arial" pitchFamily="34" charset="-122"/>
-                <a:cs typeface="Arial" pitchFamily="34" charset="-120"/>
+                  <a:srgbClr val="F8FAFC"/>
+                </a:solidFill>
+                <a:latin typeface="Segoe UI" pitchFamily="34" charset="0"/>
+                <a:ea typeface="Segoe UI" pitchFamily="34" charset="-122"/>
+                <a:cs typeface="Segoe UI" pitchFamily="34" charset="-120"/>
               </a:rPr>
               <a:t>3 users</a:t>
             </a:r>
@@ -8173,11 +8173,11 @@
             <a:avLst/>
           </a:prstGeom>
           <a:solidFill>
-            <a:srgbClr val="001D3D"/>
+            <a:srgbClr val="0F172A"/>
           </a:solidFill>
           <a:ln w="6350">
             <a:solidFill>
-              <a:srgbClr val="001D3D"/>
+              <a:srgbClr val="0F172A"/>
             </a:solidFill>
             <a:prstDash val="solid"/>
           </a:ln>
@@ -8210,11 +8210,11 @@
             <a:r>
               <a:rPr lang="en-US" sz="1200" dirty="0">
                 <a:solidFill>
-                  <a:srgbClr val="FFD60A"/>
-                </a:solidFill>
-                <a:latin typeface="Arial" pitchFamily="34" charset="0"/>
-                <a:ea typeface="Arial" pitchFamily="34" charset="-122"/>
-                <a:cs typeface="Arial" pitchFamily="34" charset="-120"/>
+                  <a:srgbClr val="F8FAFC"/>
+                </a:solidFill>
+                <a:latin typeface="Segoe UI" pitchFamily="34" charset="0"/>
+                <a:ea typeface="Segoe UI" pitchFamily="34" charset="-122"/>
+                <a:cs typeface="Segoe UI" pitchFamily="34" charset="-120"/>
               </a:rPr>
               <a:t>42.6s</a:t>
             </a:r>
@@ -8237,11 +8237,11 @@
             <a:avLst/>
           </a:prstGeom>
           <a:solidFill>
-            <a:srgbClr val="001D3D"/>
+            <a:srgbClr val="0F172A"/>
           </a:solidFill>
           <a:ln w="6350">
             <a:solidFill>
-              <a:srgbClr val="001D3D"/>
+              <a:srgbClr val="0F172A"/>
             </a:solidFill>
             <a:prstDash val="solid"/>
           </a:ln>
@@ -8274,11 +8274,11 @@
             <a:r>
               <a:rPr lang="en-US" sz="1200" dirty="0">
                 <a:solidFill>
-                  <a:srgbClr val="FFD60A"/>
-                </a:solidFill>
-                <a:latin typeface="Arial" pitchFamily="34" charset="0"/>
-                <a:ea typeface="Arial" pitchFamily="34" charset="-122"/>
-                <a:cs typeface="Arial" pitchFamily="34" charset="-120"/>
+                  <a:srgbClr val="F8FAFC"/>
+                </a:solidFill>
+                <a:latin typeface="Segoe UI" pitchFamily="34" charset="0"/>
+                <a:ea typeface="Segoe UI" pitchFamily="34" charset="-122"/>
+                <a:cs typeface="Segoe UI" pitchFamily="34" charset="-120"/>
               </a:rPr>
               <a:t>45.3s</a:t>
             </a:r>
@@ -8301,11 +8301,11 @@
             <a:avLst/>
           </a:prstGeom>
           <a:solidFill>
-            <a:srgbClr val="001D3D"/>
+            <a:srgbClr val="0F172A"/>
           </a:solidFill>
           <a:ln w="6350">
             <a:solidFill>
-              <a:srgbClr val="001D3D"/>
+              <a:srgbClr val="0F172A"/>
             </a:solidFill>
             <a:prstDash val="solid"/>
           </a:ln>
@@ -8338,11 +8338,11 @@
             <a:r>
               <a:rPr lang="en-US" sz="1200" dirty="0">
                 <a:solidFill>
-                  <a:srgbClr val="FFD60A"/>
-                </a:solidFill>
-                <a:latin typeface="Arial" pitchFamily="34" charset="0"/>
-                <a:ea typeface="Arial" pitchFamily="34" charset="-122"/>
-                <a:cs typeface="Arial" pitchFamily="34" charset="-120"/>
+                  <a:srgbClr val="F8FAFC"/>
+                </a:solidFill>
+                <a:latin typeface="Segoe UI" pitchFamily="34" charset="0"/>
+                <a:ea typeface="Segoe UI" pitchFamily="34" charset="-122"/>
+                <a:cs typeface="Segoe UI" pitchFamily="34" charset="-120"/>
               </a:rPr>
               <a:t>0.07 r/s</a:t>
             </a:r>
@@ -8365,11 +8365,11 @@
             <a:avLst/>
           </a:prstGeom>
           <a:solidFill>
-            <a:srgbClr val="001D3D"/>
+            <a:srgbClr val="0F172A"/>
           </a:solidFill>
           <a:ln w="6350">
             <a:solidFill>
-              <a:srgbClr val="001D3D"/>
+              <a:srgbClr val="0F172A"/>
             </a:solidFill>
             <a:prstDash val="solid"/>
           </a:ln>
@@ -8402,11 +8402,11 @@
             <a:r>
               <a:rPr lang="en-US" sz="1200" dirty="0">
                 <a:solidFill>
-                  <a:srgbClr val="FFD60A"/>
-                </a:solidFill>
-                <a:latin typeface="Arial" pitchFamily="34" charset="0"/>
-                <a:ea typeface="Arial" pitchFamily="34" charset="-122"/>
-                <a:cs typeface="Arial" pitchFamily="34" charset="-120"/>
+                  <a:srgbClr val="F8FAFC"/>
+                </a:solidFill>
+                <a:latin typeface="Segoe UI" pitchFamily="34" charset="0"/>
+                <a:ea typeface="Segoe UI" pitchFamily="34" charset="-122"/>
+                <a:cs typeface="Segoe UI" pitchFamily="34" charset="-120"/>
               </a:rPr>
               <a:t>0%</a:t>
             </a:r>
@@ -8429,11 +8429,11 @@
             <a:avLst/>
           </a:prstGeom>
           <a:solidFill>
-            <a:srgbClr val="000814"/>
+            <a:srgbClr val="020617"/>
           </a:solidFill>
           <a:ln w="6350">
             <a:solidFill>
-              <a:srgbClr val="001D3D"/>
+              <a:srgbClr val="0F172A"/>
             </a:solidFill>
             <a:prstDash val="solid"/>
           </a:ln>
@@ -8468,9 +8468,9 @@
                 <a:solidFill>
                   <a:srgbClr val="F59E0B"/>
                 </a:solidFill>
-                <a:latin typeface="Arial" pitchFamily="34" charset="0"/>
-                <a:ea typeface="Arial" pitchFamily="34" charset="-122"/>
-                <a:cs typeface="Arial" pitchFamily="34" charset="-120"/>
+                <a:latin typeface="Segoe UI" pitchFamily="34" charset="0"/>
+                <a:ea typeface="Segoe UI" pitchFamily="34" charset="-122"/>
+                <a:cs typeface="Segoe UI" pitchFamily="34" charset="-120"/>
               </a:rPr>
               <a:t>4 users</a:t>
             </a:r>
@@ -8493,11 +8493,11 @@
             <a:avLst/>
           </a:prstGeom>
           <a:solidFill>
-            <a:srgbClr val="000814"/>
+            <a:srgbClr val="020617"/>
           </a:solidFill>
           <a:ln w="6350">
             <a:solidFill>
-              <a:srgbClr val="001D3D"/>
+              <a:srgbClr val="0F172A"/>
             </a:solidFill>
             <a:prstDash val="solid"/>
           </a:ln>
@@ -8532,9 +8532,9 @@
                 <a:solidFill>
                   <a:srgbClr val="F59E0B"/>
                 </a:solidFill>
-                <a:latin typeface="Arial" pitchFamily="34" charset="0"/>
-                <a:ea typeface="Arial" pitchFamily="34" charset="-122"/>
-                <a:cs typeface="Arial" pitchFamily="34" charset="-120"/>
+                <a:latin typeface="Segoe UI" pitchFamily="34" charset="0"/>
+                <a:ea typeface="Segoe UI" pitchFamily="34" charset="-122"/>
+                <a:cs typeface="Segoe UI" pitchFamily="34" charset="-120"/>
               </a:rPr>
               <a:t>74.3s</a:t>
             </a:r>
@@ -8557,11 +8557,11 @@
             <a:avLst/>
           </a:prstGeom>
           <a:solidFill>
-            <a:srgbClr val="000814"/>
+            <a:srgbClr val="020617"/>
           </a:solidFill>
           <a:ln w="6350">
             <a:solidFill>
-              <a:srgbClr val="001D3D"/>
+              <a:srgbClr val="0F172A"/>
             </a:solidFill>
             <a:prstDash val="solid"/>
           </a:ln>
@@ -8596,9 +8596,9 @@
                 <a:solidFill>
                   <a:srgbClr val="F59E0B"/>
                 </a:solidFill>
-                <a:latin typeface="Arial" pitchFamily="34" charset="0"/>
-                <a:ea typeface="Arial" pitchFamily="34" charset="-122"/>
-                <a:cs typeface="Arial" pitchFamily="34" charset="-120"/>
+                <a:latin typeface="Segoe UI" pitchFamily="34" charset="0"/>
+                <a:ea typeface="Segoe UI" pitchFamily="34" charset="-122"/>
+                <a:cs typeface="Segoe UI" pitchFamily="34" charset="-120"/>
               </a:rPr>
               <a:t>88.4s</a:t>
             </a:r>
@@ -8621,11 +8621,11 @@
             <a:avLst/>
           </a:prstGeom>
           <a:solidFill>
-            <a:srgbClr val="000814"/>
+            <a:srgbClr val="020617"/>
           </a:solidFill>
           <a:ln w="6350">
             <a:solidFill>
-              <a:srgbClr val="001D3D"/>
+              <a:srgbClr val="0F172A"/>
             </a:solidFill>
             <a:prstDash val="solid"/>
           </a:ln>
@@ -8658,11 +8658,11 @@
             <a:r>
               <a:rPr lang="en-US" sz="1200" dirty="0">
                 <a:solidFill>
-                  <a:srgbClr val="FFD60A"/>
-                </a:solidFill>
-                <a:latin typeface="Arial" pitchFamily="34" charset="0"/>
-                <a:ea typeface="Arial" pitchFamily="34" charset="-122"/>
-                <a:cs typeface="Arial" pitchFamily="34" charset="-120"/>
+                  <a:srgbClr val="F8FAFC"/>
+                </a:solidFill>
+                <a:latin typeface="Segoe UI" pitchFamily="34" charset="0"/>
+                <a:ea typeface="Segoe UI" pitchFamily="34" charset="-122"/>
+                <a:cs typeface="Segoe UI" pitchFamily="34" charset="-120"/>
               </a:rPr>
               <a:t>0.05 r/s</a:t>
             </a:r>
@@ -8685,11 +8685,11 @@
             <a:avLst/>
           </a:prstGeom>
           <a:solidFill>
-            <a:srgbClr val="000814"/>
+            <a:srgbClr val="020617"/>
           </a:solidFill>
           <a:ln w="6350">
             <a:solidFill>
-              <a:srgbClr val="001D3D"/>
+              <a:srgbClr val="0F172A"/>
             </a:solidFill>
             <a:prstDash val="solid"/>
           </a:ln>
@@ -8722,11 +8722,11 @@
             <a:r>
               <a:rPr lang="en-US" sz="1200" dirty="0">
                 <a:solidFill>
-                  <a:srgbClr val="FFD60A"/>
-                </a:solidFill>
-                <a:latin typeface="Arial" pitchFamily="34" charset="0"/>
-                <a:ea typeface="Arial" pitchFamily="34" charset="-122"/>
-                <a:cs typeface="Arial" pitchFamily="34" charset="-120"/>
+                  <a:srgbClr val="F8FAFC"/>
+                </a:solidFill>
+                <a:latin typeface="Segoe UI" pitchFamily="34" charset="0"/>
+                <a:ea typeface="Segoe UI" pitchFamily="34" charset="-122"/>
+                <a:cs typeface="Segoe UI" pitchFamily="34" charset="-120"/>
               </a:rPr>
               <a:t>0%</a:t>
             </a:r>
@@ -8761,11 +8761,11 @@
             <a:r>
               <a:rPr lang="en-US" sz="1300" b="1" dirty="0">
                 <a:solidFill>
-                  <a:srgbClr val="FFC300"/>
-                </a:solidFill>
-                <a:latin typeface="Arial" pitchFamily="34" charset="0"/>
-                <a:ea typeface="Arial" pitchFamily="34" charset="-122"/>
-                <a:cs typeface="Arial" pitchFamily="34" charset="-120"/>
+                  <a:srgbClr val="00EAFF"/>
+                </a:solidFill>
+                <a:latin typeface="Segoe UI" pitchFamily="34" charset="0"/>
+                <a:ea typeface="Segoe UI" pitchFamily="34" charset="-122"/>
+                <a:cs typeface="Segoe UI" pitchFamily="34" charset="-120"/>
               </a:rPr>
               <a:t>Conclusions</a:t>
             </a:r>
@@ -8790,7 +8790,7 @@
             </a:avLst>
           </a:prstGeom>
           <a:solidFill>
-            <a:srgbClr val="001D3D"/>
+            <a:srgbClr val="0F172A"/>
           </a:solidFill>
           <a:ln/>
         </p:spPr>
@@ -8822,11 +8822,11 @@
             <a:r>
               <a:rPr lang="en-US" sz="2600" b="1" dirty="0">
                 <a:solidFill>
-                  <a:srgbClr val="FFC300"/>
-                </a:solidFill>
-                <a:latin typeface="Arial" pitchFamily="34" charset="0"/>
-                <a:ea typeface="Arial" pitchFamily="34" charset="-122"/>
-                <a:cs typeface="Arial" pitchFamily="34" charset="-120"/>
+                  <a:srgbClr val="00EAFF"/>
+                </a:solidFill>
+                <a:latin typeface="Segoe UI" pitchFamily="34" charset="0"/>
+                <a:ea typeface="Segoe UI" pitchFamily="34" charset="-122"/>
+                <a:cs typeface="Segoe UI" pitchFamily="34" charset="-120"/>
               </a:rPr>
               <a:t>4</a:t>
             </a:r>
@@ -8861,11 +8861,11 @@
             <a:r>
               <a:rPr lang="en-US" sz="1100" b="1" dirty="0">
                 <a:solidFill>
-                  <a:srgbClr val="FFD60A"/>
-                </a:solidFill>
-                <a:latin typeface="Arial" pitchFamily="34" charset="0"/>
-                <a:ea typeface="Arial" pitchFamily="34" charset="-122"/>
-                <a:cs typeface="Arial" pitchFamily="34" charset="-120"/>
+                  <a:srgbClr val="F8FAFC"/>
+                </a:solidFill>
+                <a:latin typeface="Segoe UI" pitchFamily="34" charset="0"/>
+                <a:ea typeface="Segoe UI" pitchFamily="34" charset="-122"/>
+                <a:cs typeface="Segoe UI" pitchFamily="34" charset="-120"/>
               </a:rPr>
               <a:t>Max concurrent users</a:t>
             </a:r>
@@ -8900,11 +8900,11 @@
             <a:r>
               <a:rPr lang="en-US" sz="900" dirty="0">
                 <a:solidFill>
-                  <a:srgbClr val="9A8C98"/>
-                </a:solidFill>
-                <a:latin typeface="Arial" pitchFamily="34" charset="0"/>
-                <a:ea typeface="Arial" pitchFamily="34" charset="-122"/>
-                <a:cs typeface="Arial" pitchFamily="34" charset="-120"/>
+                  <a:srgbClr val="94A3B8"/>
+                </a:solidFill>
+                <a:latin typeface="Segoe UI" pitchFamily="34" charset="0"/>
+                <a:ea typeface="Segoe UI" pitchFamily="34" charset="-122"/>
+                <a:cs typeface="Segoe UI" pitchFamily="34" charset="-120"/>
               </a:rPr>
               <a:t>before p50 exceeds 60s</a:t>
             </a:r>
@@ -8929,7 +8929,7 @@
             </a:avLst>
           </a:prstGeom>
           <a:solidFill>
-            <a:srgbClr val="001D3D"/>
+            <a:srgbClr val="0F172A"/>
           </a:solidFill>
           <a:ln/>
         </p:spPr>
@@ -8961,11 +8961,11 @@
             <a:r>
               <a:rPr lang="en-US" sz="2600" b="1" dirty="0">
                 <a:solidFill>
-                  <a:srgbClr val="FFC300"/>
-                </a:solidFill>
-                <a:latin typeface="Arial" pitchFamily="34" charset="0"/>
-                <a:ea typeface="Arial" pitchFamily="34" charset="-122"/>
-                <a:cs typeface="Arial" pitchFamily="34" charset="-120"/>
+                  <a:srgbClr val="00EAFF"/>
+                </a:solidFill>
+                <a:latin typeface="Segoe UI" pitchFamily="34" charset="0"/>
+                <a:ea typeface="Segoe UI" pitchFamily="34" charset="-122"/>
+                <a:cs typeface="Segoe UI" pitchFamily="34" charset="-120"/>
               </a:rPr>
               <a:t>~0.06</a:t>
             </a:r>
@@ -9000,11 +9000,11 @@
             <a:r>
               <a:rPr lang="en-US" sz="1100" b="1" dirty="0">
                 <a:solidFill>
-                  <a:srgbClr val="FFD60A"/>
-                </a:solidFill>
-                <a:latin typeface="Arial" pitchFamily="34" charset="0"/>
-                <a:ea typeface="Arial" pitchFamily="34" charset="-122"/>
-                <a:cs typeface="Arial" pitchFamily="34" charset="-120"/>
+                  <a:srgbClr val="F8FAFC"/>
+                </a:solidFill>
+                <a:latin typeface="Segoe UI" pitchFamily="34" charset="0"/>
+                <a:ea typeface="Segoe UI" pitchFamily="34" charset="-122"/>
+                <a:cs typeface="Segoe UI" pitchFamily="34" charset="-120"/>
               </a:rPr>
               <a:t>Best throughput</a:t>
             </a:r>
@@ -9039,11 +9039,11 @@
             <a:r>
               <a:rPr lang="en-US" sz="900" dirty="0">
                 <a:solidFill>
-                  <a:srgbClr val="9A8C98"/>
-                </a:solidFill>
-                <a:latin typeface="Arial" pitchFamily="34" charset="0"/>
-                <a:ea typeface="Arial" pitchFamily="34" charset="-122"/>
-                <a:cs typeface="Arial" pitchFamily="34" charset="-120"/>
+                  <a:srgbClr val="94A3B8"/>
+                </a:solidFill>
+                <a:latin typeface="Segoe UI" pitchFamily="34" charset="0"/>
+                <a:ea typeface="Segoe UI" pitchFamily="34" charset="-122"/>
+                <a:cs typeface="Segoe UI" pitchFamily="34" charset="-120"/>
               </a:rPr>
               <a:t>req/s at any load level</a:t>
             </a:r>
@@ -9068,7 +9068,7 @@
             </a:avLst>
           </a:prstGeom>
           <a:solidFill>
-            <a:srgbClr val="001D3D"/>
+            <a:srgbClr val="0F172A"/>
           </a:solidFill>
           <a:ln/>
         </p:spPr>
@@ -9100,11 +9100,11 @@
             <a:r>
               <a:rPr lang="en-US" sz="2600" b="1" dirty="0">
                 <a:solidFill>
-                  <a:srgbClr val="FFC300"/>
-                </a:solidFill>
-                <a:latin typeface="Arial" pitchFamily="34" charset="0"/>
-                <a:ea typeface="Arial" pitchFamily="34" charset="-122"/>
-                <a:cs typeface="Arial" pitchFamily="34" charset="-120"/>
+                  <a:srgbClr val="00EAFF"/>
+                </a:solidFill>
+                <a:latin typeface="Segoe UI" pitchFamily="34" charset="0"/>
+                <a:ea typeface="Segoe UI" pitchFamily="34" charset="-122"/>
+                <a:cs typeface="Segoe UI" pitchFamily="34" charset="-120"/>
               </a:rPr>
               <a:t>GPU</a:t>
             </a:r>
@@ -9139,11 +9139,11 @@
             <a:r>
               <a:rPr lang="en-US" sz="1100" b="1" dirty="0">
                 <a:solidFill>
-                  <a:srgbClr val="FFD60A"/>
-                </a:solidFill>
-                <a:latin typeface="Arial" pitchFamily="34" charset="0"/>
-                <a:ea typeface="Arial" pitchFamily="34" charset="-122"/>
-                <a:cs typeface="Arial" pitchFamily="34" charset="-120"/>
+                  <a:srgbClr val="F8FAFC"/>
+                </a:solidFill>
+                <a:latin typeface="Segoe UI" pitchFamily="34" charset="0"/>
+                <a:ea typeface="Segoe UI" pitchFamily="34" charset="-122"/>
+                <a:cs typeface="Segoe UI" pitchFamily="34" charset="-120"/>
               </a:rPr>
               <a:t>Bottleneck</a:t>
             </a:r>
@@ -9178,11 +9178,11 @@
             <a:r>
               <a:rPr lang="en-US" sz="900" dirty="0">
                 <a:solidFill>
-                  <a:srgbClr val="9A8C98"/>
-                </a:solidFill>
-                <a:latin typeface="Arial" pitchFamily="34" charset="0"/>
-                <a:ea typeface="Arial" pitchFamily="34" charset="-122"/>
-                <a:cs typeface="Arial" pitchFamily="34" charset="-120"/>
+                  <a:srgbClr val="94A3B8"/>
+                </a:solidFill>
+                <a:latin typeface="Segoe UI" pitchFamily="34" charset="0"/>
+                <a:ea typeface="Segoe UI" pitchFamily="34" charset="-122"/>
+                <a:cs typeface="Segoe UI" pitchFamily="34" charset="-120"/>
               </a:rPr>
               <a:t>LLM inference on RTX 3050 4GB</a:t>
             </a:r>
@@ -9217,11 +9217,11 @@
             <a:r>
               <a:rPr lang="en-US" sz="1000" dirty="0">
                 <a:solidFill>
-                  <a:srgbClr val="9A8C98"/>
-                </a:solidFill>
-                <a:latin typeface="Arial" pitchFamily="34" charset="0"/>
-                <a:ea typeface="Arial" pitchFamily="34" charset="-122"/>
-                <a:cs typeface="Arial" pitchFamily="34" charset="-120"/>
+                  <a:srgbClr val="94A3B8"/>
+                </a:solidFill>
+                <a:latin typeface="Segoe UI" pitchFamily="34" charset="0"/>
+                <a:ea typeface="Segoe UI" pitchFamily="34" charset="-122"/>
+                <a:cs typeface="Segoe UI" pitchFamily="34" charset="-120"/>
               </a:rPr>
               <a:t>13</a:t>
             </a:r>
@@ -9269,7 +9269,7 @@
             <a:avLst/>
           </a:prstGeom>
           <a:solidFill>
-            <a:srgbClr val="000814"/>
+            <a:srgbClr val="020617"/>
           </a:solidFill>
           <a:ln/>
         </p:spPr>
@@ -9289,7 +9289,7 @@
             <a:avLst/>
           </a:prstGeom>
           <a:solidFill>
-            <a:srgbClr val="FFC300"/>
+            <a:srgbClr val="00EAFF"/>
           </a:solidFill>
           <a:ln/>
         </p:spPr>
@@ -9321,11 +9321,11 @@
             <a:r>
               <a:rPr lang="en-US" sz="3600" b="1" dirty="0">
                 <a:solidFill>
-                  <a:srgbClr val="FFD60A"/>
-                </a:solidFill>
-                <a:latin typeface="Arial" pitchFamily="34" charset="0"/>
-                <a:ea typeface="Arial" pitchFamily="34" charset="-122"/>
-                <a:cs typeface="Arial" pitchFamily="34" charset="-120"/>
+                  <a:srgbClr val="F8FAFC"/>
+                </a:solidFill>
+                <a:latin typeface="Segoe UI" pitchFamily="34" charset="0"/>
+                <a:ea typeface="Segoe UI" pitchFamily="34" charset="-122"/>
+                <a:cs typeface="Segoe UI" pitchFamily="34" charset="-120"/>
               </a:rPr>
               <a:t>Key Takeaways</a:t>
             </a:r>
@@ -9348,7 +9348,7 @@
             <a:avLst/>
           </a:prstGeom>
           <a:solidFill>
-            <a:srgbClr val="FFC300"/>
+            <a:srgbClr val="00EAFF"/>
           </a:solidFill>
           <a:ln/>
         </p:spPr>
@@ -9368,7 +9368,7 @@
             <a:avLst/>
           </a:prstGeom>
           <a:solidFill>
-            <a:srgbClr val="FFC300"/>
+            <a:srgbClr val="00EAFF"/>
           </a:solidFill>
           <a:ln/>
         </p:spPr>
@@ -9400,11 +9400,11 @@
             <a:r>
               <a:rPr lang="en-US" sz="1200" b="1" dirty="0">
                 <a:solidFill>
-                  <a:srgbClr val="000814"/>
-                </a:solidFill>
-                <a:latin typeface="Arial" pitchFamily="34" charset="0"/>
-                <a:ea typeface="Arial" pitchFamily="34" charset="-122"/>
-                <a:cs typeface="Arial" pitchFamily="34" charset="-120"/>
+                  <a:srgbClr val="020617"/>
+                </a:solidFill>
+                <a:latin typeface="Segoe UI" pitchFamily="34" charset="0"/>
+                <a:ea typeface="Segoe UI" pitchFamily="34" charset="-122"/>
+                <a:cs typeface="Segoe UI" pitchFamily="34" charset="-120"/>
               </a:rPr>
               <a:t>01</a:t>
             </a:r>
@@ -9439,11 +9439,11 @@
             <a:r>
               <a:rPr lang="en-US" sz="1400" b="1" dirty="0">
                 <a:solidFill>
-                  <a:srgbClr val="FFD60A"/>
-                </a:solidFill>
-                <a:latin typeface="Arial" pitchFamily="34" charset="0"/>
-                <a:ea typeface="Arial" pitchFamily="34" charset="-122"/>
-                <a:cs typeface="Arial" pitchFamily="34" charset="-120"/>
+                  <a:srgbClr val="F8FAFC"/>
+                </a:solidFill>
+                <a:latin typeface="Segoe UI" pitchFamily="34" charset="0"/>
+                <a:ea typeface="Segoe UI" pitchFamily="34" charset="-122"/>
+                <a:cs typeface="Segoe UI" pitchFamily="34" charset="-120"/>
               </a:rPr>
               <a:t>Full local AI stack</a:t>
             </a:r>
@@ -9478,11 +9478,11 @@
             <a:r>
               <a:rPr lang="en-US" sz="1100" dirty="0">
                 <a:solidFill>
-                  <a:srgbClr val="9A8C98"/>
-                </a:solidFill>
-                <a:latin typeface="Arial" pitchFamily="34" charset="0"/>
-                <a:ea typeface="Arial" pitchFamily="34" charset="-122"/>
-                <a:cs typeface="Arial" pitchFamily="34" charset="-120"/>
+                  <a:srgbClr val="94A3B8"/>
+                </a:solidFill>
+                <a:latin typeface="Segoe UI" pitchFamily="34" charset="0"/>
+                <a:ea typeface="Segoe UI" pitchFamily="34" charset="-122"/>
+                <a:cs typeface="Segoe UI" pitchFamily="34" charset="-120"/>
               </a:rPr>
               <a:t>Ollama, Qdrant, RAG API, FastAPI agent - all on RTX 3050 4GB. No cloud APIs, no subscriptions.</a:t>
             </a:r>
@@ -9505,7 +9505,7 @@
             <a:avLst/>
           </a:prstGeom>
           <a:solidFill>
-            <a:srgbClr val="FFC300"/>
+            <a:srgbClr val="00EAFF"/>
           </a:solidFill>
           <a:ln/>
         </p:spPr>
@@ -9537,11 +9537,11 @@
             <a:r>
               <a:rPr lang="en-US" sz="1200" b="1" dirty="0">
                 <a:solidFill>
-                  <a:srgbClr val="000814"/>
-                </a:solidFill>
-                <a:latin typeface="Arial" pitchFamily="34" charset="0"/>
-                <a:ea typeface="Arial" pitchFamily="34" charset="-122"/>
-                <a:cs typeface="Arial" pitchFamily="34" charset="-120"/>
+                  <a:srgbClr val="020617"/>
+                </a:solidFill>
+                <a:latin typeface="Segoe UI" pitchFamily="34" charset="0"/>
+                <a:ea typeface="Segoe UI" pitchFamily="34" charset="-122"/>
+                <a:cs typeface="Segoe UI" pitchFamily="34" charset="-120"/>
               </a:rPr>
               <a:t>02</a:t>
             </a:r>
@@ -9576,11 +9576,11 @@
             <a:r>
               <a:rPr lang="en-US" sz="1400" b="1" dirty="0">
                 <a:solidFill>
-                  <a:srgbClr val="FFD60A"/>
-                </a:solidFill>
-                <a:latin typeface="Arial" pitchFamily="34" charset="0"/>
-                <a:ea typeface="Arial" pitchFamily="34" charset="-122"/>
-                <a:cs typeface="Arial" pitchFamily="34" charset="-120"/>
+                  <a:srgbClr val="F8FAFC"/>
+                </a:solidFill>
+                <a:latin typeface="Segoe UI" pitchFamily="34" charset="0"/>
+                <a:ea typeface="Segoe UI" pitchFamily="34" charset="-122"/>
+                <a:cs typeface="Segoe UI" pitchFamily="34" charset="-120"/>
               </a:rPr>
               <a:t>Rigorous evaluation</a:t>
             </a:r>
@@ -9615,11 +9615,11 @@
             <a:r>
               <a:rPr lang="en-US" sz="1100" dirty="0">
                 <a:solidFill>
-                  <a:srgbClr val="9A8C98"/>
-                </a:solidFill>
-                <a:latin typeface="Arial" pitchFamily="34" charset="0"/>
-                <a:ea typeface="Arial" pitchFamily="34" charset="-122"/>
-                <a:cs typeface="Arial" pitchFamily="34" charset="-120"/>
+                  <a:srgbClr val="94A3B8"/>
+                </a:solidFill>
+                <a:latin typeface="Segoe UI" pitchFamily="34" charset="0"/>
+                <a:ea typeface="Segoe UI" pitchFamily="34" charset="-122"/>
+                <a:cs typeface="Segoe UI" pitchFamily="34" charset="-120"/>
               </a:rPr>
               <a:t>Held-out test sets, A/B comparisons, load tests. Engineering decisions backed by data, not intuition.</a:t>
             </a:r>
@@ -9642,7 +9642,7 @@
             <a:avLst/>
           </a:prstGeom>
           <a:solidFill>
-            <a:srgbClr val="FFC300"/>
+            <a:srgbClr val="00EAFF"/>
           </a:solidFill>
           <a:ln/>
         </p:spPr>
@@ -9674,11 +9674,11 @@
             <a:r>
               <a:rPr lang="en-US" sz="1200" b="1" dirty="0">
                 <a:solidFill>
-                  <a:srgbClr val="000814"/>
-                </a:solidFill>
-                <a:latin typeface="Arial" pitchFamily="34" charset="0"/>
-                <a:ea typeface="Arial" pitchFamily="34" charset="-122"/>
-                <a:cs typeface="Arial" pitchFamily="34" charset="-120"/>
+                  <a:srgbClr val="020617"/>
+                </a:solidFill>
+                <a:latin typeface="Segoe UI" pitchFamily="34" charset="0"/>
+                <a:ea typeface="Segoe UI" pitchFamily="34" charset="-122"/>
+                <a:cs typeface="Segoe UI" pitchFamily="34" charset="-120"/>
               </a:rPr>
               <a:t>03</a:t>
             </a:r>
@@ -9713,11 +9713,11 @@
             <a:r>
               <a:rPr lang="en-US" sz="1400" b="1" dirty="0">
                 <a:solidFill>
-                  <a:srgbClr val="FFD60A"/>
-                </a:solidFill>
-                <a:latin typeface="Arial" pitchFamily="34" charset="0"/>
-                <a:ea typeface="Arial" pitchFamily="34" charset="-122"/>
-                <a:cs typeface="Arial" pitchFamily="34" charset="-120"/>
+                  <a:srgbClr val="F8FAFC"/>
+                </a:solidFill>
+                <a:latin typeface="Segoe UI" pitchFamily="34" charset="0"/>
+                <a:ea typeface="Segoe UI" pitchFamily="34" charset="-122"/>
+                <a:cs typeface="Segoe UI" pitchFamily="34" charset="-120"/>
               </a:rPr>
               <a:t>Honest reporting</a:t>
             </a:r>
@@ -9752,11 +9752,11 @@
             <a:r>
               <a:rPr lang="en-US" sz="1100" dirty="0">
                 <a:solidFill>
-                  <a:srgbClr val="9A8C98"/>
-                </a:solidFill>
-                <a:latin typeface="Arial" pitchFamily="34" charset="0"/>
-                <a:ea typeface="Arial" pitchFamily="34" charset="-122"/>
-                <a:cs typeface="Arial" pitchFamily="34" charset="-120"/>
+                  <a:srgbClr val="94A3B8"/>
+                </a:solidFill>
+                <a:latin typeface="Segoe UI" pitchFamily="34" charset="0"/>
+                <a:ea typeface="Segoe UI" pitchFamily="34" charset="-122"/>
+                <a:cs typeface="Segoe UI" pitchFamily="34" charset="-120"/>
               </a:rPr>
               <a:t>Fine-tuning on 230 examples did not add capability - base model already knew tool calling. Documented and validated.</a:t>
             </a:r>
@@ -9779,7 +9779,7 @@
             <a:avLst/>
           </a:prstGeom>
           <a:solidFill>
-            <a:srgbClr val="FFC300"/>
+            <a:srgbClr val="00EAFF"/>
           </a:solidFill>
           <a:ln/>
         </p:spPr>
@@ -9811,11 +9811,11 @@
             <a:r>
               <a:rPr lang="en-US" sz="1200" b="1" dirty="0">
                 <a:solidFill>
-                  <a:srgbClr val="000814"/>
-                </a:solidFill>
-                <a:latin typeface="Arial" pitchFamily="34" charset="0"/>
-                <a:ea typeface="Arial" pitchFamily="34" charset="-122"/>
-                <a:cs typeface="Arial" pitchFamily="34" charset="-120"/>
+                  <a:srgbClr val="020617"/>
+                </a:solidFill>
+                <a:latin typeface="Segoe UI" pitchFamily="34" charset="0"/>
+                <a:ea typeface="Segoe UI" pitchFamily="34" charset="-122"/>
+                <a:cs typeface="Segoe UI" pitchFamily="34" charset="-120"/>
               </a:rPr>
               <a:t>04</a:t>
             </a:r>
@@ -9850,11 +9850,11 @@
             <a:r>
               <a:rPr lang="en-US" sz="1400" b="1" dirty="0">
                 <a:solidFill>
-                  <a:srgbClr val="FFD60A"/>
-                </a:solidFill>
-                <a:latin typeface="Arial" pitchFamily="34" charset="0"/>
-                <a:ea typeface="Arial" pitchFamily="34" charset="-122"/>
-                <a:cs typeface="Arial" pitchFamily="34" charset="-120"/>
+                  <a:srgbClr val="F8FAFC"/>
+                </a:solidFill>
+                <a:latin typeface="Segoe UI" pitchFamily="34" charset="0"/>
+                <a:ea typeface="Segoe UI" pitchFamily="34" charset="-122"/>
+                <a:cs typeface="Segoe UI" pitchFamily="34" charset="-120"/>
               </a:rPr>
               <a:t>Real agent capability</a:t>
             </a:r>
@@ -9889,11 +9889,11 @@
             <a:r>
               <a:rPr lang="en-US" sz="1100" dirty="0">
                 <a:solidFill>
-                  <a:srgbClr val="9A8C98"/>
-                </a:solidFill>
-                <a:latin typeface="Arial" pitchFamily="34" charset="0"/>
-                <a:ea typeface="Arial" pitchFamily="34" charset="-122"/>
-                <a:cs typeface="Arial" pitchFamily="34" charset="-120"/>
+                  <a:srgbClr val="94A3B8"/>
+                </a:solidFill>
+                <a:latin typeface="Segoe UI" pitchFamily="34" charset="0"/>
+                <a:ea typeface="Segoe UI" pitchFamily="34" charset="-122"/>
+                <a:cs typeface="Segoe UI" pitchFamily="34" charset="-120"/>
               </a:rPr>
               <a:t>Multi-tool chaining in a single iteration: 3 tools in parallel, no user re-prompts. 5/5 PASS on chaining eval.</a:t>
             </a:r>
@@ -9916,7 +9916,7 @@
             <a:avLst/>
           </a:prstGeom>
           <a:solidFill>
-            <a:srgbClr val="FFC300"/>
+            <a:srgbClr val="00EAFF"/>
           </a:solidFill>
           <a:ln/>
         </p:spPr>
@@ -9948,11 +9948,11 @@
             <a:r>
               <a:rPr lang="en-US" sz="1200" b="1" dirty="0">
                 <a:solidFill>
-                  <a:srgbClr val="000814"/>
-                </a:solidFill>
-                <a:latin typeface="Arial" pitchFamily="34" charset="0"/>
-                <a:ea typeface="Arial" pitchFamily="34" charset="-122"/>
-                <a:cs typeface="Arial" pitchFamily="34" charset="-120"/>
+                  <a:srgbClr val="020617"/>
+                </a:solidFill>
+                <a:latin typeface="Segoe UI" pitchFamily="34" charset="0"/>
+                <a:ea typeface="Segoe UI" pitchFamily="34" charset="-122"/>
+                <a:cs typeface="Segoe UI" pitchFamily="34" charset="-120"/>
               </a:rPr>
               <a:t>05</a:t>
             </a:r>
@@ -9987,11 +9987,11 @@
             <a:r>
               <a:rPr lang="en-US" sz="1400" b="1" dirty="0">
                 <a:solidFill>
-                  <a:srgbClr val="FFD60A"/>
-                </a:solidFill>
-                <a:latin typeface="Arial" pitchFamily="34" charset="0"/>
-                <a:ea typeface="Arial" pitchFamily="34" charset="-122"/>
-                <a:cs typeface="Arial" pitchFamily="34" charset="-120"/>
+                  <a:srgbClr val="F8FAFC"/>
+                </a:solidFill>
+                <a:latin typeface="Segoe UI" pitchFamily="34" charset="0"/>
+                <a:ea typeface="Segoe UI" pitchFamily="34" charset="-122"/>
+                <a:cs typeface="Segoe UI" pitchFamily="34" charset="-120"/>
               </a:rPr>
               <a:t>Capacity known</a:t>
             </a:r>
@@ -10026,11 +10026,11 @@
             <a:r>
               <a:rPr lang="en-US" sz="1100" dirty="0">
                 <a:solidFill>
-                  <a:srgbClr val="9A8C98"/>
-                </a:solidFill>
-                <a:latin typeface="Arial" pitchFamily="34" charset="0"/>
-                <a:ea typeface="Arial" pitchFamily="34" charset="-122"/>
-                <a:cs typeface="Arial" pitchFamily="34" charset="-120"/>
+                  <a:srgbClr val="94A3B8"/>
+                </a:solidFill>
+                <a:latin typeface="Segoe UI" pitchFamily="34" charset="0"/>
+                <a:ea typeface="Segoe UI" pitchFamily="34" charset="-122"/>
+                <a:cs typeface="Segoe UI" pitchFamily="34" charset="-120"/>
               </a:rPr>
               <a:t>Up to 4 concurrent users at acceptable latency. RTX 3050 is the bottleneck - not the software stack.</a:t>
             </a:r>
@@ -10053,7 +10053,7 @@
             <a:avLst/>
           </a:prstGeom>
           <a:solidFill>
-            <a:srgbClr val="001D3D"/>
+            <a:srgbClr val="0F172A"/>
           </a:solidFill>
           <a:ln/>
         </p:spPr>
@@ -10085,11 +10085,11 @@
             <a:r>
               <a:rPr lang="en-US" sz="1000" dirty="0">
                 <a:solidFill>
-                  <a:srgbClr val="9A8C98"/>
-                </a:solidFill>
-                <a:latin typeface="Arial" pitchFamily="34" charset="0"/>
-                <a:ea typeface="Arial" pitchFamily="34" charset="-122"/>
-                <a:cs typeface="Arial" pitchFamily="34" charset="-120"/>
+                  <a:srgbClr val="94A3B8"/>
+                </a:solidFill>
+                <a:latin typeface="Segoe UI" pitchFamily="34" charset="0"/>
+                <a:ea typeface="Segoe UI" pitchFamily="34" charset="-122"/>
+                <a:cs typeface="Segoe UI" pitchFamily="34" charset="-120"/>
               </a:rPr>
               <a:t>Demo: http://localhost:8090  |  Architecture: http://localhost:8090/architecture  |  Source: phase-2-rag/</a:t>
             </a:r>
@@ -10137,7 +10137,7 @@
             <a:avLst/>
           </a:prstGeom>
           <a:solidFill>
-            <a:srgbClr val="000814"/>
+            <a:srgbClr val="020617"/>
           </a:solidFill>
           <a:ln/>
         </p:spPr>
@@ -10157,7 +10157,7 @@
             <a:avLst/>
           </a:prstGeom>
           <a:solidFill>
-            <a:srgbClr val="FFC300"/>
+            <a:srgbClr val="00EAFF"/>
           </a:solidFill>
           <a:ln/>
         </p:spPr>
@@ -10189,11 +10189,11 @@
             <a:r>
               <a:rPr lang="en-US" sz="3600" b="1" dirty="0">
                 <a:solidFill>
-                  <a:srgbClr val="FFD60A"/>
-                </a:solidFill>
-                <a:latin typeface="Arial" pitchFamily="34" charset="0"/>
-                <a:ea typeface="Arial" pitchFamily="34" charset="-122"/>
-                <a:cs typeface="Arial" pitchFamily="34" charset="-120"/>
+                  <a:srgbClr val="F8FAFC"/>
+                </a:solidFill>
+                <a:latin typeface="Segoe UI" pitchFamily="34" charset="0"/>
+                <a:ea typeface="Segoe UI" pitchFamily="34" charset="-122"/>
+                <a:cs typeface="Segoe UI" pitchFamily="34" charset="-120"/>
               </a:rPr>
               <a:t>Contents</a:t>
             </a:r>
@@ -10216,7 +10216,7 @@
             <a:avLst/>
           </a:prstGeom>
           <a:solidFill>
-            <a:srgbClr val="FFC300"/>
+            <a:srgbClr val="00EAFF"/>
           </a:solidFill>
           <a:ln/>
         </p:spPr>
@@ -10248,11 +10248,11 @@
             <a:r>
               <a:rPr lang="en-US" sz="2800" b="1" dirty="0">
                 <a:solidFill>
-                  <a:srgbClr val="FFC300"/>
-                </a:solidFill>
-                <a:latin typeface="Arial" pitchFamily="34" charset="0"/>
-                <a:ea typeface="Arial" pitchFamily="34" charset="-122"/>
-                <a:cs typeface="Arial" pitchFamily="34" charset="-120"/>
+                  <a:srgbClr val="00EAFF"/>
+                </a:solidFill>
+                <a:latin typeface="Segoe UI" pitchFamily="34" charset="0"/>
+                <a:ea typeface="Segoe UI" pitchFamily="34" charset="-122"/>
+                <a:cs typeface="Segoe UI" pitchFamily="34" charset="-120"/>
               </a:rPr>
               <a:t>01</a:t>
             </a:r>
@@ -10275,7 +10275,7 @@
             <a:avLst/>
           </a:prstGeom>
           <a:solidFill>
-            <a:srgbClr val="001D3D"/>
+            <a:srgbClr val="0F172A"/>
           </a:solidFill>
           <a:ln/>
         </p:spPr>
@@ -10307,11 +10307,11 @@
             <a:r>
               <a:rPr lang="en-US" sz="1800" b="1" dirty="0">
                 <a:solidFill>
-                  <a:srgbClr val="FFD60A"/>
-                </a:solidFill>
-                <a:latin typeface="Arial" pitchFamily="34" charset="0"/>
-                <a:ea typeface="Arial" pitchFamily="34" charset="-122"/>
-                <a:cs typeface="Arial" pitchFamily="34" charset="-120"/>
+                  <a:srgbClr val="F8FAFC"/>
+                </a:solidFill>
+                <a:latin typeface="Segoe UI" pitchFamily="34" charset="0"/>
+                <a:ea typeface="Segoe UI" pitchFamily="34" charset="-122"/>
+                <a:cs typeface="Segoe UI" pitchFamily="34" charset="-120"/>
               </a:rPr>
               <a:t>Hardware &amp; Architecture</a:t>
             </a:r>
@@ -10346,11 +10346,11 @@
             <a:r>
               <a:rPr lang="en-US" sz="1200" dirty="0">
                 <a:solidFill>
-                  <a:srgbClr val="9A8C98"/>
-                </a:solidFill>
-                <a:latin typeface="Arial" pitchFamily="34" charset="0"/>
-                <a:ea typeface="Arial" pitchFamily="34" charset="-122"/>
-                <a:cs typeface="Arial" pitchFamily="34" charset="-120"/>
+                  <a:srgbClr val="94A3B8"/>
+                </a:solidFill>
+                <a:latin typeface="Segoe UI" pitchFamily="34" charset="0"/>
+                <a:ea typeface="Segoe UI" pitchFamily="34" charset="-122"/>
+                <a:cs typeface="Segoe UI" pitchFamily="34" charset="-120"/>
               </a:rPr>
               <a:t>RTX 3050, Ollama, Qdrant, Docker</a:t>
             </a:r>
@@ -10385,11 +10385,11 @@
             <a:r>
               <a:rPr lang="en-US" sz="2800" b="1" dirty="0">
                 <a:solidFill>
-                  <a:srgbClr val="FFC300"/>
-                </a:solidFill>
-                <a:latin typeface="Arial" pitchFamily="34" charset="0"/>
-                <a:ea typeface="Arial" pitchFamily="34" charset="-122"/>
-                <a:cs typeface="Arial" pitchFamily="34" charset="-120"/>
+                  <a:srgbClr val="00EAFF"/>
+                </a:solidFill>
+                <a:latin typeface="Segoe UI" pitchFamily="34" charset="0"/>
+                <a:ea typeface="Segoe UI" pitchFamily="34" charset="-122"/>
+                <a:cs typeface="Segoe UI" pitchFamily="34" charset="-120"/>
               </a:rPr>
               <a:t>02</a:t>
             </a:r>
@@ -10412,7 +10412,7 @@
             <a:avLst/>
           </a:prstGeom>
           <a:solidFill>
-            <a:srgbClr val="001D3D"/>
+            <a:srgbClr val="0F172A"/>
           </a:solidFill>
           <a:ln/>
         </p:spPr>
@@ -10444,11 +10444,11 @@
             <a:r>
               <a:rPr lang="en-US" sz="1800" b="1" dirty="0">
                 <a:solidFill>
-                  <a:srgbClr val="FFD60A"/>
-                </a:solidFill>
-                <a:latin typeface="Arial" pitchFamily="34" charset="0"/>
-                <a:ea typeface="Arial" pitchFamily="34" charset="-122"/>
-                <a:cs typeface="Arial" pitchFamily="34" charset="-120"/>
+                  <a:srgbClr val="F8FAFC"/>
+                </a:solidFill>
+                <a:latin typeface="Segoe UI" pitchFamily="34" charset="0"/>
+                <a:ea typeface="Segoe UI" pitchFamily="34" charset="-122"/>
+                <a:cs typeface="Segoe UI" pitchFamily="34" charset="-120"/>
               </a:rPr>
               <a:t>RAG Pipeline</a:t>
             </a:r>
@@ -10483,11 +10483,11 @@
             <a:r>
               <a:rPr lang="en-US" sz="1200" dirty="0">
                 <a:solidFill>
-                  <a:srgbClr val="9A8C98"/>
-                </a:solidFill>
-                <a:latin typeface="Arial" pitchFamily="34" charset="0"/>
-                <a:ea typeface="Arial" pitchFamily="34" charset="-122"/>
-                <a:cs typeface="Arial" pitchFamily="34" charset="-120"/>
+                  <a:srgbClr val="94A3B8"/>
+                </a:solidFill>
+                <a:latin typeface="Segoe UI" pitchFamily="34" charset="0"/>
+                <a:ea typeface="Segoe UI" pitchFamily="34" charset="-122"/>
+                <a:cs typeface="Segoe UI" pitchFamily="34" charset="-120"/>
               </a:rPr>
               <a:t>Vector DB, sentence-transformers, +83% improvement</a:t>
             </a:r>
@@ -10522,11 +10522,11 @@
             <a:r>
               <a:rPr lang="en-US" sz="2800" b="1" dirty="0">
                 <a:solidFill>
-                  <a:srgbClr val="FFC300"/>
-                </a:solidFill>
-                <a:latin typeface="Arial" pitchFamily="34" charset="0"/>
-                <a:ea typeface="Arial" pitchFamily="34" charset="-122"/>
-                <a:cs typeface="Arial" pitchFamily="34" charset="-120"/>
+                  <a:srgbClr val="00EAFF"/>
+                </a:solidFill>
+                <a:latin typeface="Segoe UI" pitchFamily="34" charset="0"/>
+                <a:ea typeface="Segoe UI" pitchFamily="34" charset="-122"/>
+                <a:cs typeface="Segoe UI" pitchFamily="34" charset="-120"/>
               </a:rPr>
               <a:t>03</a:t>
             </a:r>
@@ -10549,7 +10549,7 @@
             <a:avLst/>
           </a:prstGeom>
           <a:solidFill>
-            <a:srgbClr val="001D3D"/>
+            <a:srgbClr val="0F172A"/>
           </a:solidFill>
           <a:ln/>
         </p:spPr>
@@ -10581,11 +10581,11 @@
             <a:r>
               <a:rPr lang="en-US" sz="1800" b="1" dirty="0">
                 <a:solidFill>
-                  <a:srgbClr val="FFD60A"/>
-                </a:solidFill>
-                <a:latin typeface="Arial" pitchFamily="34" charset="0"/>
-                <a:ea typeface="Arial" pitchFamily="34" charset="-122"/>
-                <a:cs typeface="Arial" pitchFamily="34" charset="-120"/>
+                  <a:srgbClr val="F8FAFC"/>
+                </a:solidFill>
+                <a:latin typeface="Segoe UI" pitchFamily="34" charset="0"/>
+                <a:ea typeface="Segoe UI" pitchFamily="34" charset="-122"/>
+                <a:cs typeface="Segoe UI" pitchFamily="34" charset="-120"/>
               </a:rPr>
               <a:t>Fine-tuning</a:t>
             </a:r>
@@ -10620,11 +10620,11 @@
             <a:r>
               <a:rPr lang="en-US" sz="1200" dirty="0">
                 <a:solidFill>
-                  <a:srgbClr val="9A8C98"/>
-                </a:solidFill>
-                <a:latin typeface="Arial" pitchFamily="34" charset="0"/>
-                <a:ea typeface="Arial" pitchFamily="34" charset="-122"/>
-                <a:cs typeface="Arial" pitchFamily="34" charset="-120"/>
+                  <a:srgbClr val="94A3B8"/>
+                </a:solidFill>
+                <a:latin typeface="Segoe UI" pitchFamily="34" charset="0"/>
+                <a:ea typeface="Segoe UI" pitchFamily="34" charset="-122"/>
+                <a:cs typeface="Segoe UI" pitchFamily="34" charset="-120"/>
               </a:rPr>
               <a:t>Unsloth LoRA, 230 train / 15 test, GGUF Q4_K_M</a:t>
             </a:r>
@@ -10659,11 +10659,11 @@
             <a:r>
               <a:rPr lang="en-US" sz="2800" b="1" dirty="0">
                 <a:solidFill>
-                  <a:srgbClr val="FFC300"/>
-                </a:solidFill>
-                <a:latin typeface="Arial" pitchFamily="34" charset="0"/>
-                <a:ea typeface="Arial" pitchFamily="34" charset="-122"/>
-                <a:cs typeface="Arial" pitchFamily="34" charset="-120"/>
+                  <a:srgbClr val="00EAFF"/>
+                </a:solidFill>
+                <a:latin typeface="Segoe UI" pitchFamily="34" charset="0"/>
+                <a:ea typeface="Segoe UI" pitchFamily="34" charset="-122"/>
+                <a:cs typeface="Segoe UI" pitchFamily="34" charset="-120"/>
               </a:rPr>
               <a:t>04</a:t>
             </a:r>
@@ -10686,7 +10686,7 @@
             <a:avLst/>
           </a:prstGeom>
           <a:solidFill>
-            <a:srgbClr val="001D3D"/>
+            <a:srgbClr val="0F172A"/>
           </a:solidFill>
           <a:ln/>
         </p:spPr>
@@ -10718,11 +10718,11 @@
             <a:r>
               <a:rPr lang="en-US" sz="1800" b="1" dirty="0">
                 <a:solidFill>
-                  <a:srgbClr val="FFD60A"/>
-                </a:solidFill>
-                <a:latin typeface="Arial" pitchFamily="34" charset="0"/>
-                <a:ea typeface="Arial" pitchFamily="34" charset="-122"/>
-                <a:cs typeface="Arial" pitchFamily="34" charset="-120"/>
+                  <a:srgbClr val="F8FAFC"/>
+                </a:solidFill>
+                <a:latin typeface="Segoe UI" pitchFamily="34" charset="0"/>
+                <a:ea typeface="Segoe UI" pitchFamily="34" charset="-122"/>
+                <a:cs typeface="Segoe UI" pitchFamily="34" charset="-120"/>
               </a:rPr>
               <a:t>Tool Calling Agent</a:t>
             </a:r>
@@ -10757,11 +10757,11 @@
             <a:r>
               <a:rPr lang="en-US" sz="1200" dirty="0">
                 <a:solidFill>
-                  <a:srgbClr val="9A8C98"/>
-                </a:solidFill>
-                <a:latin typeface="Arial" pitchFamily="34" charset="0"/>
-                <a:ea typeface="Arial" pitchFamily="34" charset="-122"/>
-                <a:cs typeface="Arial" pitchFamily="34" charset="-120"/>
+                  <a:srgbClr val="94A3B8"/>
+                </a:solidFill>
+                <a:latin typeface="Segoe UI" pitchFamily="34" charset="0"/>
+                <a:ea typeface="Segoe UI" pitchFamily="34" charset="-122"/>
+                <a:cs typeface="Segoe UI" pitchFamily="34" charset="-120"/>
               </a:rPr>
               <a:t>6 tools, agent loop, 4/4 E2E tasks</a:t>
             </a:r>
@@ -10796,11 +10796,11 @@
             <a:r>
               <a:rPr lang="en-US" sz="2800" b="1" dirty="0">
                 <a:solidFill>
-                  <a:srgbClr val="FFC300"/>
-                </a:solidFill>
-                <a:latin typeface="Arial" pitchFamily="34" charset="0"/>
-                <a:ea typeface="Arial" pitchFamily="34" charset="-122"/>
-                <a:cs typeface="Arial" pitchFamily="34" charset="-120"/>
+                  <a:srgbClr val="00EAFF"/>
+                </a:solidFill>
+                <a:latin typeface="Segoe UI" pitchFamily="34" charset="0"/>
+                <a:ea typeface="Segoe UI" pitchFamily="34" charset="-122"/>
+                <a:cs typeface="Segoe UI" pitchFamily="34" charset="-120"/>
               </a:rPr>
               <a:t>05</a:t>
             </a:r>
@@ -10823,7 +10823,7 @@
             <a:avLst/>
           </a:prstGeom>
           <a:solidFill>
-            <a:srgbClr val="001D3D"/>
+            <a:srgbClr val="0F172A"/>
           </a:solidFill>
           <a:ln/>
         </p:spPr>
@@ -10855,11 +10855,11 @@
             <a:r>
               <a:rPr lang="en-US" sz="1800" b="1" dirty="0">
                 <a:solidFill>
-                  <a:srgbClr val="FFD60A"/>
-                </a:solidFill>
-                <a:latin typeface="Arial" pitchFamily="34" charset="0"/>
-                <a:ea typeface="Arial" pitchFamily="34" charset="-122"/>
-                <a:cs typeface="Arial" pitchFamily="34" charset="-120"/>
+                  <a:srgbClr val="F8FAFC"/>
+                </a:solidFill>
+                <a:latin typeface="Segoe UI" pitchFamily="34" charset="0"/>
+                <a:ea typeface="Segoe UI" pitchFamily="34" charset="-122"/>
+                <a:cs typeface="Segoe UI" pitchFamily="34" charset="-120"/>
               </a:rPr>
               <a:t>Performance &amp; Capacity</a:t>
             </a:r>
@@ -10894,11 +10894,11 @@
             <a:r>
               <a:rPr lang="en-US" sz="1200" dirty="0">
                 <a:solidFill>
-                  <a:srgbClr val="9A8C98"/>
-                </a:solidFill>
-                <a:latin typeface="Arial" pitchFamily="34" charset="0"/>
-                <a:ea typeface="Arial" pitchFamily="34" charset="-122"/>
-                <a:cs typeface="Arial" pitchFamily="34" charset="-120"/>
+                  <a:srgbClr val="94A3B8"/>
+                </a:solidFill>
+                <a:latin typeface="Segoe UI" pitchFamily="34" charset="0"/>
+                <a:ea typeface="Segoe UI" pitchFamily="34" charset="-122"/>
+                <a:cs typeface="Segoe UI" pitchFamily="34" charset="-120"/>
               </a:rPr>
               <a:t>Load test, multi-tool chaining, max concurrency</a:t>
             </a:r>
@@ -10933,11 +10933,11 @@
             <a:r>
               <a:rPr lang="en-US" sz="1000" dirty="0">
                 <a:solidFill>
-                  <a:srgbClr val="9A8C98"/>
-                </a:solidFill>
-                <a:latin typeface="Arial" pitchFamily="34" charset="0"/>
-                <a:ea typeface="Arial" pitchFamily="34" charset="-122"/>
-                <a:cs typeface="Arial" pitchFamily="34" charset="-120"/>
+                  <a:srgbClr val="94A3B8"/>
+                </a:solidFill>
+                <a:latin typeface="Segoe UI" pitchFamily="34" charset="0"/>
+                <a:ea typeface="Segoe UI" pitchFamily="34" charset="-122"/>
+                <a:cs typeface="Segoe UI" pitchFamily="34" charset="-120"/>
               </a:rPr>
               <a:t>02</a:t>
             </a:r>
@@ -10985,7 +10985,7 @@
             <a:avLst/>
           </a:prstGeom>
           <a:solidFill>
-            <a:srgbClr val="000814"/>
+            <a:srgbClr val="020617"/>
           </a:solidFill>
           <a:ln/>
         </p:spPr>
@@ -11017,13 +11017,13 @@
             <a:r>
               <a:rPr lang="en-US" sz="12000" b="1" dirty="0">
                 <a:solidFill>
-                  <a:srgbClr val="FFC300">
+                  <a:srgbClr val="00EAFF">
                     <a:alpha val="85000"/>
                   </a:srgbClr>
                 </a:solidFill>
-                <a:latin typeface="Arial" pitchFamily="34" charset="0"/>
-                <a:ea typeface="Arial" pitchFamily="34" charset="-122"/>
-                <a:cs typeface="Arial" pitchFamily="34" charset="-120"/>
+                <a:latin typeface="Segoe UI" pitchFamily="34" charset="0"/>
+                <a:ea typeface="Segoe UI" pitchFamily="34" charset="-122"/>
+                <a:cs typeface="Segoe UI" pitchFamily="34" charset="-120"/>
               </a:rPr>
               <a:t>01</a:t>
             </a:r>
@@ -11058,11 +11058,11 @@
             <a:r>
               <a:rPr lang="en-US" sz="4200" b="1" dirty="0">
                 <a:solidFill>
-                  <a:srgbClr val="FFD60A"/>
-                </a:solidFill>
-                <a:latin typeface="Arial" pitchFamily="34" charset="0"/>
-                <a:ea typeface="Arial" pitchFamily="34" charset="-122"/>
-                <a:cs typeface="Arial" pitchFamily="34" charset="-120"/>
+                  <a:srgbClr val="F8FAFC"/>
+                </a:solidFill>
+                <a:latin typeface="Segoe UI" pitchFamily="34" charset="0"/>
+                <a:ea typeface="Segoe UI" pitchFamily="34" charset="-122"/>
+                <a:cs typeface="Segoe UI" pitchFamily="34" charset="-120"/>
               </a:rPr>
               <a:t>Hardware &amp; Architecture</a:t>
             </a:r>
@@ -11085,7 +11085,7 @@
             <a:avLst/>
           </a:prstGeom>
           <a:solidFill>
-            <a:srgbClr val="FFC300"/>
+            <a:srgbClr val="00EAFF"/>
           </a:solidFill>
           <a:ln/>
         </p:spPr>
@@ -11117,11 +11117,11 @@
             <a:r>
               <a:rPr lang="en-US" sz="1400" dirty="0">
                 <a:solidFill>
-                  <a:srgbClr val="9A8C98"/>
-                </a:solidFill>
-                <a:latin typeface="Arial" pitchFamily="34" charset="0"/>
-                <a:ea typeface="Arial" pitchFamily="34" charset="-122"/>
-                <a:cs typeface="Arial" pitchFamily="34" charset="-120"/>
+                  <a:srgbClr val="94A3B8"/>
+                </a:solidFill>
+                <a:latin typeface="Segoe UI" pitchFamily="34" charset="0"/>
+                <a:ea typeface="Segoe UI" pitchFamily="34" charset="-122"/>
+                <a:cs typeface="Segoe UI" pitchFamily="34" charset="-120"/>
               </a:rPr>
               <a:t>RTX 3050 4GB  |  16GB RAM  |  Windows 11  |  Docker Desktop</a:t>
             </a:r>
@@ -11156,11 +11156,11 @@
             <a:r>
               <a:rPr lang="en-US" sz="1300" i="1" dirty="0">
                 <a:solidFill>
-                  <a:srgbClr val="FFC300"/>
-                </a:solidFill>
-                <a:latin typeface="Arial" pitchFamily="34" charset="0"/>
-                <a:ea typeface="Arial" pitchFamily="34" charset="-122"/>
-                <a:cs typeface="Arial" pitchFamily="34" charset="-120"/>
+                  <a:srgbClr val="00EAFF"/>
+                </a:solidFill>
+                <a:latin typeface="Segoe UI" pitchFamily="34" charset="0"/>
+                <a:ea typeface="Segoe UI" pitchFamily="34" charset="-122"/>
+                <a:cs typeface="Segoe UI" pitchFamily="34" charset="-120"/>
               </a:rPr>
               <a:t>Full local stack - no cloud APIs</a:t>
             </a:r>
@@ -11195,11 +11195,11 @@
             <a:r>
               <a:rPr lang="en-US" sz="1000" dirty="0">
                 <a:solidFill>
-                  <a:srgbClr val="9A8C98"/>
-                </a:solidFill>
-                <a:latin typeface="Arial" pitchFamily="34" charset="0"/>
-                <a:ea typeface="Arial" pitchFamily="34" charset="-122"/>
-                <a:cs typeface="Arial" pitchFamily="34" charset="-120"/>
+                  <a:srgbClr val="94A3B8"/>
+                </a:solidFill>
+                <a:latin typeface="Segoe UI" pitchFamily="34" charset="0"/>
+                <a:ea typeface="Segoe UI" pitchFamily="34" charset="-122"/>
+                <a:cs typeface="Segoe UI" pitchFamily="34" charset="-120"/>
               </a:rPr>
               <a:t>03</a:t>
             </a:r>
@@ -11247,7 +11247,7 @@
             <a:avLst/>
           </a:prstGeom>
           <a:solidFill>
-            <a:srgbClr val="000814"/>
+            <a:srgbClr val="020617"/>
           </a:solidFill>
           <a:ln/>
         </p:spPr>
@@ -11267,7 +11267,7 @@
             <a:avLst/>
           </a:prstGeom>
           <a:solidFill>
-            <a:srgbClr val="FFC300"/>
+            <a:srgbClr val="00EAFF"/>
           </a:solidFill>
           <a:ln/>
         </p:spPr>
@@ -11299,11 +11299,11 @@
             <a:r>
               <a:rPr lang="en-US" sz="2800" b="1" dirty="0">
                 <a:solidFill>
-                  <a:srgbClr val="FFD60A"/>
-                </a:solidFill>
-                <a:latin typeface="Arial" pitchFamily="34" charset="0"/>
-                <a:ea typeface="Arial" pitchFamily="34" charset="-122"/>
-                <a:cs typeface="Arial" pitchFamily="34" charset="-120"/>
+                  <a:srgbClr val="F8FAFC"/>
+                </a:solidFill>
+                <a:latin typeface="Segoe UI" pitchFamily="34" charset="0"/>
+                <a:ea typeface="Segoe UI" pitchFamily="34" charset="-122"/>
+                <a:cs typeface="Segoe UI" pitchFamily="34" charset="-120"/>
               </a:rPr>
               <a:t>System Architecture</a:t>
             </a:r>
@@ -11328,7 +11328,7 @@
             </a:avLst>
           </a:prstGeom>
           <a:solidFill>
-            <a:srgbClr val="001D3D"/>
+            <a:srgbClr val="0F172A"/>
           </a:solidFill>
           <a:ln/>
         </p:spPr>
@@ -11360,11 +11360,11 @@
             <a:r>
               <a:rPr lang="en-US" sz="1300" b="1" dirty="0">
                 <a:solidFill>
-                  <a:srgbClr val="FFC300"/>
-                </a:solidFill>
-                <a:latin typeface="Arial" pitchFamily="34" charset="0"/>
-                <a:ea typeface="Arial" pitchFamily="34" charset="-122"/>
-                <a:cs typeface="Arial" pitchFamily="34" charset="-120"/>
+                  <a:srgbClr val="00EAFF"/>
+                </a:solidFill>
+                <a:latin typeface="Segoe UI" pitchFamily="34" charset="0"/>
+                <a:ea typeface="Segoe UI" pitchFamily="34" charset="-122"/>
+                <a:cs typeface="Segoe UI" pitchFamily="34" charset="-120"/>
               </a:rPr>
               <a:t>Hardware</a:t>
             </a:r>
@@ -11399,11 +11399,11 @@
             <a:r>
               <a:rPr lang="en-US" sz="1100" b="1" dirty="0">
                 <a:solidFill>
-                  <a:srgbClr val="9A8C98"/>
-                </a:solidFill>
-                <a:latin typeface="Arial" pitchFamily="34" charset="0"/>
-                <a:ea typeface="Arial" pitchFamily="34" charset="-122"/>
-                <a:cs typeface="Arial" pitchFamily="34" charset="-120"/>
+                  <a:srgbClr val="94A3B8"/>
+                </a:solidFill>
+                <a:latin typeface="Segoe UI" pitchFamily="34" charset="0"/>
+                <a:ea typeface="Segoe UI" pitchFamily="34" charset="-122"/>
+                <a:cs typeface="Segoe UI" pitchFamily="34" charset="-120"/>
               </a:rPr>
               <a:t>Laptop</a:t>
             </a:r>
@@ -11438,11 +11438,11 @@
             <a:r>
               <a:rPr lang="en-US" sz="1100" dirty="0">
                 <a:solidFill>
-                  <a:srgbClr val="FFD60A"/>
-                </a:solidFill>
-                <a:latin typeface="Arial" pitchFamily="34" charset="0"/>
-                <a:ea typeface="Arial" pitchFamily="34" charset="-122"/>
-                <a:cs typeface="Arial" pitchFamily="34" charset="-120"/>
+                  <a:srgbClr val="F8FAFC"/>
+                </a:solidFill>
+                <a:latin typeface="Segoe UI" pitchFamily="34" charset="0"/>
+                <a:ea typeface="Segoe UI" pitchFamily="34" charset="-122"/>
+                <a:cs typeface="Segoe UI" pitchFamily="34" charset="-120"/>
               </a:rPr>
               <a:t>MSI Katana GF66 11UC</a:t>
             </a:r>
@@ -11477,11 +11477,11 @@
             <a:r>
               <a:rPr lang="en-US" sz="1100" b="1" dirty="0">
                 <a:solidFill>
-                  <a:srgbClr val="9A8C98"/>
-                </a:solidFill>
-                <a:latin typeface="Arial" pitchFamily="34" charset="0"/>
-                <a:ea typeface="Arial" pitchFamily="34" charset="-122"/>
-                <a:cs typeface="Arial" pitchFamily="34" charset="-120"/>
+                  <a:srgbClr val="94A3B8"/>
+                </a:solidFill>
+                <a:latin typeface="Segoe UI" pitchFamily="34" charset="0"/>
+                <a:ea typeface="Segoe UI" pitchFamily="34" charset="-122"/>
+                <a:cs typeface="Segoe UI" pitchFamily="34" charset="-120"/>
               </a:rPr>
               <a:t>GPU</a:t>
             </a:r>
@@ -11516,11 +11516,11 @@
             <a:r>
               <a:rPr lang="en-US" sz="1100" dirty="0">
                 <a:solidFill>
-                  <a:srgbClr val="FFD60A"/>
-                </a:solidFill>
-                <a:latin typeface="Arial" pitchFamily="34" charset="0"/>
-                <a:ea typeface="Arial" pitchFamily="34" charset="-122"/>
-                <a:cs typeface="Arial" pitchFamily="34" charset="-120"/>
+                  <a:srgbClr val="F8FAFC"/>
+                </a:solidFill>
+                <a:latin typeface="Segoe UI" pitchFamily="34" charset="0"/>
+                <a:ea typeface="Segoe UI" pitchFamily="34" charset="-122"/>
+                <a:cs typeface="Segoe UI" pitchFamily="34" charset="-120"/>
               </a:rPr>
               <a:t>NVIDIA RTX 3050 - 4GB VRAM</a:t>
             </a:r>
@@ -11555,11 +11555,11 @@
             <a:r>
               <a:rPr lang="en-US" sz="1100" b="1" dirty="0">
                 <a:solidFill>
-                  <a:srgbClr val="9A8C98"/>
-                </a:solidFill>
-                <a:latin typeface="Arial" pitchFamily="34" charset="0"/>
-                <a:ea typeface="Arial" pitchFamily="34" charset="-122"/>
-                <a:cs typeface="Arial" pitchFamily="34" charset="-120"/>
+                  <a:srgbClr val="94A3B8"/>
+                </a:solidFill>
+                <a:latin typeface="Segoe UI" pitchFamily="34" charset="0"/>
+                <a:ea typeface="Segoe UI" pitchFamily="34" charset="-122"/>
+                <a:cs typeface="Segoe UI" pitchFamily="34" charset="-120"/>
               </a:rPr>
               <a:t>RAM</a:t>
             </a:r>
@@ -11594,11 +11594,11 @@
             <a:r>
               <a:rPr lang="en-US" sz="1100" dirty="0">
                 <a:solidFill>
-                  <a:srgbClr val="FFD60A"/>
-                </a:solidFill>
-                <a:latin typeface="Arial" pitchFamily="34" charset="0"/>
-                <a:ea typeface="Arial" pitchFamily="34" charset="-122"/>
-                <a:cs typeface="Arial" pitchFamily="34" charset="-120"/>
+                  <a:srgbClr val="F8FAFC"/>
+                </a:solidFill>
+                <a:latin typeface="Segoe UI" pitchFamily="34" charset="0"/>
+                <a:ea typeface="Segoe UI" pitchFamily="34" charset="-122"/>
+                <a:cs typeface="Segoe UI" pitchFamily="34" charset="-120"/>
               </a:rPr>
               <a:t>16GB DDR4</a:t>
             </a:r>
@@ -11633,11 +11633,11 @@
             <a:r>
               <a:rPr lang="en-US" sz="1100" b="1" dirty="0">
                 <a:solidFill>
-                  <a:srgbClr val="9A8C98"/>
-                </a:solidFill>
-                <a:latin typeface="Arial" pitchFamily="34" charset="0"/>
-                <a:ea typeface="Arial" pitchFamily="34" charset="-122"/>
-                <a:cs typeface="Arial" pitchFamily="34" charset="-120"/>
+                  <a:srgbClr val="94A3B8"/>
+                </a:solidFill>
+                <a:latin typeface="Segoe UI" pitchFamily="34" charset="0"/>
+                <a:ea typeface="Segoe UI" pitchFamily="34" charset="-122"/>
+                <a:cs typeface="Segoe UI" pitchFamily="34" charset="-120"/>
               </a:rPr>
               <a:t>OS</a:t>
             </a:r>
@@ -11672,11 +11672,11 @@
             <a:r>
               <a:rPr lang="en-US" sz="1100" dirty="0">
                 <a:solidFill>
-                  <a:srgbClr val="FFD60A"/>
-                </a:solidFill>
-                <a:latin typeface="Arial" pitchFamily="34" charset="0"/>
-                <a:ea typeface="Arial" pitchFamily="34" charset="-122"/>
-                <a:cs typeface="Arial" pitchFamily="34" charset="-120"/>
+                  <a:srgbClr val="F8FAFC"/>
+                </a:solidFill>
+                <a:latin typeface="Segoe UI" pitchFamily="34" charset="0"/>
+                <a:ea typeface="Segoe UI" pitchFamily="34" charset="-122"/>
+                <a:cs typeface="Segoe UI" pitchFamily="34" charset="-120"/>
               </a:rPr>
               <a:t>Windows 11</a:t>
             </a:r>
@@ -11711,11 +11711,11 @@
             <a:r>
               <a:rPr lang="en-US" sz="1100" b="1" dirty="0">
                 <a:solidFill>
-                  <a:srgbClr val="9A8C98"/>
-                </a:solidFill>
-                <a:latin typeface="Arial" pitchFamily="34" charset="0"/>
-                <a:ea typeface="Arial" pitchFamily="34" charset="-122"/>
-                <a:cs typeface="Arial" pitchFamily="34" charset="-120"/>
+                  <a:srgbClr val="94A3B8"/>
+                </a:solidFill>
+                <a:latin typeface="Segoe UI" pitchFamily="34" charset="0"/>
+                <a:ea typeface="Segoe UI" pitchFamily="34" charset="-122"/>
+                <a:cs typeface="Segoe UI" pitchFamily="34" charset="-120"/>
               </a:rPr>
               <a:t>GPU CUDA</a:t>
             </a:r>
@@ -11750,11 +11750,11 @@
             <a:r>
               <a:rPr lang="en-US" sz="1100" dirty="0">
                 <a:solidFill>
-                  <a:srgbClr val="FFD60A"/>
-                </a:solidFill>
-                <a:latin typeface="Arial" pitchFamily="34" charset="0"/>
-                <a:ea typeface="Arial" pitchFamily="34" charset="-122"/>
-                <a:cs typeface="Arial" pitchFamily="34" charset="-120"/>
+                  <a:srgbClr val="F8FAFC"/>
+                </a:solidFill>
+                <a:latin typeface="Segoe UI" pitchFamily="34" charset="0"/>
+                <a:ea typeface="Segoe UI" pitchFamily="34" charset="-122"/>
+                <a:cs typeface="Segoe UI" pitchFamily="34" charset="-120"/>
               </a:rPr>
               <a:t>12.8 / Driver 572.61</a:t>
             </a:r>
@@ -11779,7 +11779,7 @@
             </a:avLst>
           </a:prstGeom>
           <a:solidFill>
-            <a:srgbClr val="001D3D"/>
+            <a:srgbClr val="0F172A"/>
           </a:solidFill>
           <a:ln/>
         </p:spPr>
@@ -11811,11 +11811,11 @@
             <a:r>
               <a:rPr lang="en-US" sz="1400" b="1" dirty="0">
                 <a:solidFill>
-                  <a:srgbClr val="FFD60A"/>
-                </a:solidFill>
-                <a:latin typeface="Arial" pitchFamily="34" charset="0"/>
-                <a:ea typeface="Arial" pitchFamily="34" charset="-122"/>
-                <a:cs typeface="Arial" pitchFamily="34" charset="-120"/>
+                  <a:srgbClr val="F8FAFC"/>
+                </a:solidFill>
+                <a:latin typeface="Segoe UI" pitchFamily="34" charset="0"/>
+                <a:ea typeface="Segoe UI" pitchFamily="34" charset="-122"/>
+                <a:cs typeface="Segoe UI" pitchFamily="34" charset="-120"/>
               </a:rPr>
               <a:t>Ollama</a:t>
             </a:r>
@@ -11838,7 +11838,7 @@
             <a:avLst/>
           </a:prstGeom>
           <a:solidFill>
-            <a:srgbClr val="FFC300"/>
+            <a:srgbClr val="00EAFF"/>
           </a:solidFill>
           <a:ln/>
         </p:spPr>
@@ -11870,11 +11870,11 @@
             <a:r>
               <a:rPr lang="en-US" sz="1800" b="1" dirty="0">
                 <a:solidFill>
-                  <a:srgbClr val="FFC300"/>
-                </a:solidFill>
-                <a:latin typeface="Arial" pitchFamily="34" charset="0"/>
-                <a:ea typeface="Arial" pitchFamily="34" charset="-122"/>
-                <a:cs typeface="Arial" pitchFamily="34" charset="-120"/>
+                  <a:srgbClr val="00EAFF"/>
+                </a:solidFill>
+                <a:latin typeface="Segoe UI" pitchFamily="34" charset="0"/>
+                <a:ea typeface="Segoe UI" pitchFamily="34" charset="-122"/>
+                <a:cs typeface="Segoe UI" pitchFamily="34" charset="-120"/>
               </a:rPr>
               <a:t>:11434</a:t>
             </a:r>
@@ -11909,11 +11909,11 @@
             <a:r>
               <a:rPr lang="en-US" sz="1000" dirty="0">
                 <a:solidFill>
-                  <a:srgbClr val="9A8C98"/>
-                </a:solidFill>
-                <a:latin typeface="Arial" pitchFamily="34" charset="0"/>
-                <a:ea typeface="Arial" pitchFamily="34" charset="-122"/>
-                <a:cs typeface="Arial" pitchFamily="34" charset="-120"/>
+                  <a:srgbClr val="94A3B8"/>
+                </a:solidFill>
+                <a:latin typeface="Segoe UI" pitchFamily="34" charset="0"/>
+                <a:ea typeface="Segoe UI" pitchFamily="34" charset="-122"/>
+                <a:cs typeface="Segoe UI" pitchFamily="34" charset="-120"/>
               </a:rPr>
               <a:t>qwen2.5:3b + qwen2.5-rag-ft</a:t>
             </a:r>
@@ -11938,7 +11938,7 @@
             </a:avLst>
           </a:prstGeom>
           <a:solidFill>
-            <a:srgbClr val="001D3D"/>
+            <a:srgbClr val="0F172A"/>
           </a:solidFill>
           <a:ln/>
         </p:spPr>
@@ -11970,11 +11970,11 @@
             <a:r>
               <a:rPr lang="en-US" sz="1400" b="1" dirty="0">
                 <a:solidFill>
-                  <a:srgbClr val="FFD60A"/>
-                </a:solidFill>
-                <a:latin typeface="Arial" pitchFamily="34" charset="0"/>
-                <a:ea typeface="Arial" pitchFamily="34" charset="-122"/>
-                <a:cs typeface="Arial" pitchFamily="34" charset="-120"/>
+                  <a:srgbClr val="F8FAFC"/>
+                </a:solidFill>
+                <a:latin typeface="Segoe UI" pitchFamily="34" charset="0"/>
+                <a:ea typeface="Segoe UI" pitchFamily="34" charset="-122"/>
+                <a:cs typeface="Segoe UI" pitchFamily="34" charset="-120"/>
               </a:rPr>
               <a:t>Qdrant</a:t>
             </a:r>
@@ -11997,7 +11997,7 @@
             <a:avLst/>
           </a:prstGeom>
           <a:solidFill>
-            <a:srgbClr val="FFC300"/>
+            <a:srgbClr val="00EAFF"/>
           </a:solidFill>
           <a:ln/>
         </p:spPr>
@@ -12029,11 +12029,11 @@
             <a:r>
               <a:rPr lang="en-US" sz="1800" b="1" dirty="0">
                 <a:solidFill>
-                  <a:srgbClr val="FFC300"/>
-                </a:solidFill>
-                <a:latin typeface="Arial" pitchFamily="34" charset="0"/>
-                <a:ea typeface="Arial" pitchFamily="34" charset="-122"/>
-                <a:cs typeface="Arial" pitchFamily="34" charset="-120"/>
+                  <a:srgbClr val="00EAFF"/>
+                </a:solidFill>
+                <a:latin typeface="Segoe UI" pitchFamily="34" charset="0"/>
+                <a:ea typeface="Segoe UI" pitchFamily="34" charset="-122"/>
+                <a:cs typeface="Segoe UI" pitchFamily="34" charset="-120"/>
               </a:rPr>
               <a:t>:6333</a:t>
             </a:r>
@@ -12068,11 +12068,11 @@
             <a:r>
               <a:rPr lang="en-US" sz="1000" dirty="0">
                 <a:solidFill>
-                  <a:srgbClr val="9A8C98"/>
-                </a:solidFill>
-                <a:latin typeface="Arial" pitchFamily="34" charset="0"/>
-                <a:ea typeface="Arial" pitchFamily="34" charset="-122"/>
-                <a:cs typeface="Arial" pitchFamily="34" charset="-120"/>
+                  <a:srgbClr val="94A3B8"/>
+                </a:solidFill>
+                <a:latin typeface="Segoe UI" pitchFamily="34" charset="0"/>
+                <a:ea typeface="Segoe UI" pitchFamily="34" charset="-122"/>
+                <a:cs typeface="Segoe UI" pitchFamily="34" charset="-120"/>
               </a:rPr>
               <a:t>62 chunks, dim 384, cosine</a:t>
             </a:r>
@@ -12097,7 +12097,7 @@
             </a:avLst>
           </a:prstGeom>
           <a:solidFill>
-            <a:srgbClr val="001D3D"/>
+            <a:srgbClr val="0F172A"/>
           </a:solidFill>
           <a:ln/>
         </p:spPr>
@@ -12129,11 +12129,11 @@
             <a:r>
               <a:rPr lang="en-US" sz="1400" b="1" dirty="0">
                 <a:solidFill>
-                  <a:srgbClr val="FFD60A"/>
-                </a:solidFill>
-                <a:latin typeface="Arial" pitchFamily="34" charset="0"/>
-                <a:ea typeface="Arial" pitchFamily="34" charset="-122"/>
-                <a:cs typeface="Arial" pitchFamily="34" charset="-120"/>
+                  <a:srgbClr val="F8FAFC"/>
+                </a:solidFill>
+                <a:latin typeface="Segoe UI" pitchFamily="34" charset="0"/>
+                <a:ea typeface="Segoe UI" pitchFamily="34" charset="-122"/>
+                <a:cs typeface="Segoe UI" pitchFamily="34" charset="-120"/>
               </a:rPr>
               <a:t>RAG API</a:t>
             </a:r>
@@ -12156,7 +12156,7 @@
             <a:avLst/>
           </a:prstGeom>
           <a:solidFill>
-            <a:srgbClr val="FFC300"/>
+            <a:srgbClr val="00EAFF"/>
           </a:solidFill>
           <a:ln/>
         </p:spPr>
@@ -12188,11 +12188,11 @@
             <a:r>
               <a:rPr lang="en-US" sz="1800" b="1" dirty="0">
                 <a:solidFill>
-                  <a:srgbClr val="FFC300"/>
-                </a:solidFill>
-                <a:latin typeface="Arial" pitchFamily="34" charset="0"/>
-                <a:ea typeface="Arial" pitchFamily="34" charset="-122"/>
-                <a:cs typeface="Arial" pitchFamily="34" charset="-120"/>
+                  <a:srgbClr val="00EAFF"/>
+                </a:solidFill>
+                <a:latin typeface="Segoe UI" pitchFamily="34" charset="0"/>
+                <a:ea typeface="Segoe UI" pitchFamily="34" charset="-122"/>
+                <a:cs typeface="Segoe UI" pitchFamily="34" charset="-120"/>
               </a:rPr>
               <a:t>:8000</a:t>
             </a:r>
@@ -12227,11 +12227,11 @@
             <a:r>
               <a:rPr lang="en-US" sz="1000" dirty="0">
                 <a:solidFill>
-                  <a:srgbClr val="9A8C98"/>
-                </a:solidFill>
-                <a:latin typeface="Arial" pitchFamily="34" charset="0"/>
-                <a:ea typeface="Arial" pitchFamily="34" charset="-122"/>
-                <a:cs typeface="Arial" pitchFamily="34" charset="-120"/>
+                  <a:srgbClr val="94A3B8"/>
+                </a:solidFill>
+                <a:latin typeface="Segoe UI" pitchFamily="34" charset="0"/>
+                <a:ea typeface="Segoe UI" pitchFamily="34" charset="-122"/>
+                <a:cs typeface="Segoe UI" pitchFamily="34" charset="-120"/>
               </a:rPr>
               <a:t>sentence-transformers + FastAPI</a:t>
             </a:r>
@@ -12256,7 +12256,7 @@
             </a:avLst>
           </a:prstGeom>
           <a:solidFill>
-            <a:srgbClr val="001D3D"/>
+            <a:srgbClr val="0F172A"/>
           </a:solidFill>
           <a:ln/>
         </p:spPr>
@@ -12288,11 +12288,11 @@
             <a:r>
               <a:rPr lang="en-US" sz="1400" b="1" dirty="0">
                 <a:solidFill>
-                  <a:srgbClr val="FFD60A"/>
-                </a:solidFill>
-                <a:latin typeface="Arial" pitchFamily="34" charset="0"/>
-                <a:ea typeface="Arial" pitchFamily="34" charset="-122"/>
-                <a:cs typeface="Arial" pitchFamily="34" charset="-120"/>
+                  <a:srgbClr val="F8FAFC"/>
+                </a:solidFill>
+                <a:latin typeface="Segoe UI" pitchFamily="34" charset="0"/>
+                <a:ea typeface="Segoe UI" pitchFamily="34" charset="-122"/>
+                <a:cs typeface="Segoe UI" pitchFamily="34" charset="-120"/>
               </a:rPr>
               <a:t>Chat App</a:t>
             </a:r>
@@ -12315,7 +12315,7 @@
             <a:avLst/>
           </a:prstGeom>
           <a:solidFill>
-            <a:srgbClr val="FFC300"/>
+            <a:srgbClr val="00EAFF"/>
           </a:solidFill>
           <a:ln/>
         </p:spPr>
@@ -12347,11 +12347,11 @@
             <a:r>
               <a:rPr lang="en-US" sz="1800" b="1" dirty="0">
                 <a:solidFill>
-                  <a:srgbClr val="FFC300"/>
-                </a:solidFill>
-                <a:latin typeface="Arial" pitchFamily="34" charset="0"/>
-                <a:ea typeface="Arial" pitchFamily="34" charset="-122"/>
-                <a:cs typeface="Arial" pitchFamily="34" charset="-120"/>
+                  <a:srgbClr val="00EAFF"/>
+                </a:solidFill>
+                <a:latin typeface="Segoe UI" pitchFamily="34" charset="0"/>
+                <a:ea typeface="Segoe UI" pitchFamily="34" charset="-122"/>
+                <a:cs typeface="Segoe UI" pitchFamily="34" charset="-120"/>
               </a:rPr>
               <a:t>:8090</a:t>
             </a:r>
@@ -12386,11 +12386,11 @@
             <a:r>
               <a:rPr lang="en-US" sz="1000" dirty="0">
                 <a:solidFill>
-                  <a:srgbClr val="9A8C98"/>
-                </a:solidFill>
-                <a:latin typeface="Arial" pitchFamily="34" charset="0"/>
-                <a:ea typeface="Arial" pitchFamily="34" charset="-122"/>
-                <a:cs typeface="Arial" pitchFamily="34" charset="-120"/>
+                  <a:srgbClr val="94A3B8"/>
+                </a:solidFill>
+                <a:latin typeface="Segoe UI" pitchFamily="34" charset="0"/>
+                <a:ea typeface="Segoe UI" pitchFamily="34" charset="-122"/>
+                <a:cs typeface="Segoe UI" pitchFamily="34" charset="-120"/>
               </a:rPr>
               <a:t>FastAPI SPA, dark mode, markdown</a:t>
             </a:r>
@@ -12413,7 +12413,7 @@
             <a:avLst/>
           </a:prstGeom>
           <a:solidFill>
-            <a:srgbClr val="001D3D"/>
+            <a:srgbClr val="0F172A"/>
           </a:solidFill>
           <a:ln/>
         </p:spPr>
@@ -12445,11 +12445,11 @@
             <a:r>
               <a:rPr lang="en-US" sz="1000" dirty="0">
                 <a:solidFill>
-                  <a:srgbClr val="9A8C98"/>
-                </a:solidFill>
-                <a:latin typeface="Arial" pitchFamily="34" charset="0"/>
-                <a:ea typeface="Arial" pitchFamily="34" charset="-122"/>
-                <a:cs typeface="Arial" pitchFamily="34" charset="-120"/>
+                  <a:srgbClr val="94A3B8"/>
+                </a:solidFill>
+                <a:latin typeface="Segoe UI" pitchFamily="34" charset="0"/>
+                <a:ea typeface="Segoe UI" pitchFamily="34" charset="-122"/>
+                <a:cs typeface="Segoe UI" pitchFamily="34" charset="-120"/>
               </a:rPr>
               <a:t>All services containerized with Docker  |  No cloud APIs  |  Full local inference</a:t>
             </a:r>
@@ -12484,11 +12484,11 @@
             <a:r>
               <a:rPr lang="en-US" sz="1000" dirty="0">
                 <a:solidFill>
-                  <a:srgbClr val="9A8C98"/>
-                </a:solidFill>
-                <a:latin typeface="Arial" pitchFamily="34" charset="0"/>
-                <a:ea typeface="Arial" pitchFamily="34" charset="-122"/>
-                <a:cs typeface="Arial" pitchFamily="34" charset="-120"/>
+                  <a:srgbClr val="94A3B8"/>
+                </a:solidFill>
+                <a:latin typeface="Segoe UI" pitchFamily="34" charset="0"/>
+                <a:ea typeface="Segoe UI" pitchFamily="34" charset="-122"/>
+                <a:cs typeface="Segoe UI" pitchFamily="34" charset="-120"/>
               </a:rPr>
               <a:t>04</a:t>
             </a:r>
@@ -12536,7 +12536,7 @@
             <a:avLst/>
           </a:prstGeom>
           <a:solidFill>
-            <a:srgbClr val="000814"/>
+            <a:srgbClr val="020617"/>
           </a:solidFill>
           <a:ln/>
         </p:spPr>
@@ -12568,13 +12568,13 @@
             <a:r>
               <a:rPr lang="en-US" sz="12000" b="1" dirty="0">
                 <a:solidFill>
-                  <a:srgbClr val="FFC300">
+                  <a:srgbClr val="00EAFF">
                     <a:alpha val="85000"/>
                   </a:srgbClr>
                 </a:solidFill>
-                <a:latin typeface="Arial" pitchFamily="34" charset="0"/>
-                <a:ea typeface="Arial" pitchFamily="34" charset="-122"/>
-                <a:cs typeface="Arial" pitchFamily="34" charset="-120"/>
+                <a:latin typeface="Segoe UI" pitchFamily="34" charset="0"/>
+                <a:ea typeface="Segoe UI" pitchFamily="34" charset="-122"/>
+                <a:cs typeface="Segoe UI" pitchFamily="34" charset="-120"/>
               </a:rPr>
               <a:t>02</a:t>
             </a:r>
@@ -12609,11 +12609,11 @@
             <a:r>
               <a:rPr lang="en-US" sz="4200" b="1" dirty="0">
                 <a:solidFill>
-                  <a:srgbClr val="FFD60A"/>
-                </a:solidFill>
-                <a:latin typeface="Arial" pitchFamily="34" charset="0"/>
-                <a:ea typeface="Arial" pitchFamily="34" charset="-122"/>
-                <a:cs typeface="Arial" pitchFamily="34" charset="-120"/>
+                  <a:srgbClr val="F8FAFC"/>
+                </a:solidFill>
+                <a:latin typeface="Segoe UI" pitchFamily="34" charset="0"/>
+                <a:ea typeface="Segoe UI" pitchFamily="34" charset="-122"/>
+                <a:cs typeface="Segoe UI" pitchFamily="34" charset="-120"/>
               </a:rPr>
               <a:t>RAG Pipeline</a:t>
             </a:r>
@@ -12636,7 +12636,7 @@
             <a:avLst/>
           </a:prstGeom>
           <a:solidFill>
-            <a:srgbClr val="FFC300"/>
+            <a:srgbClr val="00EAFF"/>
           </a:solidFill>
           <a:ln/>
         </p:spPr>
@@ -12668,11 +12668,11 @@
             <a:r>
               <a:rPr lang="en-US" sz="1400" dirty="0">
                 <a:solidFill>
-                  <a:srgbClr val="9A8C98"/>
-                </a:solidFill>
-                <a:latin typeface="Arial" pitchFamily="34" charset="0"/>
-                <a:ea typeface="Arial" pitchFamily="34" charset="-122"/>
-                <a:cs typeface="Arial" pitchFamily="34" charset="-120"/>
+                  <a:srgbClr val="94A3B8"/>
+                </a:solidFill>
+                <a:latin typeface="Segoe UI" pitchFamily="34" charset="0"/>
+                <a:ea typeface="Segoe UI" pitchFamily="34" charset="-122"/>
+                <a:cs typeface="Segoe UI" pitchFamily="34" charset="-120"/>
               </a:rPr>
               <a:t>Retrieval-Augmented Generation over AI engineering documentation</a:t>
             </a:r>
@@ -12707,11 +12707,11 @@
             <a:r>
               <a:rPr lang="en-US" sz="1000" dirty="0">
                 <a:solidFill>
-                  <a:srgbClr val="9A8C98"/>
-                </a:solidFill>
-                <a:latin typeface="Arial" pitchFamily="34" charset="0"/>
-                <a:ea typeface="Arial" pitchFamily="34" charset="-122"/>
-                <a:cs typeface="Arial" pitchFamily="34" charset="-120"/>
+                  <a:srgbClr val="94A3B8"/>
+                </a:solidFill>
+                <a:latin typeface="Segoe UI" pitchFamily="34" charset="0"/>
+                <a:ea typeface="Segoe UI" pitchFamily="34" charset="-122"/>
+                <a:cs typeface="Segoe UI" pitchFamily="34" charset="-120"/>
               </a:rPr>
               <a:t>05</a:t>
             </a:r>
@@ -12759,7 +12759,7 @@
             <a:avLst/>
           </a:prstGeom>
           <a:solidFill>
-            <a:srgbClr val="000814"/>
+            <a:srgbClr val="020617"/>
           </a:solidFill>
           <a:ln/>
         </p:spPr>
@@ -12779,7 +12779,7 @@
             <a:avLst/>
           </a:prstGeom>
           <a:solidFill>
-            <a:srgbClr val="FFC300"/>
+            <a:srgbClr val="00EAFF"/>
           </a:solidFill>
           <a:ln/>
         </p:spPr>
@@ -12811,11 +12811,11 @@
             <a:r>
               <a:rPr lang="en-US" sz="2800" b="1" dirty="0">
                 <a:solidFill>
-                  <a:srgbClr val="FFD60A"/>
-                </a:solidFill>
-                <a:latin typeface="Arial" pitchFamily="34" charset="0"/>
-                <a:ea typeface="Arial" pitchFamily="34" charset="-122"/>
-                <a:cs typeface="Arial" pitchFamily="34" charset="-120"/>
+                  <a:srgbClr val="F8FAFC"/>
+                </a:solidFill>
+                <a:latin typeface="Segoe UI" pitchFamily="34" charset="0"/>
+                <a:ea typeface="Segoe UI" pitchFamily="34" charset="-122"/>
+                <a:cs typeface="Segoe UI" pitchFamily="34" charset="-120"/>
               </a:rPr>
               <a:t>RAG Pipeline - Results</a:t>
             </a:r>
@@ -12840,7 +12840,7 @@
             </a:avLst>
           </a:prstGeom>
           <a:solidFill>
-            <a:srgbClr val="001D3D"/>
+            <a:srgbClr val="0F172A"/>
           </a:solidFill>
           <a:ln/>
         </p:spPr>
@@ -12872,11 +12872,11 @@
             <a:r>
               <a:rPr lang="en-US" sz="4000" b="1" dirty="0">
                 <a:solidFill>
-                  <a:srgbClr val="FFC300"/>
-                </a:solidFill>
-                <a:latin typeface="Arial" pitchFamily="34" charset="0"/>
-                <a:ea typeface="Arial" pitchFamily="34" charset="-122"/>
-                <a:cs typeface="Arial" pitchFamily="34" charset="-120"/>
+                  <a:srgbClr val="00EAFF"/>
+                </a:solidFill>
+                <a:latin typeface="Segoe UI" pitchFamily="34" charset="0"/>
+                <a:ea typeface="Segoe UI" pitchFamily="34" charset="-122"/>
+                <a:cs typeface="Segoe UI" pitchFamily="34" charset="-120"/>
               </a:rPr>
               <a:t>62</a:t>
             </a:r>
@@ -12911,11 +12911,11 @@
             <a:r>
               <a:rPr lang="en-US" sz="1200" b="1" dirty="0">
                 <a:solidFill>
-                  <a:srgbClr val="FFD60A"/>
-                </a:solidFill>
-                <a:latin typeface="Arial" pitchFamily="34" charset="0"/>
-                <a:ea typeface="Arial" pitchFamily="34" charset="-122"/>
-                <a:cs typeface="Arial" pitchFamily="34" charset="-120"/>
+                  <a:srgbClr val="F8FAFC"/>
+                </a:solidFill>
+                <a:latin typeface="Segoe UI" pitchFamily="34" charset="0"/>
+                <a:ea typeface="Segoe UI" pitchFamily="34" charset="-122"/>
+                <a:cs typeface="Segoe UI" pitchFamily="34" charset="-120"/>
               </a:rPr>
               <a:t>Chunks indexed</a:t>
             </a:r>
@@ -12950,11 +12950,11 @@
             <a:r>
               <a:rPr lang="en-US" sz="1000" dirty="0">
                 <a:solidFill>
-                  <a:srgbClr val="9A8C98"/>
-                </a:solidFill>
-                <a:latin typeface="Arial" pitchFamily="34" charset="0"/>
-                <a:ea typeface="Arial" pitchFamily="34" charset="-122"/>
-                <a:cs typeface="Arial" pitchFamily="34" charset="-120"/>
+                  <a:srgbClr val="94A3B8"/>
+                </a:solidFill>
+                <a:latin typeface="Segoe UI" pitchFamily="34" charset="0"/>
+                <a:ea typeface="Segoe UI" pitchFamily="34" charset="-122"/>
+                <a:cs typeface="Segoe UI" pitchFamily="34" charset="-120"/>
               </a:rPr>
               <a:t>AI engineering docs</a:t>
             </a:r>
@@ -12979,7 +12979,7 @@
             </a:avLst>
           </a:prstGeom>
           <a:solidFill>
-            <a:srgbClr val="001D3D"/>
+            <a:srgbClr val="0F172A"/>
           </a:solidFill>
           <a:ln/>
         </p:spPr>
@@ -13011,11 +13011,11 @@
             <a:r>
               <a:rPr lang="en-US" sz="4000" b="1" dirty="0">
                 <a:solidFill>
-                  <a:srgbClr val="FFC300"/>
-                </a:solidFill>
-                <a:latin typeface="Arial" pitchFamily="34" charset="0"/>
-                <a:ea typeface="Arial" pitchFamily="34" charset="-122"/>
-                <a:cs typeface="Arial" pitchFamily="34" charset="-120"/>
+                  <a:srgbClr val="00EAFF"/>
+                </a:solidFill>
+                <a:latin typeface="Segoe UI" pitchFamily="34" charset="0"/>
+                <a:ea typeface="Segoe UI" pitchFamily="34" charset="-122"/>
+                <a:cs typeface="Segoe UI" pitchFamily="34" charset="-120"/>
               </a:rPr>
               <a:t>384</a:t>
             </a:r>
@@ -13050,11 +13050,11 @@
             <a:r>
               <a:rPr lang="en-US" sz="1200" b="1" dirty="0">
                 <a:solidFill>
-                  <a:srgbClr val="FFD60A"/>
-                </a:solidFill>
-                <a:latin typeface="Arial" pitchFamily="34" charset="0"/>
-                <a:ea typeface="Arial" pitchFamily="34" charset="-122"/>
-                <a:cs typeface="Arial" pitchFamily="34" charset="-120"/>
+                  <a:srgbClr val="F8FAFC"/>
+                </a:solidFill>
+                <a:latin typeface="Segoe UI" pitchFamily="34" charset="0"/>
+                <a:ea typeface="Segoe UI" pitchFamily="34" charset="-122"/>
+                <a:cs typeface="Segoe UI" pitchFamily="34" charset="-120"/>
               </a:rPr>
               <a:t>Vector dim</a:t>
             </a:r>
@@ -13089,11 +13089,11 @@
             <a:r>
               <a:rPr lang="en-US" sz="1000" dirty="0">
                 <a:solidFill>
-                  <a:srgbClr val="9A8C98"/>
-                </a:solidFill>
-                <a:latin typeface="Arial" pitchFamily="34" charset="0"/>
-                <a:ea typeface="Arial" pitchFamily="34" charset="-122"/>
-                <a:cs typeface="Arial" pitchFamily="34" charset="-120"/>
+                  <a:srgbClr val="94A3B8"/>
+                </a:solidFill>
+                <a:latin typeface="Segoe UI" pitchFamily="34" charset="0"/>
+                <a:ea typeface="Segoe UI" pitchFamily="34" charset="-122"/>
+                <a:cs typeface="Segoe UI" pitchFamily="34" charset="-120"/>
               </a:rPr>
               <a:t>all-MiniLM-L6-v2</a:t>
             </a:r>
@@ -13118,7 +13118,7 @@
             </a:avLst>
           </a:prstGeom>
           <a:solidFill>
-            <a:srgbClr val="001D3D"/>
+            <a:srgbClr val="0F172A"/>
           </a:solidFill>
           <a:ln/>
         </p:spPr>
@@ -13150,11 +13150,11 @@
             <a:r>
               <a:rPr lang="en-US" sz="4000" b="1" dirty="0">
                 <a:solidFill>
-                  <a:srgbClr val="FFC300"/>
-                </a:solidFill>
-                <a:latin typeface="Arial" pitchFamily="34" charset="0"/>
-                <a:ea typeface="Arial" pitchFamily="34" charset="-122"/>
-                <a:cs typeface="Arial" pitchFamily="34" charset="-120"/>
+                  <a:srgbClr val="00EAFF"/>
+                </a:solidFill>
+                <a:latin typeface="Segoe UI" pitchFamily="34" charset="0"/>
+                <a:ea typeface="Segoe UI" pitchFamily="34" charset="-122"/>
+                <a:cs typeface="Segoe UI" pitchFamily="34" charset="-120"/>
               </a:rPr>
               <a:t>+83%</a:t>
             </a:r>
@@ -13189,11 +13189,11 @@
             <a:r>
               <a:rPr lang="en-US" sz="1200" b="1" dirty="0">
                 <a:solidFill>
-                  <a:srgbClr val="FFD60A"/>
-                </a:solidFill>
-                <a:latin typeface="Arial" pitchFamily="34" charset="0"/>
-                <a:ea typeface="Arial" pitchFamily="34" charset="-122"/>
-                <a:cs typeface="Arial" pitchFamily="34" charset="-120"/>
+                  <a:srgbClr val="F8FAFC"/>
+                </a:solidFill>
+                <a:latin typeface="Segoe UI" pitchFamily="34" charset="0"/>
+                <a:ea typeface="Segoe UI" pitchFamily="34" charset="-122"/>
+                <a:cs typeface="Segoe UI" pitchFamily="34" charset="-120"/>
               </a:rPr>
               <a:t>Answer relevance</a:t>
             </a:r>
@@ -13228,11 +13228,11 @@
             <a:r>
               <a:rPr lang="en-US" sz="1000" dirty="0">
                 <a:solidFill>
-                  <a:srgbClr val="9A8C98"/>
-                </a:solidFill>
-                <a:latin typeface="Arial" pitchFamily="34" charset="0"/>
-                <a:ea typeface="Arial" pitchFamily="34" charset="-122"/>
-                <a:cs typeface="Arial" pitchFamily="34" charset="-120"/>
+                  <a:srgbClr val="94A3B8"/>
+                </a:solidFill>
+                <a:latin typeface="Segoe UI" pitchFamily="34" charset="0"/>
+                <a:ea typeface="Segoe UI" pitchFamily="34" charset="-122"/>
+                <a:cs typeface="Segoe UI" pitchFamily="34" charset="-120"/>
               </a:rPr>
               <a:t>vs no-RAG baseline</a:t>
             </a:r>
@@ -13257,7 +13257,7 @@
             </a:avLst>
           </a:prstGeom>
           <a:solidFill>
-            <a:srgbClr val="001D3D"/>
+            <a:srgbClr val="0F172A"/>
           </a:solidFill>
           <a:ln/>
         </p:spPr>
@@ -13289,11 +13289,11 @@
             <a:r>
               <a:rPr lang="en-US" sz="4000" b="1" dirty="0">
                 <a:solidFill>
-                  <a:srgbClr val="FFC300"/>
-                </a:solidFill>
-                <a:latin typeface="Arial" pitchFamily="34" charset="0"/>
-                <a:ea typeface="Arial" pitchFamily="34" charset="-122"/>
-                <a:cs typeface="Arial" pitchFamily="34" charset="-120"/>
+                  <a:srgbClr val="00EAFF"/>
+                </a:solidFill>
+                <a:latin typeface="Segoe UI" pitchFamily="34" charset="0"/>
+                <a:ea typeface="Segoe UI" pitchFamily="34" charset="-122"/>
+                <a:cs typeface="Segoe UI" pitchFamily="34" charset="-120"/>
               </a:rPr>
               <a:t>68</a:t>
             </a:r>
@@ -13328,11 +13328,11 @@
             <a:r>
               <a:rPr lang="en-US" sz="1200" b="1" dirty="0">
                 <a:solidFill>
-                  <a:srgbClr val="FFD60A"/>
-                </a:solidFill>
-                <a:latin typeface="Arial" pitchFamily="34" charset="0"/>
-                <a:ea typeface="Arial" pitchFamily="34" charset="-122"/>
-                <a:cs typeface="Arial" pitchFamily="34" charset="-120"/>
+                  <a:srgbClr val="F8FAFC"/>
+                </a:solidFill>
+                <a:latin typeface="Segoe UI" pitchFamily="34" charset="0"/>
+                <a:ea typeface="Segoe UI" pitchFamily="34" charset="-122"/>
+                <a:cs typeface="Segoe UI" pitchFamily="34" charset="-120"/>
               </a:rPr>
               <a:t>tok/s throughput</a:t>
             </a:r>
@@ -13367,11 +13367,11 @@
             <a:r>
               <a:rPr lang="en-US" sz="1000" dirty="0">
                 <a:solidFill>
-                  <a:srgbClr val="9A8C98"/>
-                </a:solidFill>
-                <a:latin typeface="Arial" pitchFamily="34" charset="0"/>
-                <a:ea typeface="Arial" pitchFamily="34" charset="-122"/>
-                <a:cs typeface="Arial" pitchFamily="34" charset="-120"/>
+                  <a:srgbClr val="94A3B8"/>
+                </a:solidFill>
+                <a:latin typeface="Segoe UI" pitchFamily="34" charset="0"/>
+                <a:ea typeface="Segoe UI" pitchFamily="34" charset="-122"/>
+                <a:cs typeface="Segoe UI" pitchFamily="34" charset="-120"/>
               </a:rPr>
               <a:t>on RTX 3050</a:t>
             </a:r>
@@ -13406,11 +13406,11 @@
             <a:r>
               <a:rPr lang="en-US" sz="1300" b="1" dirty="0">
                 <a:solidFill>
-                  <a:srgbClr val="FFC300"/>
-                </a:solidFill>
-                <a:latin typeface="Arial" pitchFamily="34" charset="0"/>
-                <a:ea typeface="Arial" pitchFamily="34" charset="-122"/>
-                <a:cs typeface="Arial" pitchFamily="34" charset="-120"/>
+                  <a:srgbClr val="00EAFF"/>
+                </a:solidFill>
+                <a:latin typeface="Segoe UI" pitchFamily="34" charset="0"/>
+                <a:ea typeface="Segoe UI" pitchFamily="34" charset="-122"/>
+                <a:cs typeface="Segoe UI" pitchFamily="34" charset="-120"/>
               </a:rPr>
               <a:t>Pipeline</a:t>
             </a:r>
@@ -13435,7 +13435,7 @@
             </a:avLst>
           </a:prstGeom>
           <a:solidFill>
-            <a:srgbClr val="001D3D"/>
+            <a:srgbClr val="0F172A"/>
           </a:solidFill>
           <a:ln/>
         </p:spPr>
@@ -13467,11 +13467,11 @@
             <a:r>
               <a:rPr lang="en-US" sz="1100" b="1" dirty="0">
                 <a:solidFill>
-                  <a:srgbClr val="FFD60A"/>
-                </a:solidFill>
-                <a:latin typeface="Arial" pitchFamily="34" charset="0"/>
-                <a:ea typeface="Arial" pitchFamily="34" charset="-122"/>
-                <a:cs typeface="Arial" pitchFamily="34" charset="-120"/>
+                  <a:srgbClr val="F8FAFC"/>
+                </a:solidFill>
+                <a:latin typeface="Segoe UI" pitchFamily="34" charset="0"/>
+                <a:ea typeface="Segoe UI" pitchFamily="34" charset="-122"/>
+                <a:cs typeface="Segoe UI" pitchFamily="34" charset="-120"/>
               </a:rPr>
               <a:t>Docs</a:t>
             </a:r>
@@ -13506,11 +13506,11 @@
             <a:r>
               <a:rPr lang="en-US" sz="1400" dirty="0">
                 <a:solidFill>
-                  <a:srgbClr val="FFC300"/>
-                </a:solidFill>
-                <a:latin typeface="Arial" pitchFamily="34" charset="0"/>
-                <a:ea typeface="Arial" pitchFamily="34" charset="-122"/>
-                <a:cs typeface="Arial" pitchFamily="34" charset="-120"/>
+                  <a:srgbClr val="00EAFF"/>
+                </a:solidFill>
+                <a:latin typeface="Segoe UI" pitchFamily="34" charset="0"/>
+                <a:ea typeface="Segoe UI" pitchFamily="34" charset="-122"/>
+                <a:cs typeface="Segoe UI" pitchFamily="34" charset="-120"/>
               </a:rPr>
               <a:t>-&gt;</a:t>
             </a:r>
@@ -13535,7 +13535,7 @@
             </a:avLst>
           </a:prstGeom>
           <a:solidFill>
-            <a:srgbClr val="001D3D"/>
+            <a:srgbClr val="0F172A"/>
           </a:solidFill>
           <a:ln/>
         </p:spPr>
@@ -13567,11 +13567,11 @@
             <a:r>
               <a:rPr lang="en-US" sz="1100" b="1" dirty="0">
                 <a:solidFill>
-                  <a:srgbClr val="FFD60A"/>
-                </a:solidFill>
-                <a:latin typeface="Arial" pitchFamily="34" charset="0"/>
-                <a:ea typeface="Arial" pitchFamily="34" charset="-122"/>
-                <a:cs typeface="Arial" pitchFamily="34" charset="-120"/>
+                  <a:srgbClr val="F8FAFC"/>
+                </a:solidFill>
+                <a:latin typeface="Segoe UI" pitchFamily="34" charset="0"/>
+                <a:ea typeface="Segoe UI" pitchFamily="34" charset="-122"/>
+                <a:cs typeface="Segoe UI" pitchFamily="34" charset="-120"/>
               </a:rPr>
               <a:t>Scrape</a:t>
             </a:r>
@@ -13606,11 +13606,11 @@
             <a:r>
               <a:rPr lang="en-US" sz="1400" dirty="0">
                 <a:solidFill>
-                  <a:srgbClr val="FFC300"/>
-                </a:solidFill>
-                <a:latin typeface="Arial" pitchFamily="34" charset="0"/>
-                <a:ea typeface="Arial" pitchFamily="34" charset="-122"/>
-                <a:cs typeface="Arial" pitchFamily="34" charset="-120"/>
+                  <a:srgbClr val="00EAFF"/>
+                </a:solidFill>
+                <a:latin typeface="Segoe UI" pitchFamily="34" charset="0"/>
+                <a:ea typeface="Segoe UI" pitchFamily="34" charset="-122"/>
+                <a:cs typeface="Segoe UI" pitchFamily="34" charset="-120"/>
               </a:rPr>
               <a:t>-&gt;</a:t>
             </a:r>
@@ -13635,7 +13635,7 @@
             </a:avLst>
           </a:prstGeom>
           <a:solidFill>
-            <a:srgbClr val="001D3D"/>
+            <a:srgbClr val="0F172A"/>
           </a:solidFill>
           <a:ln/>
         </p:spPr>
@@ -13667,11 +13667,11 @@
             <a:r>
               <a:rPr lang="en-US" sz="1100" b="1" dirty="0">
                 <a:solidFill>
-                  <a:srgbClr val="FFD60A"/>
-                </a:solidFill>
-                <a:latin typeface="Arial" pitchFamily="34" charset="0"/>
-                <a:ea typeface="Arial" pitchFamily="34" charset="-122"/>
-                <a:cs typeface="Arial" pitchFamily="34" charset="-120"/>
+                  <a:srgbClr val="F8FAFC"/>
+                </a:solidFill>
+                <a:latin typeface="Segoe UI" pitchFamily="34" charset="0"/>
+                <a:ea typeface="Segoe UI" pitchFamily="34" charset="-122"/>
+                <a:cs typeface="Segoe UI" pitchFamily="34" charset="-120"/>
               </a:rPr>
               <a:t>Embed</a:t>
             </a:r>
@@ -13706,11 +13706,11 @@
             <a:r>
               <a:rPr lang="en-US" sz="1400" dirty="0">
                 <a:solidFill>
-                  <a:srgbClr val="FFC300"/>
-                </a:solidFill>
-                <a:latin typeface="Arial" pitchFamily="34" charset="0"/>
-                <a:ea typeface="Arial" pitchFamily="34" charset="-122"/>
-                <a:cs typeface="Arial" pitchFamily="34" charset="-120"/>
+                  <a:srgbClr val="00EAFF"/>
+                </a:solidFill>
+                <a:latin typeface="Segoe UI" pitchFamily="34" charset="0"/>
+                <a:ea typeface="Segoe UI" pitchFamily="34" charset="-122"/>
+                <a:cs typeface="Segoe UI" pitchFamily="34" charset="-120"/>
               </a:rPr>
               <a:t>-&gt;</a:t>
             </a:r>
@@ -13735,7 +13735,7 @@
             </a:avLst>
           </a:prstGeom>
           <a:solidFill>
-            <a:srgbClr val="001D3D"/>
+            <a:srgbClr val="0F172A"/>
           </a:solidFill>
           <a:ln/>
         </p:spPr>
@@ -13767,11 +13767,11 @@
             <a:r>
               <a:rPr lang="en-US" sz="1100" b="1" dirty="0">
                 <a:solidFill>
-                  <a:srgbClr val="FFD60A"/>
-                </a:solidFill>
-                <a:latin typeface="Arial" pitchFamily="34" charset="0"/>
-                <a:ea typeface="Arial" pitchFamily="34" charset="-122"/>
-                <a:cs typeface="Arial" pitchFamily="34" charset="-120"/>
+                  <a:srgbClr val="F8FAFC"/>
+                </a:solidFill>
+                <a:latin typeface="Segoe UI" pitchFamily="34" charset="0"/>
+                <a:ea typeface="Segoe UI" pitchFamily="34" charset="-122"/>
+                <a:cs typeface="Segoe UI" pitchFamily="34" charset="-120"/>
               </a:rPr>
               <a:t>Qdrant</a:t>
             </a:r>
@@ -13806,11 +13806,11 @@
             <a:r>
               <a:rPr lang="en-US" sz="1400" dirty="0">
                 <a:solidFill>
-                  <a:srgbClr val="FFC300"/>
-                </a:solidFill>
-                <a:latin typeface="Arial" pitchFamily="34" charset="0"/>
-                <a:ea typeface="Arial" pitchFamily="34" charset="-122"/>
-                <a:cs typeface="Arial" pitchFamily="34" charset="-120"/>
+                  <a:srgbClr val="00EAFF"/>
+                </a:solidFill>
+                <a:latin typeface="Segoe UI" pitchFamily="34" charset="0"/>
+                <a:ea typeface="Segoe UI" pitchFamily="34" charset="-122"/>
+                <a:cs typeface="Segoe UI" pitchFamily="34" charset="-120"/>
               </a:rPr>
               <a:t>-&gt;</a:t>
             </a:r>
@@ -13835,7 +13835,7 @@
             </a:avLst>
           </a:prstGeom>
           <a:solidFill>
-            <a:srgbClr val="001D3D"/>
+            <a:srgbClr val="0F172A"/>
           </a:solidFill>
           <a:ln/>
         </p:spPr>
@@ -13867,11 +13867,11 @@
             <a:r>
               <a:rPr lang="en-US" sz="1100" b="1" dirty="0">
                 <a:solidFill>
-                  <a:srgbClr val="FFD60A"/>
-                </a:solidFill>
-                <a:latin typeface="Arial" pitchFamily="34" charset="0"/>
-                <a:ea typeface="Arial" pitchFamily="34" charset="-122"/>
-                <a:cs typeface="Arial" pitchFamily="34" charset="-120"/>
+                  <a:srgbClr val="F8FAFC"/>
+                </a:solidFill>
+                <a:latin typeface="Segoe UI" pitchFamily="34" charset="0"/>
+                <a:ea typeface="Segoe UI" pitchFamily="34" charset="-122"/>
+                <a:cs typeface="Segoe UI" pitchFamily="34" charset="-120"/>
               </a:rPr>
               <a:t>Retrieve</a:t>
             </a:r>
@@ -13906,11 +13906,11 @@
             <a:r>
               <a:rPr lang="en-US" sz="1400" dirty="0">
                 <a:solidFill>
-                  <a:srgbClr val="FFC300"/>
-                </a:solidFill>
-                <a:latin typeface="Arial" pitchFamily="34" charset="0"/>
-                <a:ea typeface="Arial" pitchFamily="34" charset="-122"/>
-                <a:cs typeface="Arial" pitchFamily="34" charset="-120"/>
+                  <a:srgbClr val="00EAFF"/>
+                </a:solidFill>
+                <a:latin typeface="Segoe UI" pitchFamily="34" charset="0"/>
+                <a:ea typeface="Segoe UI" pitchFamily="34" charset="-122"/>
+                <a:cs typeface="Segoe UI" pitchFamily="34" charset="-120"/>
               </a:rPr>
               <a:t>-&gt;</a:t>
             </a:r>
@@ -13935,7 +13935,7 @@
             </a:avLst>
           </a:prstGeom>
           <a:solidFill>
-            <a:srgbClr val="001D3D"/>
+            <a:srgbClr val="0F172A"/>
           </a:solidFill>
           <a:ln/>
         </p:spPr>
@@ -13967,11 +13967,11 @@
             <a:r>
               <a:rPr lang="en-US" sz="1100" b="1" dirty="0">
                 <a:solidFill>
-                  <a:srgbClr val="FFD60A"/>
-                </a:solidFill>
-                <a:latin typeface="Arial" pitchFamily="34" charset="0"/>
-                <a:ea typeface="Arial" pitchFamily="34" charset="-122"/>
-                <a:cs typeface="Arial" pitchFamily="34" charset="-120"/>
+                  <a:srgbClr val="F8FAFC"/>
+                </a:solidFill>
+                <a:latin typeface="Segoe UI" pitchFamily="34" charset="0"/>
+                <a:ea typeface="Segoe UI" pitchFamily="34" charset="-122"/>
+                <a:cs typeface="Segoe UI" pitchFamily="34" charset="-120"/>
               </a:rPr>
               <a:t>Generate</a:t>
             </a:r>
@@ -13996,7 +13996,7 @@
             </a:avLst>
           </a:prstGeom>
           <a:solidFill>
-            <a:srgbClr val="001D3D"/>
+            <a:srgbClr val="0F172A"/>
           </a:solidFill>
           <a:ln/>
         </p:spPr>
@@ -14028,11 +14028,11 @@
             <a:r>
               <a:rPr lang="en-US" sz="1300" b="1" dirty="0">
                 <a:solidFill>
-                  <a:srgbClr val="FFD60A"/>
-                </a:solidFill>
-                <a:latin typeface="Arial" pitchFamily="34" charset="0"/>
-                <a:ea typeface="Arial" pitchFamily="34" charset="-122"/>
-                <a:cs typeface="Arial" pitchFamily="34" charset="-120"/>
+                  <a:srgbClr val="F8FAFC"/>
+                </a:solidFill>
+                <a:latin typeface="Segoe UI" pitchFamily="34" charset="0"/>
+                <a:ea typeface="Segoe UI" pitchFamily="34" charset="-122"/>
+                <a:cs typeface="Segoe UI" pitchFamily="34" charset="-120"/>
               </a:rPr>
               <a:t>Golden Q&amp;A Dataset + LLM-as-Judge</a:t>
             </a:r>
@@ -14067,11 +14067,11 @@
             <a:r>
               <a:rPr lang="en-US" sz="1100" dirty="0">
                 <a:solidFill>
-                  <a:srgbClr val="9A8C98"/>
-                </a:solidFill>
-                <a:latin typeface="Arial" pitchFamily="34" charset="0"/>
-                <a:ea typeface="Arial" pitchFamily="34" charset="-122"/>
-                <a:cs typeface="Arial" pitchFamily="34" charset="-120"/>
+                  <a:srgbClr val="94A3B8"/>
+                </a:solidFill>
+                <a:latin typeface="Segoe UI" pitchFamily="34" charset="0"/>
+                <a:ea typeface="Segoe UI" pitchFamily="34" charset="-122"/>
+                <a:cs typeface="Segoe UI" pitchFamily="34" charset="-120"/>
               </a:rPr>
               <a:t>Curated question-answer pairs from real technical documentation. LLM judges answer quality on a 1-5 scale. RAG pipeline evaluated against baseline (no retrieval) using the same judge model.</a:t>
             </a:r>
@@ -14106,11 +14106,11 @@
             <a:r>
               <a:rPr lang="en-US" sz="1000" dirty="0">
                 <a:solidFill>
-                  <a:srgbClr val="9A8C98"/>
-                </a:solidFill>
-                <a:latin typeface="Arial" pitchFamily="34" charset="0"/>
-                <a:ea typeface="Arial" pitchFamily="34" charset="-122"/>
-                <a:cs typeface="Arial" pitchFamily="34" charset="-120"/>
+                  <a:srgbClr val="94A3B8"/>
+                </a:solidFill>
+                <a:latin typeface="Segoe UI" pitchFamily="34" charset="0"/>
+                <a:ea typeface="Segoe UI" pitchFamily="34" charset="-122"/>
+                <a:cs typeface="Segoe UI" pitchFamily="34" charset="-120"/>
               </a:rPr>
               <a:t>06</a:t>
             </a:r>
@@ -14158,7 +14158,7 @@
             <a:avLst/>
           </a:prstGeom>
           <a:solidFill>
-            <a:srgbClr val="000814"/>
+            <a:srgbClr val="020617"/>
           </a:solidFill>
           <a:ln/>
         </p:spPr>
@@ -14190,13 +14190,13 @@
             <a:r>
               <a:rPr lang="en-US" sz="12000" b="1" dirty="0">
                 <a:solidFill>
-                  <a:srgbClr val="FFC300">
+                  <a:srgbClr val="00EAFF">
                     <a:alpha val="85000"/>
                   </a:srgbClr>
                 </a:solidFill>
-                <a:latin typeface="Arial" pitchFamily="34" charset="0"/>
-                <a:ea typeface="Arial" pitchFamily="34" charset="-122"/>
-                <a:cs typeface="Arial" pitchFamily="34" charset="-120"/>
+                <a:latin typeface="Segoe UI" pitchFamily="34" charset="0"/>
+                <a:ea typeface="Segoe UI" pitchFamily="34" charset="-122"/>
+                <a:cs typeface="Segoe UI" pitchFamily="34" charset="-120"/>
               </a:rPr>
               <a:t>03</a:t>
             </a:r>
@@ -14231,11 +14231,11 @@
             <a:r>
               <a:rPr lang="en-US" sz="4200" b="1" dirty="0">
                 <a:solidFill>
-                  <a:srgbClr val="FFD60A"/>
-                </a:solidFill>
-                <a:latin typeface="Arial" pitchFamily="34" charset="0"/>
-                <a:ea typeface="Arial" pitchFamily="34" charset="-122"/>
-                <a:cs typeface="Arial" pitchFamily="34" charset="-120"/>
+                  <a:srgbClr val="F8FAFC"/>
+                </a:solidFill>
+                <a:latin typeface="Segoe UI" pitchFamily="34" charset="0"/>
+                <a:ea typeface="Segoe UI" pitchFamily="34" charset="-122"/>
+                <a:cs typeface="Segoe UI" pitchFamily="34" charset="-120"/>
               </a:rPr>
               <a:t>Fine-tuning</a:t>
             </a:r>
@@ -14258,7 +14258,7 @@
             <a:avLst/>
           </a:prstGeom>
           <a:solidFill>
-            <a:srgbClr val="FFC300"/>
+            <a:srgbClr val="00EAFF"/>
           </a:solidFill>
           <a:ln/>
         </p:spPr>
@@ -14290,11 +14290,11 @@
             <a:r>
               <a:rPr lang="en-US" sz="1400" dirty="0">
                 <a:solidFill>
-                  <a:srgbClr val="9A8C98"/>
-                </a:solidFill>
-                <a:latin typeface="Arial" pitchFamily="34" charset="0"/>
-                <a:ea typeface="Arial" pitchFamily="34" charset="-122"/>
-                <a:cs typeface="Arial" pitchFamily="34" charset="-120"/>
+                  <a:srgbClr val="94A3B8"/>
+                </a:solidFill>
+                <a:latin typeface="Segoe UI" pitchFamily="34" charset="0"/>
+                <a:ea typeface="Segoe UI" pitchFamily="34" charset="-122"/>
+                <a:cs typeface="Segoe UI" pitchFamily="34" charset="-120"/>
               </a:rPr>
               <a:t>Unsloth LoRA on tool-calling examples  |  230 train / 15 held-out test</a:t>
             </a:r>
@@ -14329,11 +14329,11 @@
             <a:r>
               <a:rPr lang="en-US" sz="1000" dirty="0">
                 <a:solidFill>
-                  <a:srgbClr val="9A8C98"/>
-                </a:solidFill>
-                <a:latin typeface="Arial" pitchFamily="34" charset="0"/>
-                <a:ea typeface="Arial" pitchFamily="34" charset="-122"/>
-                <a:cs typeface="Arial" pitchFamily="34" charset="-120"/>
+                  <a:srgbClr val="94A3B8"/>
+                </a:solidFill>
+                <a:latin typeface="Segoe UI" pitchFamily="34" charset="0"/>
+                <a:ea typeface="Segoe UI" pitchFamily="34" charset="-122"/>
+                <a:cs typeface="Segoe UI" pitchFamily="34" charset="-120"/>
               </a:rPr>
               <a:t>07</a:t>
             </a:r>
@@ -14381,7 +14381,7 @@
             <a:avLst/>
           </a:prstGeom>
           <a:solidFill>
-            <a:srgbClr val="000814"/>
+            <a:srgbClr val="020617"/>
           </a:solidFill>
           <a:ln/>
         </p:spPr>
@@ -14401,7 +14401,7 @@
             <a:avLst/>
           </a:prstGeom>
           <a:solidFill>
-            <a:srgbClr val="FFC300"/>
+            <a:srgbClr val="00EAFF"/>
           </a:solidFill>
           <a:ln/>
         </p:spPr>
@@ -14433,11 +14433,11 @@
             <a:r>
               <a:rPr lang="en-US" sz="2800" b="1" dirty="0">
                 <a:solidFill>
-                  <a:srgbClr val="FFD60A"/>
-                </a:solidFill>
-                <a:latin typeface="Arial" pitchFamily="34" charset="0"/>
-                <a:ea typeface="Arial" pitchFamily="34" charset="-122"/>
-                <a:cs typeface="Arial" pitchFamily="34" charset="-120"/>
+                  <a:srgbClr val="F8FAFC"/>
+                </a:solidFill>
+                <a:latin typeface="Segoe UI" pitchFamily="34" charset="0"/>
+                <a:ea typeface="Segoe UI" pitchFamily="34" charset="-122"/>
+                <a:cs typeface="Segoe UI" pitchFamily="34" charset="-120"/>
               </a:rPr>
               <a:t>Fine-tuning Results</a:t>
             </a:r>
@@ -14462,7 +14462,7 @@
             </a:avLst>
           </a:prstGeom>
           <a:solidFill>
-            <a:srgbClr val="001D3D"/>
+            <a:srgbClr val="0F172A"/>
           </a:solidFill>
           <a:ln/>
         </p:spPr>
@@ -14494,11 +14494,11 @@
             <a:r>
               <a:rPr lang="en-US" sz="2000" b="1" dirty="0">
                 <a:solidFill>
-                  <a:srgbClr val="FFC300"/>
-                </a:solidFill>
-                <a:latin typeface="Arial" pitchFamily="34" charset="0"/>
-                <a:ea typeface="Arial" pitchFamily="34" charset="-122"/>
-                <a:cs typeface="Arial" pitchFamily="34" charset="-120"/>
+                  <a:srgbClr val="00EAFF"/>
+                </a:solidFill>
+                <a:latin typeface="Segoe UI" pitchFamily="34" charset="0"/>
+                <a:ea typeface="Segoe UI" pitchFamily="34" charset="-122"/>
+                <a:cs typeface="Segoe UI" pitchFamily="34" charset="-120"/>
               </a:rPr>
               <a:t>230</a:t>
             </a:r>
@@ -14533,11 +14533,11 @@
             <a:r>
               <a:rPr lang="en-US" sz="900" dirty="0">
                 <a:solidFill>
-                  <a:srgbClr val="9A8C98"/>
-                </a:solidFill>
-                <a:latin typeface="Arial" pitchFamily="34" charset="0"/>
-                <a:ea typeface="Arial" pitchFamily="34" charset="-122"/>
-                <a:cs typeface="Arial" pitchFamily="34" charset="-120"/>
+                  <a:srgbClr val="94A3B8"/>
+                </a:solidFill>
+                <a:latin typeface="Segoe UI" pitchFamily="34" charset="0"/>
+                <a:ea typeface="Segoe UI" pitchFamily="34" charset="-122"/>
+                <a:cs typeface="Segoe UI" pitchFamily="34" charset="-120"/>
               </a:rPr>
               <a:t>Train examples</a:t>
             </a:r>
@@ -14562,7 +14562,7 @@
             </a:avLst>
           </a:prstGeom>
           <a:solidFill>
-            <a:srgbClr val="001D3D"/>
+            <a:srgbClr val="0F172A"/>
           </a:solidFill>
           <a:ln/>
         </p:spPr>
@@ -14594,11 +14594,11 @@
             <a:r>
               <a:rPr lang="en-US" sz="2000" b="1" dirty="0">
                 <a:solidFill>
-                  <a:srgbClr val="FFC300"/>
-                </a:solidFill>
-                <a:latin typeface="Arial" pitchFamily="34" charset="0"/>
-                <a:ea typeface="Arial" pitchFamily="34" charset="-122"/>
-                <a:cs typeface="Arial" pitchFamily="34" charset="-120"/>
+                  <a:srgbClr val="00EAFF"/>
+                </a:solidFill>
+                <a:latin typeface="Segoe UI" pitchFamily="34" charset="0"/>
+                <a:ea typeface="Segoe UI" pitchFamily="34" charset="-122"/>
+                <a:cs typeface="Segoe UI" pitchFamily="34" charset="-120"/>
               </a:rPr>
               <a:t>15</a:t>
             </a:r>
@@ -14633,11 +14633,11 @@
             <a:r>
               <a:rPr lang="en-US" sz="900" dirty="0">
                 <a:solidFill>
-                  <a:srgbClr val="9A8C98"/>
-                </a:solidFill>
-                <a:latin typeface="Arial" pitchFamily="34" charset="0"/>
-                <a:ea typeface="Arial" pitchFamily="34" charset="-122"/>
-                <a:cs typeface="Arial" pitchFamily="34" charset="-120"/>
+                  <a:srgbClr val="94A3B8"/>
+                </a:solidFill>
+                <a:latin typeface="Segoe UI" pitchFamily="34" charset="0"/>
+                <a:ea typeface="Segoe UI" pitchFamily="34" charset="-122"/>
+                <a:cs typeface="Segoe UI" pitchFamily="34" charset="-120"/>
               </a:rPr>
               <a:t>Held-out test</a:t>
             </a:r>
@@ -14662,7 +14662,7 @@
             </a:avLst>
           </a:prstGeom>
           <a:solidFill>
-            <a:srgbClr val="001D3D"/>
+            <a:srgbClr val="0F172A"/>
           </a:solidFill>
           <a:ln/>
         </p:spPr>
@@ -14694,11 +14694,11 @@
             <a:r>
               <a:rPr lang="en-US" sz="2000" b="1" dirty="0">
                 <a:solidFill>
-                  <a:srgbClr val="FFC300"/>
-                </a:solidFill>
-                <a:latin typeface="Arial" pitchFamily="34" charset="0"/>
-                <a:ea typeface="Arial" pitchFamily="34" charset="-122"/>
-                <a:cs typeface="Arial" pitchFamily="34" charset="-120"/>
+                  <a:srgbClr val="00EAFF"/>
+                </a:solidFill>
+                <a:latin typeface="Segoe UI" pitchFamily="34" charset="0"/>
+                <a:ea typeface="Segoe UI" pitchFamily="34" charset="-122"/>
+                <a:cs typeface="Segoe UI" pitchFamily="34" charset="-120"/>
               </a:rPr>
               <a:t>1.9GB</a:t>
             </a:r>
@@ -14733,11 +14733,11 @@
             <a:r>
               <a:rPr lang="en-US" sz="900" dirty="0">
                 <a:solidFill>
-                  <a:srgbClr val="9A8C98"/>
-                </a:solidFill>
-                <a:latin typeface="Arial" pitchFamily="34" charset="0"/>
-                <a:ea typeface="Arial" pitchFamily="34" charset="-122"/>
-                <a:cs typeface="Arial" pitchFamily="34" charset="-120"/>
+                  <a:srgbClr val="94A3B8"/>
+                </a:solidFill>
+                <a:latin typeface="Segoe UI" pitchFamily="34" charset="0"/>
+                <a:ea typeface="Segoe UI" pitchFamily="34" charset="-122"/>
+                <a:cs typeface="Segoe UI" pitchFamily="34" charset="-120"/>
               </a:rPr>
               <a:t>GGUF Q4_K_M</a:t>
             </a:r>
@@ -14762,7 +14762,7 @@
             </a:avLst>
           </a:prstGeom>
           <a:solidFill>
-            <a:srgbClr val="001D3D"/>
+            <a:srgbClr val="0F172A"/>
           </a:solidFill>
           <a:ln/>
         </p:spPr>
@@ -14794,11 +14794,11 @@
             <a:r>
               <a:rPr lang="en-US" sz="2000" b="1" dirty="0">
                 <a:solidFill>
-                  <a:srgbClr val="FFC300"/>
-                </a:solidFill>
-                <a:latin typeface="Arial" pitchFamily="34" charset="0"/>
-                <a:ea typeface="Arial" pitchFamily="34" charset="-122"/>
-                <a:cs typeface="Arial" pitchFamily="34" charset="-120"/>
+                  <a:srgbClr val="00EAFF"/>
+                </a:solidFill>
+                <a:latin typeface="Segoe UI" pitchFamily="34" charset="0"/>
+                <a:ea typeface="Segoe UI" pitchFamily="34" charset="-122"/>
+                <a:cs typeface="Segoe UI" pitchFamily="34" charset="-120"/>
               </a:rPr>
               <a:t>28min</a:t>
             </a:r>
@@ -14833,11 +14833,11 @@
             <a:r>
               <a:rPr lang="en-US" sz="900" dirty="0">
                 <a:solidFill>
-                  <a:srgbClr val="9A8C98"/>
-                </a:solidFill>
-                <a:latin typeface="Arial" pitchFamily="34" charset="0"/>
-                <a:ea typeface="Arial" pitchFamily="34" charset="-122"/>
-                <a:cs typeface="Arial" pitchFamily="34" charset="-120"/>
+                  <a:srgbClr val="94A3B8"/>
+                </a:solidFill>
+                <a:latin typeface="Segoe UI" pitchFamily="34" charset="0"/>
+                <a:ea typeface="Segoe UI" pitchFamily="34" charset="-122"/>
+                <a:cs typeface="Segoe UI" pitchFamily="34" charset="-120"/>
               </a:rPr>
               <a:t>Training time</a:t>
             </a:r>
@@ -14872,11 +14872,11 @@
             <a:r>
               <a:rPr lang="en-US" sz="1400" b="1" dirty="0">
                 <a:solidFill>
-                  <a:srgbClr val="FFD60A"/>
-                </a:solidFill>
-                <a:latin typeface="Arial" pitchFamily="34" charset="0"/>
-                <a:ea typeface="Arial" pitchFamily="34" charset="-122"/>
-                <a:cs typeface="Arial" pitchFamily="34" charset="-120"/>
+                  <a:srgbClr val="F8FAFC"/>
+                </a:solidFill>
+                <a:latin typeface="Segoe UI" pitchFamily="34" charset="0"/>
+                <a:ea typeface="Segoe UI" pitchFamily="34" charset="-122"/>
+                <a:cs typeface="Segoe UI" pitchFamily="34" charset="-120"/>
               </a:rPr>
               <a:t>A/B Evaluation - Base vs Fine-tuned</a:t>
             </a:r>
@@ -14899,11 +14899,11 @@
             <a:avLst/>
           </a:prstGeom>
           <a:solidFill>
-            <a:srgbClr val="001D3D"/>
+            <a:srgbClr val="0F172A"/>
           </a:solidFill>
           <a:ln w="6350">
             <a:solidFill>
-              <a:srgbClr val="001D3D"/>
+              <a:srgbClr val="0F172A"/>
             </a:solidFill>
             <a:prstDash val="solid"/>
           </a:ln>
@@ -14936,11 +14936,11 @@
             <a:r>
               <a:rPr lang="en-US" sz="1100" b="1" dirty="0">
                 <a:solidFill>
-                  <a:srgbClr val="FFC300"/>
-                </a:solidFill>
-                <a:latin typeface="Arial" pitchFamily="34" charset="0"/>
-                <a:ea typeface="Arial" pitchFamily="34" charset="-122"/>
-                <a:cs typeface="Arial" pitchFamily="34" charset="-120"/>
+                  <a:srgbClr val="00EAFF"/>
+                </a:solidFill>
+                <a:latin typeface="Segoe UI" pitchFamily="34" charset="0"/>
+                <a:ea typeface="Segoe UI" pitchFamily="34" charset="-122"/>
+                <a:cs typeface="Segoe UI" pitchFamily="34" charset="-120"/>
               </a:rPr>
               <a:t>Metric</a:t>
             </a:r>
@@ -14963,11 +14963,11 @@
             <a:avLst/>
           </a:prstGeom>
           <a:solidFill>
-            <a:srgbClr val="001D3D"/>
+            <a:srgbClr val="0F172A"/>
           </a:solidFill>
           <a:ln w="6350">
             <a:solidFill>
-              <a:srgbClr val="001D3D"/>
+              <a:srgbClr val="0F172A"/>
             </a:solidFill>
             <a:prstDash val="solid"/>
           </a:ln>
@@ -15000,11 +15000,11 @@
             <a:r>
               <a:rPr lang="en-US" sz="1100" b="1" dirty="0">
                 <a:solidFill>
-                  <a:srgbClr val="FFC300"/>
-                </a:solidFill>
-                <a:latin typeface="Arial" pitchFamily="34" charset="0"/>
-                <a:ea typeface="Arial" pitchFamily="34" charset="-122"/>
-                <a:cs typeface="Arial" pitchFamily="34" charset="-120"/>
+                  <a:srgbClr val="00EAFF"/>
+                </a:solidFill>
+                <a:latin typeface="Segoe UI" pitchFamily="34" charset="0"/>
+                <a:ea typeface="Segoe UI" pitchFamily="34" charset="-122"/>
+                <a:cs typeface="Segoe UI" pitchFamily="34" charset="-120"/>
               </a:rPr>
               <a:t>Base (qwen2.5:3b)</a:t>
             </a:r>
@@ -15027,11 +15027,11 @@
             <a:avLst/>
           </a:prstGeom>
           <a:solidFill>
-            <a:srgbClr val="001D3D"/>
+            <a:srgbClr val="0F172A"/>
           </a:solidFill>
           <a:ln w="6350">
             <a:solidFill>
-              <a:srgbClr val="001D3D"/>
+              <a:srgbClr val="0F172A"/>
             </a:solidFill>
             <a:prstDash val="solid"/>
           </a:ln>
@@ -15064,11 +15064,11 @@
             <a:r>
               <a:rPr lang="en-US" sz="1100" b="1" dirty="0">
                 <a:solidFill>
-                  <a:srgbClr val="FFC300"/>
-                </a:solidFill>
-                <a:latin typeface="Arial" pitchFamily="34" charset="0"/>
-                <a:ea typeface="Arial" pitchFamily="34" charset="-122"/>
-                <a:cs typeface="Arial" pitchFamily="34" charset="-120"/>
+                  <a:srgbClr val="00EAFF"/>
+                </a:solidFill>
+                <a:latin typeface="Segoe UI" pitchFamily="34" charset="0"/>
+                <a:ea typeface="Segoe UI" pitchFamily="34" charset="-122"/>
+                <a:cs typeface="Segoe UI" pitchFamily="34" charset="-120"/>
               </a:rPr>
               <a:t>Fine-tuned</a:t>
             </a:r>
@@ -15091,11 +15091,11 @@
             <a:avLst/>
           </a:prstGeom>
           <a:solidFill>
-            <a:srgbClr val="001D3D"/>
+            <a:srgbClr val="0F172A"/>
           </a:solidFill>
           <a:ln w="6350">
             <a:solidFill>
-              <a:srgbClr val="001D3D"/>
+              <a:srgbClr val="0F172A"/>
             </a:solidFill>
             <a:prstDash val="solid"/>
           </a:ln>
@@ -15128,11 +15128,11 @@
             <a:r>
               <a:rPr lang="en-US" sz="1200" dirty="0">
                 <a:solidFill>
-                  <a:srgbClr val="FFD60A"/>
-                </a:solidFill>
-                <a:latin typeface="Arial" pitchFamily="34" charset="0"/>
-                <a:ea typeface="Arial" pitchFamily="34" charset="-122"/>
-                <a:cs typeface="Arial" pitchFamily="34" charset="-120"/>
+                  <a:srgbClr val="F8FAFC"/>
+                </a:solidFill>
+                <a:latin typeface="Segoe UI" pitchFamily="34" charset="0"/>
+                <a:ea typeface="Segoe UI" pitchFamily="34" charset="-122"/>
+                <a:cs typeface="Segoe UI" pitchFamily="34" charset="-120"/>
               </a:rPr>
               <a:t>Tool call rate</a:t>
             </a:r>
@@ -15155,11 +15155,11 @@
             <a:avLst/>
           </a:prstGeom>
           <a:solidFill>
-            <a:srgbClr val="001D3D"/>
+            <a:srgbClr val="0F172A"/>
           </a:solidFill>
           <a:ln w="6350">
             <a:solidFill>
-              <a:srgbClr val="001D3D"/>
+              <a:srgbClr val="0F172A"/>
             </a:solidFill>
             <a:prstDash val="solid"/>
           </a:ln>
@@ -15192,11 +15192,11 @@
             <a:r>
               <a:rPr lang="en-US" sz="1200" dirty="0">
                 <a:solidFill>
-                  <a:srgbClr val="FFC300"/>
-                </a:solidFill>
-                <a:latin typeface="Arial" pitchFamily="34" charset="0"/>
-                <a:ea typeface="Arial" pitchFamily="34" charset="-122"/>
-                <a:cs typeface="Arial" pitchFamily="34" charset="-120"/>
+                  <a:srgbClr val="00EAFF"/>
+                </a:solidFill>
+                <a:latin typeface="Segoe UI" pitchFamily="34" charset="0"/>
+                <a:ea typeface="Segoe UI" pitchFamily="34" charset="-122"/>
+                <a:cs typeface="Segoe UI" pitchFamily="34" charset="-120"/>
               </a:rPr>
               <a:t>7%</a:t>
             </a:r>
@@ -15219,11 +15219,11 @@
             <a:avLst/>
           </a:prstGeom>
           <a:solidFill>
-            <a:srgbClr val="001D3D"/>
+            <a:srgbClr val="0F172A"/>
           </a:solidFill>
           <a:ln w="6350">
             <a:solidFill>
-              <a:srgbClr val="001D3D"/>
+              <a:srgbClr val="0F172A"/>
             </a:solidFill>
             <a:prstDash val="solid"/>
           </a:ln>
@@ -15256,11 +15256,11 @@
             <a:r>
               <a:rPr lang="en-US" sz="1200" dirty="0">
                 <a:solidFill>
-                  <a:srgbClr val="FFC300"/>
-                </a:solidFill>
-                <a:latin typeface="Arial" pitchFamily="34" charset="0"/>
-                <a:ea typeface="Arial" pitchFamily="34" charset="-122"/>
-                <a:cs typeface="Arial" pitchFamily="34" charset="-120"/>
+                  <a:srgbClr val="00EAFF"/>
+                </a:solidFill>
+                <a:latin typeface="Segoe UI" pitchFamily="34" charset="0"/>
+                <a:ea typeface="Segoe UI" pitchFamily="34" charset="-122"/>
+                <a:cs typeface="Segoe UI" pitchFamily="34" charset="-120"/>
               </a:rPr>
               <a:t>7%</a:t>
             </a:r>
@@ -15283,11 +15283,11 @@
             <a:avLst/>
           </a:prstGeom>
           <a:solidFill>
-            <a:srgbClr val="000814"/>
+            <a:srgbClr val="020617"/>
           </a:solidFill>
           <a:ln w="6350">
             <a:solidFill>
-              <a:srgbClr val="001D3D"/>
+              <a:srgbClr val="0F172A"/>
             </a:solidFill>
             <a:prstDash val="solid"/>
           </a:ln>
@@ -15320,11 +15320,11 @@
             <a:r>
               <a:rPr lang="en-US" sz="1200" dirty="0">
                 <a:solidFill>
-                  <a:srgbClr val="FFD60A"/>
-                </a:solidFill>
-                <a:latin typeface="Arial" pitchFamily="34" charset="0"/>
-                <a:ea typeface="Arial" pitchFamily="34" charset="-122"/>
-                <a:cs typeface="Arial" pitchFamily="34" charset="-120"/>
+                  <a:srgbClr val="F8FAFC"/>
+                </a:solidFill>
+                <a:latin typeface="Segoe UI" pitchFamily="34" charset="0"/>
+                <a:ea typeface="Segoe UI" pitchFamily="34" charset="-122"/>
+                <a:cs typeface="Segoe UI" pitchFamily="34" charset="-120"/>
               </a:rPr>
               <a:t>Avg iterations/task</a:t>
             </a:r>
@@ -15347,11 +15347,11 @@
             <a:avLst/>
           </a:prstGeom>
           <a:solidFill>
-            <a:srgbClr val="000814"/>
+            <a:srgbClr val="020617"/>
           </a:solidFill>
           <a:ln w="6350">
             <a:solidFill>
-              <a:srgbClr val="001D3D"/>
+              <a:srgbClr val="0F172A"/>
             </a:solidFill>
             <a:prstDash val="solid"/>
           </a:ln>
@@ -15384,11 +15384,11 @@
             <a:r>
               <a:rPr lang="en-US" sz="1200" dirty="0">
                 <a:solidFill>
-                  <a:srgbClr val="FFD60A"/>
-                </a:solidFill>
-                <a:latin typeface="Arial" pitchFamily="34" charset="0"/>
-                <a:ea typeface="Arial" pitchFamily="34" charset="-122"/>
-                <a:cs typeface="Arial" pitchFamily="34" charset="-120"/>
+                  <a:srgbClr val="F8FAFC"/>
+                </a:solidFill>
+                <a:latin typeface="Segoe UI" pitchFamily="34" charset="0"/>
+                <a:ea typeface="Segoe UI" pitchFamily="34" charset="-122"/>
+                <a:cs typeface="Segoe UI" pitchFamily="34" charset="-120"/>
               </a:rPr>
               <a:t>2.2</a:t>
             </a:r>
@@ -15411,11 +15411,11 @@
             <a:avLst/>
           </a:prstGeom>
           <a:solidFill>
-            <a:srgbClr val="000814"/>
+            <a:srgbClr val="020617"/>
           </a:solidFill>
           <a:ln w="6350">
             <a:solidFill>
-              <a:srgbClr val="001D3D"/>
+              <a:srgbClr val="0F172A"/>
             </a:solidFill>
             <a:prstDash val="solid"/>
           </a:ln>
@@ -15448,11 +15448,11 @@
             <a:r>
               <a:rPr lang="en-US" sz="1200" dirty="0">
                 <a:solidFill>
-                  <a:srgbClr val="FFD60A"/>
-                </a:solidFill>
-                <a:latin typeface="Arial" pitchFamily="34" charset="0"/>
-                <a:ea typeface="Arial" pitchFamily="34" charset="-122"/>
-                <a:cs typeface="Arial" pitchFamily="34" charset="-120"/>
+                  <a:srgbClr val="F8FAFC"/>
+                </a:solidFill>
+                <a:latin typeface="Segoe UI" pitchFamily="34" charset="0"/>
+                <a:ea typeface="Segoe UI" pitchFamily="34" charset="-122"/>
+                <a:cs typeface="Segoe UI" pitchFamily="34" charset="-120"/>
               </a:rPr>
               <a:t>2.0</a:t>
             </a:r>
@@ -15475,11 +15475,11 @@
             <a:avLst/>
           </a:prstGeom>
           <a:solidFill>
-            <a:srgbClr val="001D3D"/>
+            <a:srgbClr val="0F172A"/>
           </a:solidFill>
           <a:ln w="6350">
             <a:solidFill>
-              <a:srgbClr val="001D3D"/>
+              <a:srgbClr val="0F172A"/>
             </a:solidFill>
             <a:prstDash val="solid"/>
           </a:ln>
@@ -15512,11 +15512,11 @@
             <a:r>
               <a:rPr lang="en-US" sz="1200" dirty="0">
                 <a:solidFill>
-                  <a:srgbClr val="FFD60A"/>
-                </a:solidFill>
-                <a:latin typeface="Arial" pitchFamily="34" charset="0"/>
-                <a:ea typeface="Arial" pitchFamily="34" charset="-122"/>
-                <a:cs typeface="Arial" pitchFamily="34" charset="-120"/>
+                  <a:srgbClr val="F8FAFC"/>
+                </a:solidFill>
+                <a:latin typeface="Segoe UI" pitchFamily="34" charset="0"/>
+                <a:ea typeface="Segoe UI" pitchFamily="34" charset="-122"/>
+                <a:cs typeface="Segoe UI" pitchFamily="34" charset="-120"/>
               </a:rPr>
               <a:t>Response length</a:t>
             </a:r>
@@ -15539,11 +15539,11 @@
             <a:avLst/>
           </a:prstGeom>
           <a:solidFill>
-            <a:srgbClr val="001D3D"/>
+            <a:srgbClr val="0F172A"/>
           </a:solidFill>
           <a:ln w="6350">
             <a:solidFill>
-              <a:srgbClr val="001D3D"/>
+              <a:srgbClr val="0F172A"/>
             </a:solidFill>
             <a:prstDash val="solid"/>
           </a:ln>
@@ -15576,11 +15576,11 @@
             <a:r>
               <a:rPr lang="en-US" sz="1200" dirty="0">
                 <a:solidFill>
-                  <a:srgbClr val="FFD60A"/>
-                </a:solidFill>
-                <a:latin typeface="Arial" pitchFamily="34" charset="0"/>
-                <a:ea typeface="Arial" pitchFamily="34" charset="-122"/>
-                <a:cs typeface="Arial" pitchFamily="34" charset="-120"/>
+                  <a:srgbClr val="F8FAFC"/>
+                </a:solidFill>
+                <a:latin typeface="Segoe UI" pitchFamily="34" charset="0"/>
+                <a:ea typeface="Segoe UI" pitchFamily="34" charset="-122"/>
+                <a:cs typeface="Segoe UI" pitchFamily="34" charset="-120"/>
               </a:rPr>
               <a:t>315 chars</a:t>
             </a:r>
@@ -15603,11 +15603,11 @@
             <a:avLst/>
           </a:prstGeom>
           <a:solidFill>
-            <a:srgbClr val="001D3D"/>
+            <a:srgbClr val="0F172A"/>
           </a:solidFill>
           <a:ln w="6350">
             <a:solidFill>
-              <a:srgbClr val="001D3D"/>
+              <a:srgbClr val="0F172A"/>
             </a:solidFill>
             <a:prstDash val="solid"/>
           </a:ln>
@@ -15640,11 +15640,11 @@
             <a:r>
               <a:rPr lang="en-US" sz="1200" dirty="0">
                 <a:solidFill>
-                  <a:srgbClr val="FFD60A"/>
-                </a:solidFill>
-                <a:latin typeface="Arial" pitchFamily="34" charset="0"/>
-                <a:ea typeface="Arial" pitchFamily="34" charset="-122"/>
-                <a:cs typeface="Arial" pitchFamily="34" charset="-120"/>
+                  <a:srgbClr val="F8FAFC"/>
+                </a:solidFill>
+                <a:latin typeface="Segoe UI" pitchFamily="34" charset="0"/>
+                <a:ea typeface="Segoe UI" pitchFamily="34" charset="-122"/>
+                <a:cs typeface="Segoe UI" pitchFamily="34" charset="-120"/>
               </a:rPr>
               <a:t>279 chars</a:t>
             </a:r>
@@ -15667,11 +15667,11 @@
             <a:avLst/>
           </a:prstGeom>
           <a:solidFill>
-            <a:srgbClr val="000814"/>
+            <a:srgbClr val="020617"/>
           </a:solidFill>
           <a:ln w="6350">
             <a:solidFill>
-              <a:srgbClr val="001D3D"/>
+              <a:srgbClr val="0F172A"/>
             </a:solidFill>
             <a:prstDash val="solid"/>
           </a:ln>
@@ -15704,11 +15704,11 @@
             <a:r>
               <a:rPr lang="en-US" sz="1200" dirty="0">
                 <a:solidFill>
-                  <a:srgbClr val="FFD60A"/>
-                </a:solidFill>
-                <a:latin typeface="Arial" pitchFamily="34" charset="0"/>
-                <a:ea typeface="Arial" pitchFamily="34" charset="-122"/>
-                <a:cs typeface="Arial" pitchFamily="34" charset="-120"/>
+                  <a:srgbClr val="F8FAFC"/>
+                </a:solidFill>
+                <a:latin typeface="Segoe UI" pitchFamily="34" charset="0"/>
+                <a:ea typeface="Segoe UI" pitchFamily="34" charset="-122"/>
+                <a:cs typeface="Segoe UI" pitchFamily="34" charset="-120"/>
               </a:rPr>
               <a:t>RAG answer relevance</a:t>
             </a:r>
@@ -15731,11 +15731,11 @@
             <a:avLst/>
           </a:prstGeom>
           <a:solidFill>
-            <a:srgbClr val="000814"/>
+            <a:srgbClr val="020617"/>
           </a:solidFill>
           <a:ln w="6350">
             <a:solidFill>
-              <a:srgbClr val="001D3D"/>
+              <a:srgbClr val="0F172A"/>
             </a:solidFill>
             <a:prstDash val="solid"/>
           </a:ln>
@@ -15768,11 +15768,11 @@
             <a:r>
               <a:rPr lang="en-US" sz="1200" dirty="0">
                 <a:solidFill>
-                  <a:srgbClr val="FFD60A"/>
-                </a:solidFill>
-                <a:latin typeface="Arial" pitchFamily="34" charset="0"/>
-                <a:ea typeface="Arial" pitchFamily="34" charset="-122"/>
-                <a:cs typeface="Arial" pitchFamily="34" charset="-120"/>
+                  <a:srgbClr val="F8FAFC"/>
+                </a:solidFill>
+                <a:latin typeface="Segoe UI" pitchFamily="34" charset="0"/>
+                <a:ea typeface="Segoe UI" pitchFamily="34" charset="-122"/>
+                <a:cs typeface="Segoe UI" pitchFamily="34" charset="-120"/>
               </a:rPr>
               <a:t>baseline</a:t>
             </a:r>
@@ -15795,11 +15795,11 @@
             <a:avLst/>
           </a:prstGeom>
           <a:solidFill>
-            <a:srgbClr val="000814"/>
+            <a:srgbClr val="020617"/>
           </a:solidFill>
           <a:ln w="6350">
             <a:solidFill>
-              <a:srgbClr val="001D3D"/>
+              <a:srgbClr val="0F172A"/>
             </a:solidFill>
             <a:prstDash val="solid"/>
           </a:ln>
@@ -15834,9 +15834,9 @@
                 <a:solidFill>
                   <a:srgbClr val="10B981"/>
                 </a:solidFill>
-                <a:latin typeface="Arial" pitchFamily="34" charset="0"/>
-                <a:ea typeface="Arial" pitchFamily="34" charset="-122"/>
-                <a:cs typeface="Arial" pitchFamily="34" charset="-120"/>
+                <a:latin typeface="Segoe UI" pitchFamily="34" charset="0"/>
+                <a:ea typeface="Segoe UI" pitchFamily="34" charset="-122"/>
+                <a:cs typeface="Segoe UI" pitchFamily="34" charset="-120"/>
               </a:rPr>
               <a:t>+83%</a:t>
             </a:r>
@@ -15861,7 +15861,7 @@
             </a:avLst>
           </a:prstGeom>
           <a:solidFill>
-            <a:srgbClr val="001D3D"/>
+            <a:srgbClr val="0F172A"/>
           </a:solidFill>
           <a:ln/>
         </p:spPr>
@@ -15893,11 +15893,11 @@
             <a:r>
               <a:rPr lang="en-US" sz="1200" b="1" dirty="0">
                 <a:solidFill>
-                  <a:srgbClr val="FFC300"/>
-                </a:solidFill>
-                <a:latin typeface="Arial" pitchFamily="34" charset="0"/>
-                <a:ea typeface="Arial" pitchFamily="34" charset="-122"/>
-                <a:cs typeface="Arial" pitchFamily="34" charset="-120"/>
+                  <a:srgbClr val="00EAFF"/>
+                </a:solidFill>
+                <a:latin typeface="Segoe UI" pitchFamily="34" charset="0"/>
+                <a:ea typeface="Segoe UI" pitchFamily="34" charset="-122"/>
+                <a:cs typeface="Segoe UI" pitchFamily="34" charset="-120"/>
               </a:rPr>
               <a:t>Honest Finding</a:t>
             </a:r>
@@ -15932,11 +15932,11 @@
             <a:r>
               <a:rPr lang="en-US" sz="1100" dirty="0">
                 <a:solidFill>
-                  <a:srgbClr val="9A8C98"/>
-                </a:solidFill>
-                <a:latin typeface="Arial" pitchFamily="34" charset="0"/>
-                <a:ea typeface="Arial" pitchFamily="34" charset="-122"/>
-                <a:cs typeface="Arial" pitchFamily="34" charset="-120"/>
+                  <a:srgbClr val="94A3B8"/>
+                </a:solidFill>
+                <a:latin typeface="Segoe UI" pitchFamily="34" charset="0"/>
+                <a:ea typeface="Segoe UI" pitchFamily="34" charset="-122"/>
+                <a:cs typeface="Segoe UI" pitchFamily="34" charset="-120"/>
               </a:rPr>
               <a:t>qwen2.5:3b base already knows the tool-calling format. Fine-tuning did not add new capability - it reduced response length by 11% and iterations by 9%. Zero regression in tool call rate.</a:t>
             </a:r>
@@ -15971,11 +15971,11 @@
             <a:r>
               <a:rPr lang="en-US" sz="1000" dirty="0">
                 <a:solidFill>
-                  <a:srgbClr val="9A8C98"/>
-                </a:solidFill>
-                <a:latin typeface="Arial" pitchFamily="34" charset="0"/>
-                <a:ea typeface="Arial" pitchFamily="34" charset="-122"/>
-                <a:cs typeface="Arial" pitchFamily="34" charset="-120"/>
+                  <a:srgbClr val="94A3B8"/>
+                </a:solidFill>
+                <a:latin typeface="Segoe UI" pitchFamily="34" charset="0"/>
+                <a:ea typeface="Segoe UI" pitchFamily="34" charset="-122"/>
+                <a:cs typeface="Segoe UI" pitchFamily="34" charset="-120"/>
               </a:rPr>
               <a:t>08</a:t>
             </a:r>
@@ -16023,7 +16023,7 @@
             <a:avLst/>
           </a:prstGeom>
           <a:solidFill>
-            <a:srgbClr val="000814"/>
+            <a:srgbClr val="020617"/>
           </a:solidFill>
           <a:ln/>
         </p:spPr>
@@ -16055,13 +16055,13 @@
             <a:r>
               <a:rPr lang="en-US" sz="12000" b="1" dirty="0">
                 <a:solidFill>
-                  <a:srgbClr val="FFC300">
+                  <a:srgbClr val="00EAFF">
                     <a:alpha val="85000"/>
                   </a:srgbClr>
                 </a:solidFill>
-                <a:latin typeface="Arial" pitchFamily="34" charset="0"/>
-                <a:ea typeface="Arial" pitchFamily="34" charset="-122"/>
-                <a:cs typeface="Arial" pitchFamily="34" charset="-120"/>
+                <a:latin typeface="Segoe UI" pitchFamily="34" charset="0"/>
+                <a:ea typeface="Segoe UI" pitchFamily="34" charset="-122"/>
+                <a:cs typeface="Segoe UI" pitchFamily="34" charset="-120"/>
               </a:rPr>
               <a:t>04</a:t>
             </a:r>
@@ -16096,11 +16096,11 @@
             <a:r>
               <a:rPr lang="en-US" sz="4200" b="1" dirty="0">
                 <a:solidFill>
-                  <a:srgbClr val="FFD60A"/>
-                </a:solidFill>
-                <a:latin typeface="Arial" pitchFamily="34" charset="0"/>
-                <a:ea typeface="Arial" pitchFamily="34" charset="-122"/>
-                <a:cs typeface="Arial" pitchFamily="34" charset="-120"/>
+                  <a:srgbClr val="F8FAFC"/>
+                </a:solidFill>
+                <a:latin typeface="Segoe UI" pitchFamily="34" charset="0"/>
+                <a:ea typeface="Segoe UI" pitchFamily="34" charset="-122"/>
+                <a:cs typeface="Segoe UI" pitchFamily="34" charset="-120"/>
               </a:rPr>
               <a:t>Tool Calling Agent</a:t>
             </a:r>
@@ -16123,7 +16123,7 @@
             <a:avLst/>
           </a:prstGeom>
           <a:solidFill>
-            <a:srgbClr val="FFC300"/>
+            <a:srgbClr val="00EAFF"/>
           </a:solidFill>
           <a:ln/>
         </p:spPr>
@@ -16155,11 +16155,11 @@
             <a:r>
               <a:rPr lang="en-US" sz="1400" dirty="0">
                 <a:solidFill>
-                  <a:srgbClr val="9A8C98"/>
-                </a:solidFill>
-                <a:latin typeface="Arial" pitchFamily="34" charset="0"/>
-                <a:ea typeface="Arial" pitchFamily="34" charset="-122"/>
-                <a:cs typeface="Arial" pitchFamily="34" charset="-120"/>
+                  <a:srgbClr val="94A3B8"/>
+                </a:solidFill>
+                <a:latin typeface="Segoe UI" pitchFamily="34" charset="0"/>
+                <a:ea typeface="Segoe UI" pitchFamily="34" charset="-122"/>
+                <a:cs typeface="Segoe UI" pitchFamily="34" charset="-120"/>
               </a:rPr>
               <a:t>6 tools with real backends  |  Native Ollama tool calling  |  No LangChain</a:t>
             </a:r>
@@ -16194,11 +16194,11 @@
             <a:r>
               <a:rPr lang="en-US" sz="1000" dirty="0">
                 <a:solidFill>
-                  <a:srgbClr val="9A8C98"/>
-                </a:solidFill>
-                <a:latin typeface="Arial" pitchFamily="34" charset="0"/>
-                <a:ea typeface="Arial" pitchFamily="34" charset="-122"/>
-                <a:cs typeface="Arial" pitchFamily="34" charset="-120"/>
+                  <a:srgbClr val="94A3B8"/>
+                </a:solidFill>
+                <a:latin typeface="Segoe UI" pitchFamily="34" charset="0"/>
+                <a:ea typeface="Segoe UI" pitchFamily="34" charset="-122"/>
+                <a:cs typeface="Segoe UI" pitchFamily="34" charset="-120"/>
               </a:rPr>
               <a:t>09</a:t>
             </a:r>
